--- a/Bank Loan PPT Power BI.pptx
+++ b/Bank Loan PPT Power BI.pptx
@@ -2,7 +2,7 @@
 <file path=ppt/presentation.xml><?xml version="1.0" encoding="utf-8"?>
 <p:presentation xmlns:a="http://schemas.openxmlformats.org/drawingml/2006/main" xmlns:r="http://schemas.openxmlformats.org/officeDocument/2006/relationships" xmlns:p="http://schemas.openxmlformats.org/presentationml/2006/main" saveSubsetFonts="1">
   <p:sldMasterIdLst>
-    <p:sldMasterId id="2147483648" r:id="rId1"/>
+    <p:sldMasterId id="2147483785" r:id="rId1"/>
   </p:sldMasterIdLst>
   <p:sldIdLst>
     <p:sldId id="260" r:id="rId2"/>
@@ -25,7 +25,7 @@
     <a:defPPr>
       <a:defRPr lang="en-US"/>
     </a:defPPr>
-    <a:lvl1pPr marL="0" algn="l" defTabSz="914400" rtl="0" eaLnBrk="1" latinLnBrk="0" hangingPunct="1">
+    <a:lvl1pPr marL="0" algn="l" defTabSz="457200" rtl="0" eaLnBrk="1" latinLnBrk="0" hangingPunct="1">
       <a:defRPr sz="1800" kern="1200">
         <a:solidFill>
           <a:schemeClr val="tx1"/>
@@ -35,7 +35,7 @@
         <a:cs typeface="+mn-cs"/>
       </a:defRPr>
     </a:lvl1pPr>
-    <a:lvl2pPr marL="457200" algn="l" defTabSz="914400" rtl="0" eaLnBrk="1" latinLnBrk="0" hangingPunct="1">
+    <a:lvl2pPr marL="457200" algn="l" defTabSz="457200" rtl="0" eaLnBrk="1" latinLnBrk="0" hangingPunct="1">
       <a:defRPr sz="1800" kern="1200">
         <a:solidFill>
           <a:schemeClr val="tx1"/>
@@ -45,7 +45,7 @@
         <a:cs typeface="+mn-cs"/>
       </a:defRPr>
     </a:lvl2pPr>
-    <a:lvl3pPr marL="914400" algn="l" defTabSz="914400" rtl="0" eaLnBrk="1" latinLnBrk="0" hangingPunct="1">
+    <a:lvl3pPr marL="914400" algn="l" defTabSz="457200" rtl="0" eaLnBrk="1" latinLnBrk="0" hangingPunct="1">
       <a:defRPr sz="1800" kern="1200">
         <a:solidFill>
           <a:schemeClr val="tx1"/>
@@ -55,7 +55,7 @@
         <a:cs typeface="+mn-cs"/>
       </a:defRPr>
     </a:lvl3pPr>
-    <a:lvl4pPr marL="1371600" algn="l" defTabSz="914400" rtl="0" eaLnBrk="1" latinLnBrk="0" hangingPunct="1">
+    <a:lvl4pPr marL="1371600" algn="l" defTabSz="457200" rtl="0" eaLnBrk="1" latinLnBrk="0" hangingPunct="1">
       <a:defRPr sz="1800" kern="1200">
         <a:solidFill>
           <a:schemeClr val="tx1"/>
@@ -65,7 +65,7 @@
         <a:cs typeface="+mn-cs"/>
       </a:defRPr>
     </a:lvl4pPr>
-    <a:lvl5pPr marL="1828800" algn="l" defTabSz="914400" rtl="0" eaLnBrk="1" latinLnBrk="0" hangingPunct="1">
+    <a:lvl5pPr marL="1828800" algn="l" defTabSz="457200" rtl="0" eaLnBrk="1" latinLnBrk="0" hangingPunct="1">
       <a:defRPr sz="1800" kern="1200">
         <a:solidFill>
           <a:schemeClr val="tx1"/>
@@ -75,7 +75,7 @@
         <a:cs typeface="+mn-cs"/>
       </a:defRPr>
     </a:lvl5pPr>
-    <a:lvl6pPr marL="2286000" algn="l" defTabSz="914400" rtl="0" eaLnBrk="1" latinLnBrk="0" hangingPunct="1">
+    <a:lvl6pPr marL="2286000" algn="l" defTabSz="457200" rtl="0" eaLnBrk="1" latinLnBrk="0" hangingPunct="1">
       <a:defRPr sz="1800" kern="1200">
         <a:solidFill>
           <a:schemeClr val="tx1"/>
@@ -85,7 +85,7 @@
         <a:cs typeface="+mn-cs"/>
       </a:defRPr>
     </a:lvl6pPr>
-    <a:lvl7pPr marL="2743200" algn="l" defTabSz="914400" rtl="0" eaLnBrk="1" latinLnBrk="0" hangingPunct="1">
+    <a:lvl7pPr marL="2743200" algn="l" defTabSz="457200" rtl="0" eaLnBrk="1" latinLnBrk="0" hangingPunct="1">
       <a:defRPr sz="1800" kern="1200">
         <a:solidFill>
           <a:schemeClr val="tx1"/>
@@ -95,7 +95,7 @@
         <a:cs typeface="+mn-cs"/>
       </a:defRPr>
     </a:lvl7pPr>
-    <a:lvl8pPr marL="3200400" algn="l" defTabSz="914400" rtl="0" eaLnBrk="1" latinLnBrk="0" hangingPunct="1">
+    <a:lvl8pPr marL="3200400" algn="l" defTabSz="457200" rtl="0" eaLnBrk="1" latinLnBrk="0" hangingPunct="1">
       <a:defRPr sz="1800" kern="1200">
         <a:solidFill>
           <a:schemeClr val="tx1"/>
@@ -105,7 +105,7 @@
         <a:cs typeface="+mn-cs"/>
       </a:defRPr>
     </a:lvl8pPr>
-    <a:lvl9pPr marL="3657600" algn="l" defTabSz="914400" rtl="0" eaLnBrk="1" latinLnBrk="0" hangingPunct="1">
+    <a:lvl9pPr marL="3657600" algn="l" defTabSz="457200" rtl="0" eaLnBrk="1" latinLnBrk="0" hangingPunct="1">
       <a:defRPr sz="1800" kern="1200">
         <a:solidFill>
           <a:schemeClr val="tx1"/>
@@ -125,7 +125,7 @@
 </file>
 
 <file path=ppt/slideLayouts/slideLayout1.xml><?xml version="1.0" encoding="utf-8"?>
-<p:sldLayout xmlns:a="http://schemas.openxmlformats.org/drawingml/2006/main" xmlns:r="http://schemas.openxmlformats.org/officeDocument/2006/relationships" xmlns:p="http://schemas.openxmlformats.org/presentationml/2006/main" type="title" preserve="1">
+<p:sldLayout xmlns:a="http://schemas.openxmlformats.org/drawingml/2006/main" xmlns:r="http://schemas.openxmlformats.org/officeDocument/2006/relationships" xmlns:p="http://schemas.openxmlformats.org/presentationml/2006/main" showMasterSp="0" type="title" preserve="1">
   <p:cSld name="Title Slide">
     <p:spTree>
       <p:nvGrpSpPr>
@@ -143,13 +143,7 @@
       </p:grpSpPr>
       <p:sp>
         <p:nvSpPr>
-          <p:cNvPr id="2" name="Title 1">
-            <a:extLst>
-              <a:ext uri="{FF2B5EF4-FFF2-40B4-BE49-F238E27FC236}">
-                <a16:creationId xmlns:a16="http://schemas.microsoft.com/office/drawing/2014/main" id="{820CDBFA-3603-645A-9EB2-BF18E33B1A06}"/>
-              </a:ext>
-            </a:extLst>
-          </p:cNvPr>
+          <p:cNvPr id="2" name="Title 1"/>
           <p:cNvSpPr>
             <a:spLocks noGrp="1"/>
           </p:cNvSpPr>
@@ -159,15 +153,19 @@
         </p:nvSpPr>
         <p:spPr>
           <a:xfrm>
-            <a:off x="1524000" y="1122363"/>
-            <a:ext cx="9144000" cy="2387600"/>
+            <a:off x="684212" y="685799"/>
+            <a:ext cx="8001000" cy="2971801"/>
           </a:xfrm>
         </p:spPr>
         <p:txBody>
-          <a:bodyPr anchor="b"/>
+          <a:bodyPr anchor="b">
+            <a:normAutofit/>
+          </a:bodyPr>
           <a:lstStyle>
-            <a:lvl1pPr algn="ctr">
-              <a:defRPr sz="6000"/>
+            <a:lvl1pPr algn="l">
+              <a:defRPr sz="4800">
+                <a:effectLst/>
+              </a:defRPr>
             </a:lvl1pPr>
           </a:lstStyle>
           <a:p>
@@ -175,19 +173,13 @@
               <a:rPr lang="en-US"/>
               <a:t>Click to edit Master title style</a:t>
             </a:r>
-            <a:endParaRPr lang="en-IN"/>
-          </a:p>
-        </p:txBody>
-      </p:sp>
-      <p:sp>
-        <p:nvSpPr>
-          <p:cNvPr id="3" name="Subtitle 2">
-            <a:extLst>
-              <a:ext uri="{FF2B5EF4-FFF2-40B4-BE49-F238E27FC236}">
-                <a16:creationId xmlns:a16="http://schemas.microsoft.com/office/drawing/2014/main" id="{623B8327-55E4-1536-B4F6-FBD74A1753EC}"/>
-              </a:ext>
-            </a:extLst>
-          </p:cNvPr>
+            <a:endParaRPr lang="en-US" dirty="0"/>
+          </a:p>
+        </p:txBody>
+      </p:sp>
+      <p:sp>
+        <p:nvSpPr>
+          <p:cNvPr id="3" name="Subtitle 2"/>
           <p:cNvSpPr>
             <a:spLocks noGrp="1"/>
           </p:cNvSpPr>
@@ -197,48 +189,104 @@
         </p:nvSpPr>
         <p:spPr>
           <a:xfrm>
-            <a:off x="1524000" y="3602038"/>
-            <a:ext cx="9144000" cy="1655762"/>
+            <a:off x="684212" y="3843867"/>
+            <a:ext cx="6400800" cy="1947333"/>
           </a:xfrm>
         </p:spPr>
         <p:txBody>
-          <a:bodyPr/>
+          <a:bodyPr anchor="t">
+            <a:normAutofit/>
+          </a:bodyPr>
           <a:lstStyle>
-            <a:lvl1pPr marL="0" indent="0" algn="ctr">
-              <a:buNone/>
-              <a:defRPr sz="2400"/>
+            <a:lvl1pPr marL="0" indent="0" algn="l">
+              <a:buNone/>
+              <a:defRPr sz="2100">
+                <a:solidFill>
+                  <a:schemeClr val="bg2">
+                    <a:lumMod val="75000"/>
+                  </a:schemeClr>
+                </a:solidFill>
+              </a:defRPr>
             </a:lvl1pPr>
             <a:lvl2pPr marL="457200" indent="0" algn="ctr">
               <a:buNone/>
-              <a:defRPr sz="2000"/>
+              <a:defRPr>
+                <a:solidFill>
+                  <a:schemeClr val="tx1">
+                    <a:tint val="75000"/>
+                  </a:schemeClr>
+                </a:solidFill>
+              </a:defRPr>
             </a:lvl2pPr>
             <a:lvl3pPr marL="914400" indent="0" algn="ctr">
               <a:buNone/>
-              <a:defRPr sz="1800"/>
+              <a:defRPr>
+                <a:solidFill>
+                  <a:schemeClr val="tx1">
+                    <a:tint val="75000"/>
+                  </a:schemeClr>
+                </a:solidFill>
+              </a:defRPr>
             </a:lvl3pPr>
             <a:lvl4pPr marL="1371600" indent="0" algn="ctr">
               <a:buNone/>
-              <a:defRPr sz="1600"/>
+              <a:defRPr>
+                <a:solidFill>
+                  <a:schemeClr val="tx1">
+                    <a:tint val="75000"/>
+                  </a:schemeClr>
+                </a:solidFill>
+              </a:defRPr>
             </a:lvl4pPr>
             <a:lvl5pPr marL="1828800" indent="0" algn="ctr">
               <a:buNone/>
-              <a:defRPr sz="1600"/>
+              <a:defRPr>
+                <a:solidFill>
+                  <a:schemeClr val="tx1">
+                    <a:tint val="75000"/>
+                  </a:schemeClr>
+                </a:solidFill>
+              </a:defRPr>
             </a:lvl5pPr>
             <a:lvl6pPr marL="2286000" indent="0" algn="ctr">
               <a:buNone/>
-              <a:defRPr sz="1600"/>
+              <a:defRPr>
+                <a:solidFill>
+                  <a:schemeClr val="tx1">
+                    <a:tint val="75000"/>
+                  </a:schemeClr>
+                </a:solidFill>
+              </a:defRPr>
             </a:lvl6pPr>
             <a:lvl7pPr marL="2743200" indent="0" algn="ctr">
               <a:buNone/>
-              <a:defRPr sz="1600"/>
+              <a:defRPr>
+                <a:solidFill>
+                  <a:schemeClr val="tx1">
+                    <a:tint val="75000"/>
+                  </a:schemeClr>
+                </a:solidFill>
+              </a:defRPr>
             </a:lvl7pPr>
             <a:lvl8pPr marL="3200400" indent="0" algn="ctr">
               <a:buNone/>
-              <a:defRPr sz="1600"/>
+              <a:defRPr>
+                <a:solidFill>
+                  <a:schemeClr val="tx1">
+                    <a:tint val="75000"/>
+                  </a:schemeClr>
+                </a:solidFill>
+              </a:defRPr>
             </a:lvl8pPr>
             <a:lvl9pPr marL="3657600" indent="0" algn="ctr">
               <a:buNone/>
-              <a:defRPr sz="1600"/>
+              <a:defRPr>
+                <a:solidFill>
+                  <a:schemeClr val="tx1">
+                    <a:tint val="75000"/>
+                  </a:schemeClr>
+                </a:solidFill>
+              </a:defRPr>
             </a:lvl9pPr>
           </a:lstStyle>
           <a:p>
@@ -246,19 +294,13 @@
               <a:rPr lang="en-US"/>
               <a:t>Click to edit Master subtitle style</a:t>
             </a:r>
-            <a:endParaRPr lang="en-IN"/>
-          </a:p>
-        </p:txBody>
-      </p:sp>
-      <p:sp>
-        <p:nvSpPr>
-          <p:cNvPr id="4" name="Date Placeholder 3">
-            <a:extLst>
-              <a:ext uri="{FF2B5EF4-FFF2-40B4-BE49-F238E27FC236}">
-                <a16:creationId xmlns:a16="http://schemas.microsoft.com/office/drawing/2014/main" id="{F715BB0C-9460-BD86-EFB3-AB6659C26DE0}"/>
-              </a:ext>
-            </a:extLst>
-          </p:cNvPr>
+            <a:endParaRPr lang="en-US" dirty="0"/>
+          </a:p>
+        </p:txBody>
+      </p:sp>
+      <p:sp>
+        <p:nvSpPr>
+          <p:cNvPr id="4" name="Date Placeholder 3"/>
           <p:cNvSpPr>
             <a:spLocks noGrp="1"/>
           </p:cNvSpPr>
@@ -273,7 +315,7 @@
           <a:p>
             <a:fld id="{7B289A56-B7BF-4EE2-A684-7373F14AFF3B}" type="datetimeFigureOut">
               <a:rPr lang="en-IN" smtClean="0"/>
-              <a:t>07-04-2026</a:t>
+              <a:t>15-04-2026</a:t>
             </a:fld>
             <a:endParaRPr lang="en-IN"/>
           </a:p>
@@ -281,13 +323,7 @@
       </p:sp>
       <p:sp>
         <p:nvSpPr>
-          <p:cNvPr id="5" name="Footer Placeholder 4">
-            <a:extLst>
-              <a:ext uri="{FF2B5EF4-FFF2-40B4-BE49-F238E27FC236}">
-                <a16:creationId xmlns:a16="http://schemas.microsoft.com/office/drawing/2014/main" id="{302C60DD-6F9A-8C55-2C9B-5C4E70AD6AD0}"/>
-              </a:ext>
-            </a:extLst>
-          </p:cNvPr>
+          <p:cNvPr id="5" name="Footer Placeholder 4"/>
           <p:cNvSpPr>
             <a:spLocks noGrp="1"/>
           </p:cNvSpPr>
@@ -306,13 +342,7 @@
       </p:sp>
       <p:sp>
         <p:nvSpPr>
-          <p:cNvPr id="6" name="Slide Number Placeholder 5">
-            <a:extLst>
-              <a:ext uri="{FF2B5EF4-FFF2-40B4-BE49-F238E27FC236}">
-                <a16:creationId xmlns:a16="http://schemas.microsoft.com/office/drawing/2014/main" id="{C3D434C2-C539-549B-C05C-B98518AC5860}"/>
-              </a:ext>
-            </a:extLst>
-          </p:cNvPr>
+          <p:cNvPr id="6" name="Slide Number Placeholder 5"/>
           <p:cNvSpPr>
             <a:spLocks noGrp="1"/>
           </p:cNvSpPr>
@@ -333,10 +363,185 @@
           </a:p>
         </p:txBody>
       </p:sp>
+      <p:cxnSp>
+        <p:nvCxnSpPr>
+          <p:cNvPr id="16" name="Straight Connector 15"/>
+          <p:cNvCxnSpPr/>
+          <p:nvPr/>
+        </p:nvCxnSpPr>
+        <p:spPr>
+          <a:xfrm flipH="1">
+            <a:off x="8228012" y="8467"/>
+            <a:ext cx="3810000" cy="3810000"/>
+          </a:xfrm>
+          <a:prstGeom prst="line">
+            <a:avLst/>
+          </a:prstGeom>
+          <a:ln w="12700">
+            <a:solidFill>
+              <a:schemeClr val="tx1"/>
+            </a:solidFill>
+          </a:ln>
+        </p:spPr>
+        <p:style>
+          <a:lnRef idx="2">
+            <a:schemeClr val="accent1"/>
+          </a:lnRef>
+          <a:fillRef idx="0">
+            <a:schemeClr val="accent1"/>
+          </a:fillRef>
+          <a:effectRef idx="1">
+            <a:schemeClr val="accent1"/>
+          </a:effectRef>
+          <a:fontRef idx="minor">
+            <a:schemeClr val="tx1"/>
+          </a:fontRef>
+        </p:style>
+      </p:cxnSp>
+      <p:cxnSp>
+        <p:nvCxnSpPr>
+          <p:cNvPr id="17" name="Straight Connector 16"/>
+          <p:cNvCxnSpPr/>
+          <p:nvPr/>
+        </p:nvCxnSpPr>
+        <p:spPr>
+          <a:xfrm flipH="1">
+            <a:off x="6108170" y="91545"/>
+            <a:ext cx="6080655" cy="6080655"/>
+          </a:xfrm>
+          <a:prstGeom prst="line">
+            <a:avLst/>
+          </a:prstGeom>
+          <a:ln w="12700">
+            <a:solidFill>
+              <a:schemeClr val="tx1"/>
+            </a:solidFill>
+          </a:ln>
+        </p:spPr>
+        <p:style>
+          <a:lnRef idx="2">
+            <a:schemeClr val="accent1"/>
+          </a:lnRef>
+          <a:fillRef idx="0">
+            <a:schemeClr val="accent1"/>
+          </a:fillRef>
+          <a:effectRef idx="1">
+            <a:schemeClr val="accent1"/>
+          </a:effectRef>
+          <a:fontRef idx="minor">
+            <a:schemeClr val="tx1"/>
+          </a:fontRef>
+        </p:style>
+      </p:cxnSp>
+      <p:cxnSp>
+        <p:nvCxnSpPr>
+          <p:cNvPr id="19" name="Straight Connector 18"/>
+          <p:cNvCxnSpPr/>
+          <p:nvPr/>
+        </p:nvCxnSpPr>
+        <p:spPr>
+          <a:xfrm flipH="1">
+            <a:off x="7235825" y="228600"/>
+            <a:ext cx="4953000" cy="4953000"/>
+          </a:xfrm>
+          <a:prstGeom prst="line">
+            <a:avLst/>
+          </a:prstGeom>
+          <a:ln w="12700">
+            <a:solidFill>
+              <a:schemeClr val="tx1"/>
+            </a:solidFill>
+          </a:ln>
+        </p:spPr>
+        <p:style>
+          <a:lnRef idx="2">
+            <a:schemeClr val="accent1"/>
+          </a:lnRef>
+          <a:fillRef idx="0">
+            <a:schemeClr val="accent1"/>
+          </a:fillRef>
+          <a:effectRef idx="1">
+            <a:schemeClr val="accent1"/>
+          </a:effectRef>
+          <a:fontRef idx="minor">
+            <a:schemeClr val="tx1"/>
+          </a:fontRef>
+        </p:style>
+      </p:cxnSp>
+      <p:cxnSp>
+        <p:nvCxnSpPr>
+          <p:cNvPr id="21" name="Straight Connector 20"/>
+          <p:cNvCxnSpPr/>
+          <p:nvPr/>
+        </p:nvCxnSpPr>
+        <p:spPr>
+          <a:xfrm flipH="1">
+            <a:off x="7335837" y="32278"/>
+            <a:ext cx="4852989" cy="4852989"/>
+          </a:xfrm>
+          <a:prstGeom prst="line">
+            <a:avLst/>
+          </a:prstGeom>
+          <a:ln w="31750">
+            <a:solidFill>
+              <a:schemeClr val="tx1"/>
+            </a:solidFill>
+          </a:ln>
+        </p:spPr>
+        <p:style>
+          <a:lnRef idx="2">
+            <a:schemeClr val="accent1"/>
+          </a:lnRef>
+          <a:fillRef idx="0">
+            <a:schemeClr val="accent1"/>
+          </a:fillRef>
+          <a:effectRef idx="1">
+            <a:schemeClr val="accent1"/>
+          </a:effectRef>
+          <a:fontRef idx="minor">
+            <a:schemeClr val="tx1"/>
+          </a:fontRef>
+        </p:style>
+      </p:cxnSp>
+      <p:cxnSp>
+        <p:nvCxnSpPr>
+          <p:cNvPr id="23" name="Straight Connector 22"/>
+          <p:cNvCxnSpPr/>
+          <p:nvPr/>
+        </p:nvCxnSpPr>
+        <p:spPr>
+          <a:xfrm flipH="1">
+            <a:off x="7845426" y="609601"/>
+            <a:ext cx="4343399" cy="4343399"/>
+          </a:xfrm>
+          <a:prstGeom prst="line">
+            <a:avLst/>
+          </a:prstGeom>
+          <a:ln w="31750">
+            <a:solidFill>
+              <a:schemeClr val="tx1"/>
+            </a:solidFill>
+          </a:ln>
+        </p:spPr>
+        <p:style>
+          <a:lnRef idx="2">
+            <a:schemeClr val="accent1"/>
+          </a:lnRef>
+          <a:fillRef idx="0">
+            <a:schemeClr val="accent1"/>
+          </a:fillRef>
+          <a:effectRef idx="1">
+            <a:schemeClr val="accent1"/>
+          </a:effectRef>
+          <a:fontRef idx="minor">
+            <a:schemeClr val="tx1"/>
+          </a:fontRef>
+        </p:style>
+      </p:cxnSp>
     </p:spTree>
     <p:extLst>
       <p:ext uri="{BB962C8B-B14F-4D97-AF65-F5344CB8AC3E}">
-        <p14:creationId xmlns:p14="http://schemas.microsoft.com/office/powerpoint/2010/main" val="2989248243"/>
+        <p14:creationId xmlns:p14="http://schemas.microsoft.com/office/powerpoint/2010/main" val="2677066761"/>
       </p:ext>
     </p:extLst>
   </p:cSld>
@@ -347,6 +552,1812 @@
 </file>
 
 <file path=ppt/slideLayouts/slideLayout10.xml><?xml version="1.0" encoding="utf-8"?>
+<p:sldLayout xmlns:a="http://schemas.openxmlformats.org/drawingml/2006/main" xmlns:r="http://schemas.openxmlformats.org/officeDocument/2006/relationships" xmlns:p="http://schemas.openxmlformats.org/presentationml/2006/main" preserve="1">
+  <p:cSld name="Panoramic Picture with Caption">
+    <p:spTree>
+      <p:nvGrpSpPr>
+        <p:cNvPr id="1" name=""/>
+        <p:cNvGrpSpPr/>
+        <p:nvPr/>
+      </p:nvGrpSpPr>
+      <p:grpSpPr>
+        <a:xfrm>
+          <a:off x="0" y="0"/>
+          <a:ext cx="0" cy="0"/>
+          <a:chOff x="0" y="0"/>
+          <a:chExt cx="0" cy="0"/>
+        </a:xfrm>
+      </p:grpSpPr>
+      <p:sp>
+        <p:nvSpPr>
+          <p:cNvPr id="2" name="Title 1"/>
+          <p:cNvSpPr>
+            <a:spLocks noGrp="1"/>
+          </p:cNvSpPr>
+          <p:nvPr>
+            <p:ph type="title"/>
+          </p:nvPr>
+        </p:nvSpPr>
+        <p:spPr/>
+        <p:txBody>
+          <a:bodyPr/>
+          <a:lstStyle/>
+          <a:p>
+            <a:r>
+              <a:rPr lang="en-US"/>
+              <a:t>Click to edit Master title style</a:t>
+            </a:r>
+            <a:endParaRPr lang="en-US" dirty="0"/>
+          </a:p>
+        </p:txBody>
+      </p:sp>
+      <p:sp>
+        <p:nvSpPr>
+          <p:cNvPr id="17" name="Picture Placeholder 2"/>
+          <p:cNvSpPr>
+            <a:spLocks noGrp="1" noChangeAspect="1"/>
+          </p:cNvSpPr>
+          <p:nvPr>
+            <p:ph type="pic" idx="13"/>
+          </p:nvPr>
+        </p:nvSpPr>
+        <p:spPr>
+          <a:xfrm>
+            <a:off x="685800" y="533400"/>
+            <a:ext cx="10818812" cy="3124200"/>
+          </a:xfrm>
+          <a:prstGeom prst="snip2DiagRect">
+            <a:avLst>
+              <a:gd name="adj1" fmla="val 10815"/>
+              <a:gd name="adj2" fmla="val 0"/>
+            </a:avLst>
+          </a:prstGeom>
+          <a:ln w="15875">
+            <a:solidFill>
+              <a:schemeClr val="tx1">
+                <a:alpha val="40000"/>
+              </a:schemeClr>
+            </a:solidFill>
+          </a:ln>
+          <a:effectLst>
+            <a:innerShdw blurRad="57150" dist="38100" dir="14460000">
+              <a:srgbClr val="000000">
+                <a:alpha val="70000"/>
+              </a:srgbClr>
+            </a:innerShdw>
+          </a:effectLst>
+        </p:spPr>
+        <p:txBody>
+          <a:bodyPr anchor="t">
+            <a:normAutofit/>
+          </a:bodyPr>
+          <a:lstStyle>
+            <a:lvl1pPr marL="0" indent="0" algn="ctr">
+              <a:buNone/>
+              <a:defRPr sz="1600"/>
+            </a:lvl1pPr>
+            <a:lvl2pPr marL="457200" indent="0">
+              <a:buNone/>
+              <a:defRPr sz="1600"/>
+            </a:lvl2pPr>
+            <a:lvl3pPr marL="914400" indent="0">
+              <a:buNone/>
+              <a:defRPr sz="1600"/>
+            </a:lvl3pPr>
+            <a:lvl4pPr marL="1371600" indent="0">
+              <a:buNone/>
+              <a:defRPr sz="1600"/>
+            </a:lvl4pPr>
+            <a:lvl5pPr marL="1828800" indent="0">
+              <a:buNone/>
+              <a:defRPr sz="1600"/>
+            </a:lvl5pPr>
+            <a:lvl6pPr marL="2286000" indent="0">
+              <a:buNone/>
+              <a:defRPr sz="1600"/>
+            </a:lvl6pPr>
+            <a:lvl7pPr marL="2743200" indent="0">
+              <a:buNone/>
+              <a:defRPr sz="1600"/>
+            </a:lvl7pPr>
+            <a:lvl8pPr marL="3200400" indent="0">
+              <a:buNone/>
+              <a:defRPr sz="1600"/>
+            </a:lvl8pPr>
+            <a:lvl9pPr marL="3657600" indent="0">
+              <a:buNone/>
+              <a:defRPr sz="1600"/>
+            </a:lvl9pPr>
+          </a:lstStyle>
+          <a:p>
+            <a:r>
+              <a:rPr lang="en-US"/>
+              <a:t>Click icon to add picture</a:t>
+            </a:r>
+            <a:endParaRPr lang="en-US" dirty="0"/>
+          </a:p>
+        </p:txBody>
+      </p:sp>
+      <p:sp>
+        <p:nvSpPr>
+          <p:cNvPr id="16" name="Text Placeholder 9"/>
+          <p:cNvSpPr>
+            <a:spLocks noGrp="1"/>
+          </p:cNvSpPr>
+          <p:nvPr>
+            <p:ph type="body" sz="quarter" idx="14"/>
+          </p:nvPr>
+        </p:nvSpPr>
+        <p:spPr>
+          <a:xfrm>
+            <a:off x="914402" y="3843867"/>
+            <a:ext cx="8304210" cy="457200"/>
+          </a:xfrm>
+        </p:spPr>
+        <p:txBody>
+          <a:bodyPr anchor="t">
+            <a:normAutofit/>
+          </a:bodyPr>
+          <a:lstStyle>
+            <a:lvl1pPr marL="0" indent="0">
+              <a:buFontTx/>
+              <a:buNone/>
+              <a:defRPr sz="1600"/>
+            </a:lvl1pPr>
+            <a:lvl2pPr marL="457200" indent="0">
+              <a:buFontTx/>
+              <a:buNone/>
+              <a:defRPr/>
+            </a:lvl2pPr>
+            <a:lvl3pPr marL="914400" indent="0">
+              <a:buFontTx/>
+              <a:buNone/>
+              <a:defRPr/>
+            </a:lvl3pPr>
+            <a:lvl4pPr marL="1371600" indent="0">
+              <a:buFontTx/>
+              <a:buNone/>
+              <a:defRPr/>
+            </a:lvl4pPr>
+            <a:lvl5pPr marL="1828800" indent="0">
+              <a:buFontTx/>
+              <a:buNone/>
+              <a:defRPr/>
+            </a:lvl5pPr>
+          </a:lstStyle>
+          <a:p>
+            <a:pPr lvl="0"/>
+            <a:r>
+              <a:rPr lang="en-US"/>
+              <a:t>Click to edit Master text styles</a:t>
+            </a:r>
+          </a:p>
+        </p:txBody>
+      </p:sp>
+      <p:sp>
+        <p:nvSpPr>
+          <p:cNvPr id="3" name="Date Placeholder 2"/>
+          <p:cNvSpPr>
+            <a:spLocks noGrp="1"/>
+          </p:cNvSpPr>
+          <p:nvPr>
+            <p:ph type="dt" sz="half" idx="10"/>
+          </p:nvPr>
+        </p:nvSpPr>
+        <p:spPr/>
+        <p:txBody>
+          <a:bodyPr/>
+          <a:lstStyle/>
+          <a:p>
+            <a:fld id="{7B289A56-B7BF-4EE2-A684-7373F14AFF3B}" type="datetimeFigureOut">
+              <a:rPr lang="en-IN" smtClean="0"/>
+              <a:t>15-04-2026</a:t>
+            </a:fld>
+            <a:endParaRPr lang="en-IN"/>
+          </a:p>
+        </p:txBody>
+      </p:sp>
+      <p:sp>
+        <p:nvSpPr>
+          <p:cNvPr id="4" name="Footer Placeholder 3"/>
+          <p:cNvSpPr>
+            <a:spLocks noGrp="1"/>
+          </p:cNvSpPr>
+          <p:nvPr>
+            <p:ph type="ftr" sz="quarter" idx="11"/>
+          </p:nvPr>
+        </p:nvSpPr>
+        <p:spPr/>
+        <p:txBody>
+          <a:bodyPr/>
+          <a:lstStyle/>
+          <a:p>
+            <a:endParaRPr lang="en-IN"/>
+          </a:p>
+        </p:txBody>
+      </p:sp>
+      <p:sp>
+        <p:nvSpPr>
+          <p:cNvPr id="5" name="Slide Number Placeholder 4"/>
+          <p:cNvSpPr>
+            <a:spLocks noGrp="1"/>
+          </p:cNvSpPr>
+          <p:nvPr>
+            <p:ph type="sldNum" sz="quarter" idx="12"/>
+          </p:nvPr>
+        </p:nvSpPr>
+        <p:spPr/>
+        <p:txBody>
+          <a:bodyPr/>
+          <a:lstStyle/>
+          <a:p>
+            <a:fld id="{3E05A8C5-EE7D-4E52-AF3E-16E9F1C18F47}" type="slidenum">
+              <a:rPr lang="en-IN" smtClean="0"/>
+              <a:t>‹#›</a:t>
+            </a:fld>
+            <a:endParaRPr lang="en-IN"/>
+          </a:p>
+        </p:txBody>
+      </p:sp>
+    </p:spTree>
+    <p:extLst>
+      <p:ext uri="{BB962C8B-B14F-4D97-AF65-F5344CB8AC3E}">
+        <p14:creationId xmlns:p14="http://schemas.microsoft.com/office/powerpoint/2010/main" val="1576817974"/>
+      </p:ext>
+    </p:extLst>
+  </p:cSld>
+  <p:clrMapOvr>
+    <a:masterClrMapping/>
+  </p:clrMapOvr>
+</p:sldLayout>
+</file>
+
+<file path=ppt/slideLayouts/slideLayout11.xml><?xml version="1.0" encoding="utf-8"?>
+<p:sldLayout xmlns:a="http://schemas.openxmlformats.org/drawingml/2006/main" xmlns:r="http://schemas.openxmlformats.org/officeDocument/2006/relationships" xmlns:p="http://schemas.openxmlformats.org/presentationml/2006/main" preserve="1">
+  <p:cSld name="Title and Caption">
+    <p:spTree>
+      <p:nvGrpSpPr>
+        <p:cNvPr id="1" name=""/>
+        <p:cNvGrpSpPr/>
+        <p:nvPr/>
+      </p:nvGrpSpPr>
+      <p:grpSpPr>
+        <a:xfrm>
+          <a:off x="0" y="0"/>
+          <a:ext cx="0" cy="0"/>
+          <a:chOff x="0" y="0"/>
+          <a:chExt cx="0" cy="0"/>
+        </a:xfrm>
+      </p:grpSpPr>
+      <p:sp>
+        <p:nvSpPr>
+          <p:cNvPr id="2" name="Title 1"/>
+          <p:cNvSpPr>
+            <a:spLocks noGrp="1"/>
+          </p:cNvSpPr>
+          <p:nvPr>
+            <p:ph type="title"/>
+          </p:nvPr>
+        </p:nvSpPr>
+        <p:spPr>
+          <a:xfrm>
+            <a:off x="684213" y="685800"/>
+            <a:ext cx="10058400" cy="2743200"/>
+          </a:xfrm>
+        </p:spPr>
+        <p:txBody>
+          <a:bodyPr anchor="ctr">
+            <a:normAutofit/>
+          </a:bodyPr>
+          <a:lstStyle>
+            <a:lvl1pPr algn="l">
+              <a:defRPr sz="3200" b="0" cap="all"/>
+            </a:lvl1pPr>
+          </a:lstStyle>
+          <a:p>
+            <a:r>
+              <a:rPr lang="en-US"/>
+              <a:t>Click to edit Master title style</a:t>
+            </a:r>
+            <a:endParaRPr lang="en-US" dirty="0"/>
+          </a:p>
+        </p:txBody>
+      </p:sp>
+      <p:sp>
+        <p:nvSpPr>
+          <p:cNvPr id="3" name="Text Placeholder 2"/>
+          <p:cNvSpPr>
+            <a:spLocks noGrp="1"/>
+          </p:cNvSpPr>
+          <p:nvPr>
+            <p:ph type="body" idx="1"/>
+          </p:nvPr>
+        </p:nvSpPr>
+        <p:spPr>
+          <a:xfrm>
+            <a:off x="684212" y="4114800"/>
+            <a:ext cx="8535988" cy="1879600"/>
+          </a:xfrm>
+        </p:spPr>
+        <p:txBody>
+          <a:bodyPr anchor="ctr">
+            <a:normAutofit/>
+          </a:bodyPr>
+          <a:lstStyle>
+            <a:lvl1pPr marL="0" indent="0" algn="l">
+              <a:buNone/>
+              <a:defRPr sz="2000">
+                <a:solidFill>
+                  <a:schemeClr val="bg2">
+                    <a:lumMod val="75000"/>
+                  </a:schemeClr>
+                </a:solidFill>
+              </a:defRPr>
+            </a:lvl1pPr>
+            <a:lvl2pPr marL="457200" indent="0">
+              <a:buNone/>
+              <a:defRPr sz="1800">
+                <a:solidFill>
+                  <a:schemeClr val="tx1">
+                    <a:tint val="75000"/>
+                  </a:schemeClr>
+                </a:solidFill>
+              </a:defRPr>
+            </a:lvl2pPr>
+            <a:lvl3pPr marL="914400" indent="0">
+              <a:buNone/>
+              <a:defRPr sz="1600">
+                <a:solidFill>
+                  <a:schemeClr val="tx1">
+                    <a:tint val="75000"/>
+                  </a:schemeClr>
+                </a:solidFill>
+              </a:defRPr>
+            </a:lvl3pPr>
+            <a:lvl4pPr marL="1371600" indent="0">
+              <a:buNone/>
+              <a:defRPr sz="1400">
+                <a:solidFill>
+                  <a:schemeClr val="tx1">
+                    <a:tint val="75000"/>
+                  </a:schemeClr>
+                </a:solidFill>
+              </a:defRPr>
+            </a:lvl4pPr>
+            <a:lvl5pPr marL="1828800" indent="0">
+              <a:buNone/>
+              <a:defRPr sz="1400">
+                <a:solidFill>
+                  <a:schemeClr val="tx1">
+                    <a:tint val="75000"/>
+                  </a:schemeClr>
+                </a:solidFill>
+              </a:defRPr>
+            </a:lvl5pPr>
+            <a:lvl6pPr marL="2286000" indent="0">
+              <a:buNone/>
+              <a:defRPr sz="1400">
+                <a:solidFill>
+                  <a:schemeClr val="tx1">
+                    <a:tint val="75000"/>
+                  </a:schemeClr>
+                </a:solidFill>
+              </a:defRPr>
+            </a:lvl6pPr>
+            <a:lvl7pPr marL="2743200" indent="0">
+              <a:buNone/>
+              <a:defRPr sz="1400">
+                <a:solidFill>
+                  <a:schemeClr val="tx1">
+                    <a:tint val="75000"/>
+                  </a:schemeClr>
+                </a:solidFill>
+              </a:defRPr>
+            </a:lvl7pPr>
+            <a:lvl8pPr marL="3200400" indent="0">
+              <a:buNone/>
+              <a:defRPr sz="1400">
+                <a:solidFill>
+                  <a:schemeClr val="tx1">
+                    <a:tint val="75000"/>
+                  </a:schemeClr>
+                </a:solidFill>
+              </a:defRPr>
+            </a:lvl8pPr>
+            <a:lvl9pPr marL="3657600" indent="0">
+              <a:buNone/>
+              <a:defRPr sz="1400">
+                <a:solidFill>
+                  <a:schemeClr val="tx1">
+                    <a:tint val="75000"/>
+                  </a:schemeClr>
+                </a:solidFill>
+              </a:defRPr>
+            </a:lvl9pPr>
+          </a:lstStyle>
+          <a:p>
+            <a:pPr lvl="0"/>
+            <a:r>
+              <a:rPr lang="en-US"/>
+              <a:t>Click to edit Master text styles</a:t>
+            </a:r>
+          </a:p>
+        </p:txBody>
+      </p:sp>
+      <p:sp>
+        <p:nvSpPr>
+          <p:cNvPr id="4" name="Date Placeholder 3"/>
+          <p:cNvSpPr>
+            <a:spLocks noGrp="1"/>
+          </p:cNvSpPr>
+          <p:nvPr>
+            <p:ph type="dt" sz="half" idx="10"/>
+          </p:nvPr>
+        </p:nvSpPr>
+        <p:spPr/>
+        <p:txBody>
+          <a:bodyPr/>
+          <a:lstStyle/>
+          <a:p>
+            <a:fld id="{7B289A56-B7BF-4EE2-A684-7373F14AFF3B}" type="datetimeFigureOut">
+              <a:rPr lang="en-IN" smtClean="0"/>
+              <a:t>15-04-2026</a:t>
+            </a:fld>
+            <a:endParaRPr lang="en-IN"/>
+          </a:p>
+        </p:txBody>
+      </p:sp>
+      <p:sp>
+        <p:nvSpPr>
+          <p:cNvPr id="5" name="Footer Placeholder 4"/>
+          <p:cNvSpPr>
+            <a:spLocks noGrp="1"/>
+          </p:cNvSpPr>
+          <p:nvPr>
+            <p:ph type="ftr" sz="quarter" idx="11"/>
+          </p:nvPr>
+        </p:nvSpPr>
+        <p:spPr/>
+        <p:txBody>
+          <a:bodyPr/>
+          <a:lstStyle/>
+          <a:p>
+            <a:endParaRPr lang="en-IN"/>
+          </a:p>
+        </p:txBody>
+      </p:sp>
+      <p:sp>
+        <p:nvSpPr>
+          <p:cNvPr id="6" name="Slide Number Placeholder 5"/>
+          <p:cNvSpPr>
+            <a:spLocks noGrp="1"/>
+          </p:cNvSpPr>
+          <p:nvPr>
+            <p:ph type="sldNum" sz="quarter" idx="12"/>
+          </p:nvPr>
+        </p:nvSpPr>
+        <p:spPr/>
+        <p:txBody>
+          <a:bodyPr/>
+          <a:lstStyle/>
+          <a:p>
+            <a:fld id="{3E05A8C5-EE7D-4E52-AF3E-16E9F1C18F47}" type="slidenum">
+              <a:rPr lang="en-IN" smtClean="0"/>
+              <a:t>‹#›</a:t>
+            </a:fld>
+            <a:endParaRPr lang="en-IN"/>
+          </a:p>
+        </p:txBody>
+      </p:sp>
+    </p:spTree>
+    <p:extLst>
+      <p:ext uri="{BB962C8B-B14F-4D97-AF65-F5344CB8AC3E}">
+        <p14:creationId xmlns:p14="http://schemas.microsoft.com/office/powerpoint/2010/main" val="356442964"/>
+      </p:ext>
+    </p:extLst>
+  </p:cSld>
+  <p:clrMapOvr>
+    <a:masterClrMapping/>
+  </p:clrMapOvr>
+</p:sldLayout>
+</file>
+
+<file path=ppt/slideLayouts/slideLayout12.xml><?xml version="1.0" encoding="utf-8"?>
+<p:sldLayout xmlns:a="http://schemas.openxmlformats.org/drawingml/2006/main" xmlns:r="http://schemas.openxmlformats.org/officeDocument/2006/relationships" xmlns:p="http://schemas.openxmlformats.org/presentationml/2006/main" preserve="1">
+  <p:cSld name="Quote with Caption">
+    <p:spTree>
+      <p:nvGrpSpPr>
+        <p:cNvPr id="1" name=""/>
+        <p:cNvGrpSpPr/>
+        <p:nvPr/>
+      </p:nvGrpSpPr>
+      <p:grpSpPr>
+        <a:xfrm>
+          <a:off x="0" y="0"/>
+          <a:ext cx="0" cy="0"/>
+          <a:chOff x="0" y="0"/>
+          <a:chExt cx="0" cy="0"/>
+        </a:xfrm>
+      </p:grpSpPr>
+      <p:sp>
+        <p:nvSpPr>
+          <p:cNvPr id="2" name="Title 1"/>
+          <p:cNvSpPr>
+            <a:spLocks noGrp="1"/>
+          </p:cNvSpPr>
+          <p:nvPr>
+            <p:ph type="title"/>
+          </p:nvPr>
+        </p:nvSpPr>
+        <p:spPr>
+          <a:xfrm>
+            <a:off x="1141411" y="685800"/>
+            <a:ext cx="9144001" cy="2743200"/>
+          </a:xfrm>
+        </p:spPr>
+        <p:txBody>
+          <a:bodyPr anchor="ctr">
+            <a:normAutofit/>
+          </a:bodyPr>
+          <a:lstStyle>
+            <a:lvl1pPr algn="l">
+              <a:defRPr sz="3200" b="0" cap="all">
+                <a:solidFill>
+                  <a:schemeClr val="tx1"/>
+                </a:solidFill>
+              </a:defRPr>
+            </a:lvl1pPr>
+          </a:lstStyle>
+          <a:p>
+            <a:r>
+              <a:rPr lang="en-US"/>
+              <a:t>Click to edit Master title style</a:t>
+            </a:r>
+            <a:endParaRPr lang="en-US" dirty="0"/>
+          </a:p>
+        </p:txBody>
+      </p:sp>
+      <p:sp>
+        <p:nvSpPr>
+          <p:cNvPr id="10" name="Text Placeholder 9"/>
+          <p:cNvSpPr>
+            <a:spLocks noGrp="1"/>
+          </p:cNvSpPr>
+          <p:nvPr>
+            <p:ph type="body" sz="quarter" idx="13"/>
+          </p:nvPr>
+        </p:nvSpPr>
+        <p:spPr>
+          <a:xfrm>
+            <a:off x="1446212" y="3429000"/>
+            <a:ext cx="8534400" cy="381000"/>
+          </a:xfrm>
+        </p:spPr>
+        <p:txBody>
+          <a:bodyPr anchor="ctr"/>
+          <a:lstStyle>
+            <a:lvl1pPr marL="0" indent="0">
+              <a:buFontTx/>
+              <a:buNone/>
+              <a:defRPr/>
+            </a:lvl1pPr>
+            <a:lvl2pPr marL="457200" indent="0">
+              <a:buFontTx/>
+              <a:buNone/>
+              <a:defRPr/>
+            </a:lvl2pPr>
+            <a:lvl3pPr marL="914400" indent="0">
+              <a:buFontTx/>
+              <a:buNone/>
+              <a:defRPr/>
+            </a:lvl3pPr>
+            <a:lvl4pPr marL="1371600" indent="0">
+              <a:buFontTx/>
+              <a:buNone/>
+              <a:defRPr/>
+            </a:lvl4pPr>
+            <a:lvl5pPr marL="1828800" indent="0">
+              <a:buFontTx/>
+              <a:buNone/>
+              <a:defRPr/>
+            </a:lvl5pPr>
+          </a:lstStyle>
+          <a:p>
+            <a:pPr lvl="0"/>
+            <a:r>
+              <a:rPr lang="en-US"/>
+              <a:t>Click to edit Master text styles</a:t>
+            </a:r>
+          </a:p>
+        </p:txBody>
+      </p:sp>
+      <p:sp>
+        <p:nvSpPr>
+          <p:cNvPr id="3" name="Text Placeholder 2"/>
+          <p:cNvSpPr>
+            <a:spLocks noGrp="1"/>
+          </p:cNvSpPr>
+          <p:nvPr>
+            <p:ph type="body" idx="1"/>
+          </p:nvPr>
+        </p:nvSpPr>
+        <p:spPr>
+          <a:xfrm>
+            <a:off x="684213" y="4301067"/>
+            <a:ext cx="8534400" cy="1684865"/>
+          </a:xfrm>
+        </p:spPr>
+        <p:txBody>
+          <a:bodyPr anchor="ctr">
+            <a:normAutofit/>
+          </a:bodyPr>
+          <a:lstStyle>
+            <a:lvl1pPr marL="0" indent="0" algn="l">
+              <a:buNone/>
+              <a:defRPr sz="2000">
+                <a:solidFill>
+                  <a:schemeClr val="bg2">
+                    <a:lumMod val="75000"/>
+                  </a:schemeClr>
+                </a:solidFill>
+              </a:defRPr>
+            </a:lvl1pPr>
+            <a:lvl2pPr marL="457200" indent="0">
+              <a:buNone/>
+              <a:defRPr sz="1800">
+                <a:solidFill>
+                  <a:schemeClr val="tx1">
+                    <a:tint val="75000"/>
+                  </a:schemeClr>
+                </a:solidFill>
+              </a:defRPr>
+            </a:lvl2pPr>
+            <a:lvl3pPr marL="914400" indent="0">
+              <a:buNone/>
+              <a:defRPr sz="1600">
+                <a:solidFill>
+                  <a:schemeClr val="tx1">
+                    <a:tint val="75000"/>
+                  </a:schemeClr>
+                </a:solidFill>
+              </a:defRPr>
+            </a:lvl3pPr>
+            <a:lvl4pPr marL="1371600" indent="0">
+              <a:buNone/>
+              <a:defRPr sz="1400">
+                <a:solidFill>
+                  <a:schemeClr val="tx1">
+                    <a:tint val="75000"/>
+                  </a:schemeClr>
+                </a:solidFill>
+              </a:defRPr>
+            </a:lvl4pPr>
+            <a:lvl5pPr marL="1828800" indent="0">
+              <a:buNone/>
+              <a:defRPr sz="1400">
+                <a:solidFill>
+                  <a:schemeClr val="tx1">
+                    <a:tint val="75000"/>
+                  </a:schemeClr>
+                </a:solidFill>
+              </a:defRPr>
+            </a:lvl5pPr>
+            <a:lvl6pPr marL="2286000" indent="0">
+              <a:buNone/>
+              <a:defRPr sz="1400">
+                <a:solidFill>
+                  <a:schemeClr val="tx1">
+                    <a:tint val="75000"/>
+                  </a:schemeClr>
+                </a:solidFill>
+              </a:defRPr>
+            </a:lvl6pPr>
+            <a:lvl7pPr marL="2743200" indent="0">
+              <a:buNone/>
+              <a:defRPr sz="1400">
+                <a:solidFill>
+                  <a:schemeClr val="tx1">
+                    <a:tint val="75000"/>
+                  </a:schemeClr>
+                </a:solidFill>
+              </a:defRPr>
+            </a:lvl7pPr>
+            <a:lvl8pPr marL="3200400" indent="0">
+              <a:buNone/>
+              <a:defRPr sz="1400">
+                <a:solidFill>
+                  <a:schemeClr val="tx1">
+                    <a:tint val="75000"/>
+                  </a:schemeClr>
+                </a:solidFill>
+              </a:defRPr>
+            </a:lvl8pPr>
+            <a:lvl9pPr marL="3657600" indent="0">
+              <a:buNone/>
+              <a:defRPr sz="1400">
+                <a:solidFill>
+                  <a:schemeClr val="tx1">
+                    <a:tint val="75000"/>
+                  </a:schemeClr>
+                </a:solidFill>
+              </a:defRPr>
+            </a:lvl9pPr>
+          </a:lstStyle>
+          <a:p>
+            <a:pPr lvl="0"/>
+            <a:r>
+              <a:rPr lang="en-US"/>
+              <a:t>Click to edit Master text styles</a:t>
+            </a:r>
+          </a:p>
+        </p:txBody>
+      </p:sp>
+      <p:sp>
+        <p:nvSpPr>
+          <p:cNvPr id="4" name="Date Placeholder 3"/>
+          <p:cNvSpPr>
+            <a:spLocks noGrp="1"/>
+          </p:cNvSpPr>
+          <p:nvPr>
+            <p:ph type="dt" sz="half" idx="10"/>
+          </p:nvPr>
+        </p:nvSpPr>
+        <p:spPr/>
+        <p:txBody>
+          <a:bodyPr/>
+          <a:lstStyle/>
+          <a:p>
+            <a:fld id="{7B289A56-B7BF-4EE2-A684-7373F14AFF3B}" type="datetimeFigureOut">
+              <a:rPr lang="en-IN" smtClean="0"/>
+              <a:t>15-04-2026</a:t>
+            </a:fld>
+            <a:endParaRPr lang="en-IN"/>
+          </a:p>
+        </p:txBody>
+      </p:sp>
+      <p:sp>
+        <p:nvSpPr>
+          <p:cNvPr id="5" name="Footer Placeholder 4"/>
+          <p:cNvSpPr>
+            <a:spLocks noGrp="1"/>
+          </p:cNvSpPr>
+          <p:nvPr>
+            <p:ph type="ftr" sz="quarter" idx="11"/>
+          </p:nvPr>
+        </p:nvSpPr>
+        <p:spPr/>
+        <p:txBody>
+          <a:bodyPr/>
+          <a:lstStyle/>
+          <a:p>
+            <a:endParaRPr lang="en-IN"/>
+          </a:p>
+        </p:txBody>
+      </p:sp>
+      <p:sp>
+        <p:nvSpPr>
+          <p:cNvPr id="6" name="Slide Number Placeholder 5"/>
+          <p:cNvSpPr>
+            <a:spLocks noGrp="1"/>
+          </p:cNvSpPr>
+          <p:nvPr>
+            <p:ph type="sldNum" sz="quarter" idx="12"/>
+          </p:nvPr>
+        </p:nvSpPr>
+        <p:spPr/>
+        <p:txBody>
+          <a:bodyPr/>
+          <a:lstStyle/>
+          <a:p>
+            <a:fld id="{3E05A8C5-EE7D-4E52-AF3E-16E9F1C18F47}" type="slidenum">
+              <a:rPr lang="en-IN" smtClean="0"/>
+              <a:t>‹#›</a:t>
+            </a:fld>
+            <a:endParaRPr lang="en-IN"/>
+          </a:p>
+        </p:txBody>
+      </p:sp>
+      <p:sp>
+        <p:nvSpPr>
+          <p:cNvPr id="14" name="TextBox 13"/>
+          <p:cNvSpPr txBox="1"/>
+          <p:nvPr/>
+        </p:nvSpPr>
+        <p:spPr>
+          <a:xfrm>
+            <a:off x="531812" y="812222"/>
+            <a:ext cx="609600" cy="584776"/>
+          </a:xfrm>
+          <a:prstGeom prst="rect">
+            <a:avLst/>
+          </a:prstGeom>
+        </p:spPr>
+        <p:txBody>
+          <a:bodyPr vert="horz" lIns="91440" tIns="45720" rIns="91440" bIns="45720" rtlCol="0" anchor="ctr">
+            <a:noAutofit/>
+          </a:bodyPr>
+          <a:lstStyle/>
+          <a:p>
+            <a:pPr lvl="0"/>
+            <a:r>
+              <a:rPr lang="en-US" sz="8000" dirty="0">
+                <a:solidFill>
+                  <a:schemeClr val="tx1"/>
+                </a:solidFill>
+                <a:effectLst/>
+              </a:rPr>
+              <a:t>“</a:t>
+            </a:r>
+          </a:p>
+        </p:txBody>
+      </p:sp>
+      <p:sp>
+        <p:nvSpPr>
+          <p:cNvPr id="15" name="TextBox 14"/>
+          <p:cNvSpPr txBox="1"/>
+          <p:nvPr/>
+        </p:nvSpPr>
+        <p:spPr>
+          <a:xfrm>
+            <a:off x="10285412" y="2768601"/>
+            <a:ext cx="609600" cy="584776"/>
+          </a:xfrm>
+          <a:prstGeom prst="rect">
+            <a:avLst/>
+          </a:prstGeom>
+        </p:spPr>
+        <p:txBody>
+          <a:bodyPr vert="horz" lIns="91440" tIns="45720" rIns="91440" bIns="45720" rtlCol="0" anchor="ctr">
+            <a:noAutofit/>
+          </a:bodyPr>
+          <a:lstStyle/>
+          <a:p>
+            <a:pPr lvl="0" algn="r"/>
+            <a:r>
+              <a:rPr lang="en-US" sz="8000" dirty="0">
+                <a:solidFill>
+                  <a:schemeClr val="tx1"/>
+                </a:solidFill>
+                <a:effectLst/>
+              </a:rPr>
+              <a:t>”</a:t>
+            </a:r>
+          </a:p>
+        </p:txBody>
+      </p:sp>
+    </p:spTree>
+    <p:extLst>
+      <p:ext uri="{BB962C8B-B14F-4D97-AF65-F5344CB8AC3E}">
+        <p14:creationId xmlns:p14="http://schemas.microsoft.com/office/powerpoint/2010/main" val="1306173486"/>
+      </p:ext>
+    </p:extLst>
+  </p:cSld>
+  <p:clrMapOvr>
+    <a:masterClrMapping/>
+  </p:clrMapOvr>
+</p:sldLayout>
+</file>
+
+<file path=ppt/slideLayouts/slideLayout13.xml><?xml version="1.0" encoding="utf-8"?>
+<p:sldLayout xmlns:a="http://schemas.openxmlformats.org/drawingml/2006/main" xmlns:r="http://schemas.openxmlformats.org/officeDocument/2006/relationships" xmlns:p="http://schemas.openxmlformats.org/presentationml/2006/main" preserve="1">
+  <p:cSld name="Name Card">
+    <p:spTree>
+      <p:nvGrpSpPr>
+        <p:cNvPr id="1" name=""/>
+        <p:cNvGrpSpPr/>
+        <p:nvPr/>
+      </p:nvGrpSpPr>
+      <p:grpSpPr>
+        <a:xfrm>
+          <a:off x="0" y="0"/>
+          <a:ext cx="0" cy="0"/>
+          <a:chOff x="0" y="0"/>
+          <a:chExt cx="0" cy="0"/>
+        </a:xfrm>
+      </p:grpSpPr>
+      <p:sp>
+        <p:nvSpPr>
+          <p:cNvPr id="2" name="Title 1"/>
+          <p:cNvSpPr>
+            <a:spLocks noGrp="1"/>
+          </p:cNvSpPr>
+          <p:nvPr>
+            <p:ph type="title"/>
+          </p:nvPr>
+        </p:nvSpPr>
+        <p:spPr>
+          <a:xfrm>
+            <a:off x="684212" y="3429000"/>
+            <a:ext cx="8534400" cy="1697400"/>
+          </a:xfrm>
+        </p:spPr>
+        <p:txBody>
+          <a:bodyPr anchor="b">
+            <a:normAutofit/>
+          </a:bodyPr>
+          <a:lstStyle>
+            <a:lvl1pPr algn="l">
+              <a:defRPr sz="3200" b="0" cap="all"/>
+            </a:lvl1pPr>
+          </a:lstStyle>
+          <a:p>
+            <a:r>
+              <a:rPr lang="en-US"/>
+              <a:t>Click to edit Master title style</a:t>
+            </a:r>
+            <a:endParaRPr lang="en-US" dirty="0"/>
+          </a:p>
+        </p:txBody>
+      </p:sp>
+      <p:sp>
+        <p:nvSpPr>
+          <p:cNvPr id="3" name="Text Placeholder 2"/>
+          <p:cNvSpPr>
+            <a:spLocks noGrp="1"/>
+          </p:cNvSpPr>
+          <p:nvPr>
+            <p:ph type="body" idx="1"/>
+          </p:nvPr>
+        </p:nvSpPr>
+        <p:spPr>
+          <a:xfrm>
+            <a:off x="684211" y="5132981"/>
+            <a:ext cx="8535990" cy="860400"/>
+          </a:xfrm>
+        </p:spPr>
+        <p:txBody>
+          <a:bodyPr anchor="t">
+            <a:normAutofit/>
+          </a:bodyPr>
+          <a:lstStyle>
+            <a:lvl1pPr marL="0" indent="0" algn="l">
+              <a:buNone/>
+              <a:defRPr sz="2000">
+                <a:solidFill>
+                  <a:schemeClr val="bg2">
+                    <a:lumMod val="75000"/>
+                  </a:schemeClr>
+                </a:solidFill>
+              </a:defRPr>
+            </a:lvl1pPr>
+            <a:lvl2pPr marL="457200" indent="0">
+              <a:buNone/>
+              <a:defRPr sz="1800">
+                <a:solidFill>
+                  <a:schemeClr val="tx1">
+                    <a:tint val="75000"/>
+                  </a:schemeClr>
+                </a:solidFill>
+              </a:defRPr>
+            </a:lvl2pPr>
+            <a:lvl3pPr marL="914400" indent="0">
+              <a:buNone/>
+              <a:defRPr sz="1600">
+                <a:solidFill>
+                  <a:schemeClr val="tx1">
+                    <a:tint val="75000"/>
+                  </a:schemeClr>
+                </a:solidFill>
+              </a:defRPr>
+            </a:lvl3pPr>
+            <a:lvl4pPr marL="1371600" indent="0">
+              <a:buNone/>
+              <a:defRPr sz="1400">
+                <a:solidFill>
+                  <a:schemeClr val="tx1">
+                    <a:tint val="75000"/>
+                  </a:schemeClr>
+                </a:solidFill>
+              </a:defRPr>
+            </a:lvl4pPr>
+            <a:lvl5pPr marL="1828800" indent="0">
+              <a:buNone/>
+              <a:defRPr sz="1400">
+                <a:solidFill>
+                  <a:schemeClr val="tx1">
+                    <a:tint val="75000"/>
+                  </a:schemeClr>
+                </a:solidFill>
+              </a:defRPr>
+            </a:lvl5pPr>
+            <a:lvl6pPr marL="2286000" indent="0">
+              <a:buNone/>
+              <a:defRPr sz="1400">
+                <a:solidFill>
+                  <a:schemeClr val="tx1">
+                    <a:tint val="75000"/>
+                  </a:schemeClr>
+                </a:solidFill>
+              </a:defRPr>
+            </a:lvl6pPr>
+            <a:lvl7pPr marL="2743200" indent="0">
+              <a:buNone/>
+              <a:defRPr sz="1400">
+                <a:solidFill>
+                  <a:schemeClr val="tx1">
+                    <a:tint val="75000"/>
+                  </a:schemeClr>
+                </a:solidFill>
+              </a:defRPr>
+            </a:lvl7pPr>
+            <a:lvl8pPr marL="3200400" indent="0">
+              <a:buNone/>
+              <a:defRPr sz="1400">
+                <a:solidFill>
+                  <a:schemeClr val="tx1">
+                    <a:tint val="75000"/>
+                  </a:schemeClr>
+                </a:solidFill>
+              </a:defRPr>
+            </a:lvl8pPr>
+            <a:lvl9pPr marL="3657600" indent="0">
+              <a:buNone/>
+              <a:defRPr sz="1400">
+                <a:solidFill>
+                  <a:schemeClr val="tx1">
+                    <a:tint val="75000"/>
+                  </a:schemeClr>
+                </a:solidFill>
+              </a:defRPr>
+            </a:lvl9pPr>
+          </a:lstStyle>
+          <a:p>
+            <a:pPr lvl="0"/>
+            <a:r>
+              <a:rPr lang="en-US"/>
+              <a:t>Click to edit Master text styles</a:t>
+            </a:r>
+          </a:p>
+        </p:txBody>
+      </p:sp>
+      <p:sp>
+        <p:nvSpPr>
+          <p:cNvPr id="4" name="Date Placeholder 3"/>
+          <p:cNvSpPr>
+            <a:spLocks noGrp="1"/>
+          </p:cNvSpPr>
+          <p:nvPr>
+            <p:ph type="dt" sz="half" idx="10"/>
+          </p:nvPr>
+        </p:nvSpPr>
+        <p:spPr/>
+        <p:txBody>
+          <a:bodyPr/>
+          <a:lstStyle/>
+          <a:p>
+            <a:fld id="{7B289A56-B7BF-4EE2-A684-7373F14AFF3B}" type="datetimeFigureOut">
+              <a:rPr lang="en-IN" smtClean="0"/>
+              <a:t>15-04-2026</a:t>
+            </a:fld>
+            <a:endParaRPr lang="en-IN"/>
+          </a:p>
+        </p:txBody>
+      </p:sp>
+      <p:sp>
+        <p:nvSpPr>
+          <p:cNvPr id="5" name="Footer Placeholder 4"/>
+          <p:cNvSpPr>
+            <a:spLocks noGrp="1"/>
+          </p:cNvSpPr>
+          <p:nvPr>
+            <p:ph type="ftr" sz="quarter" idx="11"/>
+          </p:nvPr>
+        </p:nvSpPr>
+        <p:spPr/>
+        <p:txBody>
+          <a:bodyPr/>
+          <a:lstStyle/>
+          <a:p>
+            <a:endParaRPr lang="en-IN"/>
+          </a:p>
+        </p:txBody>
+      </p:sp>
+      <p:sp>
+        <p:nvSpPr>
+          <p:cNvPr id="6" name="Slide Number Placeholder 5"/>
+          <p:cNvSpPr>
+            <a:spLocks noGrp="1"/>
+          </p:cNvSpPr>
+          <p:nvPr>
+            <p:ph type="sldNum" sz="quarter" idx="12"/>
+          </p:nvPr>
+        </p:nvSpPr>
+        <p:spPr/>
+        <p:txBody>
+          <a:bodyPr/>
+          <a:lstStyle/>
+          <a:p>
+            <a:fld id="{3E05A8C5-EE7D-4E52-AF3E-16E9F1C18F47}" type="slidenum">
+              <a:rPr lang="en-IN" smtClean="0"/>
+              <a:t>‹#›</a:t>
+            </a:fld>
+            <a:endParaRPr lang="en-IN"/>
+          </a:p>
+        </p:txBody>
+      </p:sp>
+    </p:spTree>
+    <p:extLst>
+      <p:ext uri="{BB962C8B-B14F-4D97-AF65-F5344CB8AC3E}">
+        <p14:creationId xmlns:p14="http://schemas.microsoft.com/office/powerpoint/2010/main" val="2150829512"/>
+      </p:ext>
+    </p:extLst>
+  </p:cSld>
+  <p:clrMapOvr>
+    <a:masterClrMapping/>
+  </p:clrMapOvr>
+</p:sldLayout>
+</file>
+
+<file path=ppt/slideLayouts/slideLayout14.xml><?xml version="1.0" encoding="utf-8"?>
+<p:sldLayout xmlns:a="http://schemas.openxmlformats.org/drawingml/2006/main" xmlns:r="http://schemas.openxmlformats.org/officeDocument/2006/relationships" xmlns:p="http://schemas.openxmlformats.org/presentationml/2006/main" preserve="1">
+  <p:cSld name="Quote Name Card">
+    <p:spTree>
+      <p:nvGrpSpPr>
+        <p:cNvPr id="1" name=""/>
+        <p:cNvGrpSpPr/>
+        <p:nvPr/>
+      </p:nvGrpSpPr>
+      <p:grpSpPr>
+        <a:xfrm>
+          <a:off x="0" y="0"/>
+          <a:ext cx="0" cy="0"/>
+          <a:chOff x="0" y="0"/>
+          <a:chExt cx="0" cy="0"/>
+        </a:xfrm>
+      </p:grpSpPr>
+      <p:sp>
+        <p:nvSpPr>
+          <p:cNvPr id="2" name="Title 1"/>
+          <p:cNvSpPr>
+            <a:spLocks noGrp="1"/>
+          </p:cNvSpPr>
+          <p:nvPr>
+            <p:ph type="title"/>
+          </p:nvPr>
+        </p:nvSpPr>
+        <p:spPr>
+          <a:xfrm>
+            <a:off x="1141413" y="685800"/>
+            <a:ext cx="9144000" cy="2743200"/>
+          </a:xfrm>
+        </p:spPr>
+        <p:txBody>
+          <a:bodyPr anchor="ctr">
+            <a:normAutofit/>
+          </a:bodyPr>
+          <a:lstStyle>
+            <a:lvl1pPr algn="l">
+              <a:defRPr sz="3200" b="0" cap="all">
+                <a:solidFill>
+                  <a:schemeClr val="tx1"/>
+                </a:solidFill>
+              </a:defRPr>
+            </a:lvl1pPr>
+          </a:lstStyle>
+          <a:p>
+            <a:r>
+              <a:rPr lang="en-US"/>
+              <a:t>Click to edit Master title style</a:t>
+            </a:r>
+            <a:endParaRPr lang="en-US" dirty="0"/>
+          </a:p>
+        </p:txBody>
+      </p:sp>
+      <p:sp>
+        <p:nvSpPr>
+          <p:cNvPr id="10" name="Text Placeholder 9"/>
+          <p:cNvSpPr>
+            <a:spLocks noGrp="1"/>
+          </p:cNvSpPr>
+          <p:nvPr>
+            <p:ph type="body" sz="quarter" idx="13"/>
+          </p:nvPr>
+        </p:nvSpPr>
+        <p:spPr>
+          <a:xfrm>
+            <a:off x="684212" y="3928534"/>
+            <a:ext cx="8534401" cy="1049866"/>
+          </a:xfrm>
+        </p:spPr>
+        <p:txBody>
+          <a:bodyPr vert="horz" lIns="91440" tIns="45720" rIns="91440" bIns="45720" rtlCol="0" anchor="b">
+            <a:normAutofit/>
+          </a:bodyPr>
+          <a:lstStyle>
+            <a:lvl1pPr>
+              <a:buNone/>
+              <a:defRPr lang="en-US" sz="2400" b="0" cap="all" dirty="0">
+                <a:ln w="3175" cmpd="sng">
+                  <a:noFill/>
+                </a:ln>
+                <a:solidFill>
+                  <a:schemeClr val="tx1"/>
+                </a:solidFill>
+                <a:effectLst/>
+              </a:defRPr>
+            </a:lvl1pPr>
+          </a:lstStyle>
+          <a:p>
+            <a:pPr marL="0" lvl="0">
+              <a:spcBef>
+                <a:spcPct val="0"/>
+              </a:spcBef>
+              <a:buNone/>
+            </a:pPr>
+            <a:r>
+              <a:rPr lang="en-US"/>
+              <a:t>Click to edit Master text styles</a:t>
+            </a:r>
+          </a:p>
+        </p:txBody>
+      </p:sp>
+      <p:sp>
+        <p:nvSpPr>
+          <p:cNvPr id="3" name="Text Placeholder 2"/>
+          <p:cNvSpPr>
+            <a:spLocks noGrp="1"/>
+          </p:cNvSpPr>
+          <p:nvPr>
+            <p:ph type="body" idx="1"/>
+          </p:nvPr>
+        </p:nvSpPr>
+        <p:spPr>
+          <a:xfrm>
+            <a:off x="684211" y="4978400"/>
+            <a:ext cx="8534401" cy="1016000"/>
+          </a:xfrm>
+        </p:spPr>
+        <p:txBody>
+          <a:bodyPr anchor="t">
+            <a:normAutofit/>
+          </a:bodyPr>
+          <a:lstStyle>
+            <a:lvl1pPr marL="0" indent="0" algn="l">
+              <a:buNone/>
+              <a:defRPr sz="1800">
+                <a:solidFill>
+                  <a:schemeClr val="bg2">
+                    <a:lumMod val="75000"/>
+                  </a:schemeClr>
+                </a:solidFill>
+              </a:defRPr>
+            </a:lvl1pPr>
+            <a:lvl2pPr marL="457200" indent="0">
+              <a:buNone/>
+              <a:defRPr sz="1800">
+                <a:solidFill>
+                  <a:schemeClr val="tx1">
+                    <a:tint val="75000"/>
+                  </a:schemeClr>
+                </a:solidFill>
+              </a:defRPr>
+            </a:lvl2pPr>
+            <a:lvl3pPr marL="914400" indent="0">
+              <a:buNone/>
+              <a:defRPr sz="1600">
+                <a:solidFill>
+                  <a:schemeClr val="tx1">
+                    <a:tint val="75000"/>
+                  </a:schemeClr>
+                </a:solidFill>
+              </a:defRPr>
+            </a:lvl3pPr>
+            <a:lvl4pPr marL="1371600" indent="0">
+              <a:buNone/>
+              <a:defRPr sz="1400">
+                <a:solidFill>
+                  <a:schemeClr val="tx1">
+                    <a:tint val="75000"/>
+                  </a:schemeClr>
+                </a:solidFill>
+              </a:defRPr>
+            </a:lvl4pPr>
+            <a:lvl5pPr marL="1828800" indent="0">
+              <a:buNone/>
+              <a:defRPr sz="1400">
+                <a:solidFill>
+                  <a:schemeClr val="tx1">
+                    <a:tint val="75000"/>
+                  </a:schemeClr>
+                </a:solidFill>
+              </a:defRPr>
+            </a:lvl5pPr>
+            <a:lvl6pPr marL="2286000" indent="0">
+              <a:buNone/>
+              <a:defRPr sz="1400">
+                <a:solidFill>
+                  <a:schemeClr val="tx1">
+                    <a:tint val="75000"/>
+                  </a:schemeClr>
+                </a:solidFill>
+              </a:defRPr>
+            </a:lvl6pPr>
+            <a:lvl7pPr marL="2743200" indent="0">
+              <a:buNone/>
+              <a:defRPr sz="1400">
+                <a:solidFill>
+                  <a:schemeClr val="tx1">
+                    <a:tint val="75000"/>
+                  </a:schemeClr>
+                </a:solidFill>
+              </a:defRPr>
+            </a:lvl7pPr>
+            <a:lvl8pPr marL="3200400" indent="0">
+              <a:buNone/>
+              <a:defRPr sz="1400">
+                <a:solidFill>
+                  <a:schemeClr val="tx1">
+                    <a:tint val="75000"/>
+                  </a:schemeClr>
+                </a:solidFill>
+              </a:defRPr>
+            </a:lvl8pPr>
+            <a:lvl9pPr marL="3657600" indent="0">
+              <a:buNone/>
+              <a:defRPr sz="1400">
+                <a:solidFill>
+                  <a:schemeClr val="tx1">
+                    <a:tint val="75000"/>
+                  </a:schemeClr>
+                </a:solidFill>
+              </a:defRPr>
+            </a:lvl9pPr>
+          </a:lstStyle>
+          <a:p>
+            <a:pPr lvl="0"/>
+            <a:r>
+              <a:rPr lang="en-US"/>
+              <a:t>Click to edit Master text styles</a:t>
+            </a:r>
+          </a:p>
+        </p:txBody>
+      </p:sp>
+      <p:sp>
+        <p:nvSpPr>
+          <p:cNvPr id="4" name="Date Placeholder 3"/>
+          <p:cNvSpPr>
+            <a:spLocks noGrp="1"/>
+          </p:cNvSpPr>
+          <p:nvPr>
+            <p:ph type="dt" sz="half" idx="10"/>
+          </p:nvPr>
+        </p:nvSpPr>
+        <p:spPr/>
+        <p:txBody>
+          <a:bodyPr/>
+          <a:lstStyle/>
+          <a:p>
+            <a:fld id="{7B289A56-B7BF-4EE2-A684-7373F14AFF3B}" type="datetimeFigureOut">
+              <a:rPr lang="en-IN" smtClean="0"/>
+              <a:t>15-04-2026</a:t>
+            </a:fld>
+            <a:endParaRPr lang="en-IN"/>
+          </a:p>
+        </p:txBody>
+      </p:sp>
+      <p:sp>
+        <p:nvSpPr>
+          <p:cNvPr id="5" name="Footer Placeholder 4"/>
+          <p:cNvSpPr>
+            <a:spLocks noGrp="1"/>
+          </p:cNvSpPr>
+          <p:nvPr>
+            <p:ph type="ftr" sz="quarter" idx="11"/>
+          </p:nvPr>
+        </p:nvSpPr>
+        <p:spPr/>
+        <p:txBody>
+          <a:bodyPr/>
+          <a:lstStyle/>
+          <a:p>
+            <a:endParaRPr lang="en-IN"/>
+          </a:p>
+        </p:txBody>
+      </p:sp>
+      <p:sp>
+        <p:nvSpPr>
+          <p:cNvPr id="6" name="Slide Number Placeholder 5"/>
+          <p:cNvSpPr>
+            <a:spLocks noGrp="1"/>
+          </p:cNvSpPr>
+          <p:nvPr>
+            <p:ph type="sldNum" sz="quarter" idx="12"/>
+          </p:nvPr>
+        </p:nvSpPr>
+        <p:spPr/>
+        <p:txBody>
+          <a:bodyPr/>
+          <a:lstStyle/>
+          <a:p>
+            <a:fld id="{3E05A8C5-EE7D-4E52-AF3E-16E9F1C18F47}" type="slidenum">
+              <a:rPr lang="en-IN" smtClean="0"/>
+              <a:t>‹#›</a:t>
+            </a:fld>
+            <a:endParaRPr lang="en-IN"/>
+          </a:p>
+        </p:txBody>
+      </p:sp>
+      <p:sp>
+        <p:nvSpPr>
+          <p:cNvPr id="11" name="TextBox 10"/>
+          <p:cNvSpPr txBox="1"/>
+          <p:nvPr/>
+        </p:nvSpPr>
+        <p:spPr>
+          <a:xfrm>
+            <a:off x="531812" y="812222"/>
+            <a:ext cx="609600" cy="584776"/>
+          </a:xfrm>
+          <a:prstGeom prst="rect">
+            <a:avLst/>
+          </a:prstGeom>
+        </p:spPr>
+        <p:txBody>
+          <a:bodyPr vert="horz" lIns="91440" tIns="45720" rIns="91440" bIns="45720" rtlCol="0" anchor="ctr">
+            <a:noAutofit/>
+          </a:bodyPr>
+          <a:lstStyle/>
+          <a:p>
+            <a:pPr lvl="0"/>
+            <a:r>
+              <a:rPr lang="en-US" sz="8000" dirty="0">
+                <a:solidFill>
+                  <a:schemeClr val="tx1"/>
+                </a:solidFill>
+                <a:effectLst/>
+              </a:rPr>
+              <a:t>“</a:t>
+            </a:r>
+          </a:p>
+        </p:txBody>
+      </p:sp>
+      <p:sp>
+        <p:nvSpPr>
+          <p:cNvPr id="12" name="TextBox 11"/>
+          <p:cNvSpPr txBox="1"/>
+          <p:nvPr/>
+        </p:nvSpPr>
+        <p:spPr>
+          <a:xfrm>
+            <a:off x="10285412" y="2768601"/>
+            <a:ext cx="609600" cy="584776"/>
+          </a:xfrm>
+          <a:prstGeom prst="rect">
+            <a:avLst/>
+          </a:prstGeom>
+        </p:spPr>
+        <p:txBody>
+          <a:bodyPr vert="horz" lIns="91440" tIns="45720" rIns="91440" bIns="45720" rtlCol="0" anchor="ctr">
+            <a:noAutofit/>
+          </a:bodyPr>
+          <a:lstStyle/>
+          <a:p>
+            <a:pPr lvl="0" algn="r"/>
+            <a:r>
+              <a:rPr lang="en-US" sz="8000" dirty="0">
+                <a:solidFill>
+                  <a:schemeClr val="tx1"/>
+                </a:solidFill>
+                <a:effectLst/>
+              </a:rPr>
+              <a:t>”</a:t>
+            </a:r>
+          </a:p>
+        </p:txBody>
+      </p:sp>
+    </p:spTree>
+    <p:extLst>
+      <p:ext uri="{BB962C8B-B14F-4D97-AF65-F5344CB8AC3E}">
+        <p14:creationId xmlns:p14="http://schemas.microsoft.com/office/powerpoint/2010/main" val="4286664708"/>
+      </p:ext>
+    </p:extLst>
+  </p:cSld>
+  <p:clrMapOvr>
+    <a:masterClrMapping/>
+  </p:clrMapOvr>
+</p:sldLayout>
+</file>
+
+<file path=ppt/slideLayouts/slideLayout15.xml><?xml version="1.0" encoding="utf-8"?>
+<p:sldLayout xmlns:a="http://schemas.openxmlformats.org/drawingml/2006/main" xmlns:r="http://schemas.openxmlformats.org/officeDocument/2006/relationships" xmlns:p="http://schemas.openxmlformats.org/presentationml/2006/main" preserve="1">
+  <p:cSld name="True or False">
+    <p:spTree>
+      <p:nvGrpSpPr>
+        <p:cNvPr id="1" name=""/>
+        <p:cNvGrpSpPr/>
+        <p:nvPr/>
+      </p:nvGrpSpPr>
+      <p:grpSpPr>
+        <a:xfrm>
+          <a:off x="0" y="0"/>
+          <a:ext cx="0" cy="0"/>
+          <a:chOff x="0" y="0"/>
+          <a:chExt cx="0" cy="0"/>
+        </a:xfrm>
+      </p:grpSpPr>
+      <p:sp>
+        <p:nvSpPr>
+          <p:cNvPr id="2" name="Title 1"/>
+          <p:cNvSpPr>
+            <a:spLocks noGrp="1"/>
+          </p:cNvSpPr>
+          <p:nvPr>
+            <p:ph type="title"/>
+          </p:nvPr>
+        </p:nvSpPr>
+        <p:spPr>
+          <a:xfrm>
+            <a:off x="684213" y="685800"/>
+            <a:ext cx="10058400" cy="2743200"/>
+          </a:xfrm>
+        </p:spPr>
+        <p:txBody>
+          <a:bodyPr vert="horz" lIns="91440" tIns="45720" rIns="91440" bIns="45720" rtlCol="0" anchor="ctr">
+            <a:normAutofit/>
+          </a:bodyPr>
+          <a:lstStyle>
+            <a:lvl1pPr>
+              <a:defRPr lang="en-US" b="0" dirty="0"/>
+            </a:lvl1pPr>
+          </a:lstStyle>
+          <a:p>
+            <a:pPr marL="0" lvl="0"/>
+            <a:r>
+              <a:rPr lang="en-US"/>
+              <a:t>Click to edit Master title style</a:t>
+            </a:r>
+            <a:endParaRPr lang="en-US" dirty="0"/>
+          </a:p>
+        </p:txBody>
+      </p:sp>
+      <p:sp>
+        <p:nvSpPr>
+          <p:cNvPr id="10" name="Text Placeholder 9"/>
+          <p:cNvSpPr>
+            <a:spLocks noGrp="1"/>
+          </p:cNvSpPr>
+          <p:nvPr>
+            <p:ph type="body" sz="quarter" idx="13"/>
+          </p:nvPr>
+        </p:nvSpPr>
+        <p:spPr>
+          <a:xfrm>
+            <a:off x="684212" y="3928534"/>
+            <a:ext cx="8534400" cy="838200"/>
+          </a:xfrm>
+        </p:spPr>
+        <p:txBody>
+          <a:bodyPr vert="horz" lIns="91440" tIns="45720" rIns="91440" bIns="45720" rtlCol="0" anchor="b">
+            <a:normAutofit/>
+          </a:bodyPr>
+          <a:lstStyle>
+            <a:lvl1pPr>
+              <a:buNone/>
+              <a:defRPr lang="en-US" sz="2400" b="0" cap="all" dirty="0">
+                <a:ln w="3175" cmpd="sng">
+                  <a:noFill/>
+                </a:ln>
+                <a:solidFill>
+                  <a:schemeClr val="tx1"/>
+                </a:solidFill>
+                <a:effectLst/>
+              </a:defRPr>
+            </a:lvl1pPr>
+          </a:lstStyle>
+          <a:p>
+            <a:pPr marL="0" lvl="0">
+              <a:spcBef>
+                <a:spcPct val="0"/>
+              </a:spcBef>
+              <a:buNone/>
+            </a:pPr>
+            <a:r>
+              <a:rPr lang="en-US"/>
+              <a:t>Click to edit Master text styles</a:t>
+            </a:r>
+          </a:p>
+        </p:txBody>
+      </p:sp>
+      <p:sp>
+        <p:nvSpPr>
+          <p:cNvPr id="3" name="Text Placeholder 2"/>
+          <p:cNvSpPr>
+            <a:spLocks noGrp="1"/>
+          </p:cNvSpPr>
+          <p:nvPr>
+            <p:ph type="body" idx="1"/>
+          </p:nvPr>
+        </p:nvSpPr>
+        <p:spPr>
+          <a:xfrm>
+            <a:off x="684211" y="4766732"/>
+            <a:ext cx="8534401" cy="1227667"/>
+          </a:xfrm>
+        </p:spPr>
+        <p:txBody>
+          <a:bodyPr anchor="t">
+            <a:normAutofit/>
+          </a:bodyPr>
+          <a:lstStyle>
+            <a:lvl1pPr marL="0" indent="0" algn="l">
+              <a:buNone/>
+              <a:defRPr sz="1800">
+                <a:solidFill>
+                  <a:schemeClr val="bg2">
+                    <a:lumMod val="75000"/>
+                  </a:schemeClr>
+                </a:solidFill>
+              </a:defRPr>
+            </a:lvl1pPr>
+            <a:lvl2pPr marL="457200" indent="0">
+              <a:buNone/>
+              <a:defRPr sz="1800">
+                <a:solidFill>
+                  <a:schemeClr val="tx1">
+                    <a:tint val="75000"/>
+                  </a:schemeClr>
+                </a:solidFill>
+              </a:defRPr>
+            </a:lvl2pPr>
+            <a:lvl3pPr marL="914400" indent="0">
+              <a:buNone/>
+              <a:defRPr sz="1600">
+                <a:solidFill>
+                  <a:schemeClr val="tx1">
+                    <a:tint val="75000"/>
+                  </a:schemeClr>
+                </a:solidFill>
+              </a:defRPr>
+            </a:lvl3pPr>
+            <a:lvl4pPr marL="1371600" indent="0">
+              <a:buNone/>
+              <a:defRPr sz="1400">
+                <a:solidFill>
+                  <a:schemeClr val="tx1">
+                    <a:tint val="75000"/>
+                  </a:schemeClr>
+                </a:solidFill>
+              </a:defRPr>
+            </a:lvl4pPr>
+            <a:lvl5pPr marL="1828800" indent="0">
+              <a:buNone/>
+              <a:defRPr sz="1400">
+                <a:solidFill>
+                  <a:schemeClr val="tx1">
+                    <a:tint val="75000"/>
+                  </a:schemeClr>
+                </a:solidFill>
+              </a:defRPr>
+            </a:lvl5pPr>
+            <a:lvl6pPr marL="2286000" indent="0">
+              <a:buNone/>
+              <a:defRPr sz="1400">
+                <a:solidFill>
+                  <a:schemeClr val="tx1">
+                    <a:tint val="75000"/>
+                  </a:schemeClr>
+                </a:solidFill>
+              </a:defRPr>
+            </a:lvl6pPr>
+            <a:lvl7pPr marL="2743200" indent="0">
+              <a:buNone/>
+              <a:defRPr sz="1400">
+                <a:solidFill>
+                  <a:schemeClr val="tx1">
+                    <a:tint val="75000"/>
+                  </a:schemeClr>
+                </a:solidFill>
+              </a:defRPr>
+            </a:lvl7pPr>
+            <a:lvl8pPr marL="3200400" indent="0">
+              <a:buNone/>
+              <a:defRPr sz="1400">
+                <a:solidFill>
+                  <a:schemeClr val="tx1">
+                    <a:tint val="75000"/>
+                  </a:schemeClr>
+                </a:solidFill>
+              </a:defRPr>
+            </a:lvl8pPr>
+            <a:lvl9pPr marL="3657600" indent="0">
+              <a:buNone/>
+              <a:defRPr sz="1400">
+                <a:solidFill>
+                  <a:schemeClr val="tx1">
+                    <a:tint val="75000"/>
+                  </a:schemeClr>
+                </a:solidFill>
+              </a:defRPr>
+            </a:lvl9pPr>
+          </a:lstStyle>
+          <a:p>
+            <a:pPr lvl="0"/>
+            <a:r>
+              <a:rPr lang="en-US"/>
+              <a:t>Click to edit Master text styles</a:t>
+            </a:r>
+          </a:p>
+        </p:txBody>
+      </p:sp>
+      <p:sp>
+        <p:nvSpPr>
+          <p:cNvPr id="4" name="Date Placeholder 3"/>
+          <p:cNvSpPr>
+            <a:spLocks noGrp="1"/>
+          </p:cNvSpPr>
+          <p:nvPr>
+            <p:ph type="dt" sz="half" idx="10"/>
+          </p:nvPr>
+        </p:nvSpPr>
+        <p:spPr/>
+        <p:txBody>
+          <a:bodyPr/>
+          <a:lstStyle/>
+          <a:p>
+            <a:fld id="{7B289A56-B7BF-4EE2-A684-7373F14AFF3B}" type="datetimeFigureOut">
+              <a:rPr lang="en-IN" smtClean="0"/>
+              <a:t>15-04-2026</a:t>
+            </a:fld>
+            <a:endParaRPr lang="en-IN"/>
+          </a:p>
+        </p:txBody>
+      </p:sp>
+      <p:sp>
+        <p:nvSpPr>
+          <p:cNvPr id="5" name="Footer Placeholder 4"/>
+          <p:cNvSpPr>
+            <a:spLocks noGrp="1"/>
+          </p:cNvSpPr>
+          <p:nvPr>
+            <p:ph type="ftr" sz="quarter" idx="11"/>
+          </p:nvPr>
+        </p:nvSpPr>
+        <p:spPr/>
+        <p:txBody>
+          <a:bodyPr/>
+          <a:lstStyle/>
+          <a:p>
+            <a:endParaRPr lang="en-IN"/>
+          </a:p>
+        </p:txBody>
+      </p:sp>
+      <p:sp>
+        <p:nvSpPr>
+          <p:cNvPr id="6" name="Slide Number Placeholder 5"/>
+          <p:cNvSpPr>
+            <a:spLocks noGrp="1"/>
+          </p:cNvSpPr>
+          <p:nvPr>
+            <p:ph type="sldNum" sz="quarter" idx="12"/>
+          </p:nvPr>
+        </p:nvSpPr>
+        <p:spPr/>
+        <p:txBody>
+          <a:bodyPr/>
+          <a:lstStyle/>
+          <a:p>
+            <a:fld id="{3E05A8C5-EE7D-4E52-AF3E-16E9F1C18F47}" type="slidenum">
+              <a:rPr lang="en-IN" smtClean="0"/>
+              <a:t>‹#›</a:t>
+            </a:fld>
+            <a:endParaRPr lang="en-IN"/>
+          </a:p>
+        </p:txBody>
+      </p:sp>
+    </p:spTree>
+    <p:extLst>
+      <p:ext uri="{BB962C8B-B14F-4D97-AF65-F5344CB8AC3E}">
+        <p14:creationId xmlns:p14="http://schemas.microsoft.com/office/powerpoint/2010/main" val="1323060657"/>
+      </p:ext>
+    </p:extLst>
+  </p:cSld>
+  <p:clrMapOvr>
+    <a:masterClrMapping/>
+  </p:clrMapOvr>
+</p:sldLayout>
+</file>
+
+<file path=ppt/slideLayouts/slideLayout16.xml><?xml version="1.0" encoding="utf-8"?>
 <p:sldLayout xmlns:a="http://schemas.openxmlformats.org/drawingml/2006/main" xmlns:r="http://schemas.openxmlformats.org/officeDocument/2006/relationships" xmlns:p="http://schemas.openxmlformats.org/presentationml/2006/main" type="vertTx" preserve="1">
   <p:cSld name="Title and Vertical Text">
     <p:spTree>
@@ -365,13 +2376,7 @@
       </p:grpSpPr>
       <p:sp>
         <p:nvSpPr>
-          <p:cNvPr id="2" name="Title 1">
-            <a:extLst>
-              <a:ext uri="{FF2B5EF4-FFF2-40B4-BE49-F238E27FC236}">
-                <a16:creationId xmlns:a16="http://schemas.microsoft.com/office/drawing/2014/main" id="{F8BC7D78-8517-28DA-A27A-D8FFDBD25017}"/>
-              </a:ext>
-            </a:extLst>
-          </p:cNvPr>
+          <p:cNvPr id="2" name="Title 1"/>
           <p:cNvSpPr>
             <a:spLocks noGrp="1"/>
           </p:cNvSpPr>
@@ -382,25 +2387,23 @@
         <p:spPr/>
         <p:txBody>
           <a:bodyPr/>
-          <a:lstStyle/>
+          <a:lstStyle>
+            <a:lvl1pPr algn="l">
+              <a:defRPr/>
+            </a:lvl1pPr>
+          </a:lstStyle>
           <a:p>
             <a:r>
               <a:rPr lang="en-US"/>
               <a:t>Click to edit Master title style</a:t>
             </a:r>
-            <a:endParaRPr lang="en-IN"/>
-          </a:p>
-        </p:txBody>
-      </p:sp>
-      <p:sp>
-        <p:nvSpPr>
-          <p:cNvPr id="3" name="Vertical Text Placeholder 2">
-            <a:extLst>
-              <a:ext uri="{FF2B5EF4-FFF2-40B4-BE49-F238E27FC236}">
-                <a16:creationId xmlns:a16="http://schemas.microsoft.com/office/drawing/2014/main" id="{DE0457C4-E215-0637-C3AF-8C3D1FCBF2F5}"/>
-              </a:ext>
-            </a:extLst>
-          </p:cNvPr>
+            <a:endParaRPr lang="en-US" dirty="0"/>
+          </a:p>
+        </p:txBody>
+      </p:sp>
+      <p:sp>
+        <p:nvSpPr>
+          <p:cNvPr id="3" name="Vertical Text Placeholder 2"/>
           <p:cNvSpPr>
             <a:spLocks noGrp="1"/>
           </p:cNvSpPr>
@@ -410,7 +2413,7 @@
         </p:nvSpPr>
         <p:spPr/>
         <p:txBody>
-          <a:bodyPr vert="eaVert"/>
+          <a:bodyPr vert="eaVert" anchor="t"/>
           <a:lstStyle/>
           <a:p>
             <a:pPr lvl="0"/>
@@ -446,19 +2449,13 @@
               <a:rPr lang="en-US"/>
               <a:t>Fifth level</a:t>
             </a:r>
-            <a:endParaRPr lang="en-IN"/>
-          </a:p>
-        </p:txBody>
-      </p:sp>
-      <p:sp>
-        <p:nvSpPr>
-          <p:cNvPr id="4" name="Date Placeholder 3">
-            <a:extLst>
-              <a:ext uri="{FF2B5EF4-FFF2-40B4-BE49-F238E27FC236}">
-                <a16:creationId xmlns:a16="http://schemas.microsoft.com/office/drawing/2014/main" id="{70202C78-9EFE-DF28-A614-944782ADBFAD}"/>
-              </a:ext>
-            </a:extLst>
-          </p:cNvPr>
+            <a:endParaRPr lang="en-US" dirty="0"/>
+          </a:p>
+        </p:txBody>
+      </p:sp>
+      <p:sp>
+        <p:nvSpPr>
+          <p:cNvPr id="4" name="Date Placeholder 3"/>
           <p:cNvSpPr>
             <a:spLocks noGrp="1"/>
           </p:cNvSpPr>
@@ -473,7 +2470,7 @@
           <a:p>
             <a:fld id="{7B289A56-B7BF-4EE2-A684-7373F14AFF3B}" type="datetimeFigureOut">
               <a:rPr lang="en-IN" smtClean="0"/>
-              <a:t>07-04-2026</a:t>
+              <a:t>15-04-2026</a:t>
             </a:fld>
             <a:endParaRPr lang="en-IN"/>
           </a:p>
@@ -481,13 +2478,7 @@
       </p:sp>
       <p:sp>
         <p:nvSpPr>
-          <p:cNvPr id="5" name="Footer Placeholder 4">
-            <a:extLst>
-              <a:ext uri="{FF2B5EF4-FFF2-40B4-BE49-F238E27FC236}">
-                <a16:creationId xmlns:a16="http://schemas.microsoft.com/office/drawing/2014/main" id="{A01652D1-928F-44A9-D700-AA5F4C04F834}"/>
-              </a:ext>
-            </a:extLst>
-          </p:cNvPr>
+          <p:cNvPr id="5" name="Footer Placeholder 4"/>
           <p:cNvSpPr>
             <a:spLocks noGrp="1"/>
           </p:cNvSpPr>
@@ -506,13 +2497,7 @@
       </p:sp>
       <p:sp>
         <p:nvSpPr>
-          <p:cNvPr id="6" name="Slide Number Placeholder 5">
-            <a:extLst>
-              <a:ext uri="{FF2B5EF4-FFF2-40B4-BE49-F238E27FC236}">
-                <a16:creationId xmlns:a16="http://schemas.microsoft.com/office/drawing/2014/main" id="{7E23B83E-DE60-62A4-DDC6-0166638EFBB9}"/>
-              </a:ext>
-            </a:extLst>
-          </p:cNvPr>
+          <p:cNvPr id="6" name="Slide Number Placeholder 5"/>
           <p:cNvSpPr>
             <a:spLocks noGrp="1"/>
           </p:cNvSpPr>
@@ -536,7 +2521,7 @@
     </p:spTree>
     <p:extLst>
       <p:ext uri="{BB962C8B-B14F-4D97-AF65-F5344CB8AC3E}">
-        <p14:creationId xmlns:p14="http://schemas.microsoft.com/office/powerpoint/2010/main" val="3966247903"/>
+        <p14:creationId xmlns:p14="http://schemas.microsoft.com/office/powerpoint/2010/main" val="3405891448"/>
       </p:ext>
     </p:extLst>
   </p:cSld>
@@ -546,7 +2531,7 @@
 </p:sldLayout>
 </file>
 
-<file path=ppt/slideLayouts/slideLayout11.xml><?xml version="1.0" encoding="utf-8"?>
+<file path=ppt/slideLayouts/slideLayout17.xml><?xml version="1.0" encoding="utf-8"?>
 <p:sldLayout xmlns:a="http://schemas.openxmlformats.org/drawingml/2006/main" xmlns:r="http://schemas.openxmlformats.org/officeDocument/2006/relationships" xmlns:p="http://schemas.openxmlformats.org/presentationml/2006/main" type="vertTitleAndTx" preserve="1">
   <p:cSld name="Vertical Title and Text">
     <p:spTree>
@@ -565,13 +2550,7 @@
       </p:grpSpPr>
       <p:sp>
         <p:nvSpPr>
-          <p:cNvPr id="2" name="Vertical Title 1">
-            <a:extLst>
-              <a:ext uri="{FF2B5EF4-FFF2-40B4-BE49-F238E27FC236}">
-                <a16:creationId xmlns:a16="http://schemas.microsoft.com/office/drawing/2014/main" id="{6C2510F1-7BC3-31D7-0266-19EAE7F79718}"/>
-              </a:ext>
-            </a:extLst>
-          </p:cNvPr>
+          <p:cNvPr id="2" name="Vertical Title 1"/>
           <p:cNvSpPr>
             <a:spLocks noGrp="1"/>
           </p:cNvSpPr>
@@ -581,8 +2560,8 @@
         </p:nvSpPr>
         <p:spPr>
           <a:xfrm>
-            <a:off x="8724900" y="365125"/>
-            <a:ext cx="2628900" cy="5811838"/>
+            <a:off x="8685212" y="685800"/>
+            <a:ext cx="2057400" cy="4572000"/>
           </a:xfrm>
         </p:spPr>
         <p:txBody>
@@ -593,19 +2572,13 @@
               <a:rPr lang="en-US"/>
               <a:t>Click to edit Master title style</a:t>
             </a:r>
-            <a:endParaRPr lang="en-IN"/>
-          </a:p>
-        </p:txBody>
-      </p:sp>
-      <p:sp>
-        <p:nvSpPr>
-          <p:cNvPr id="3" name="Vertical Text Placeholder 2">
-            <a:extLst>
-              <a:ext uri="{FF2B5EF4-FFF2-40B4-BE49-F238E27FC236}">
-                <a16:creationId xmlns:a16="http://schemas.microsoft.com/office/drawing/2014/main" id="{89A19C68-55AF-AAF3-C65B-31A5C1D0EB0B}"/>
-              </a:ext>
-            </a:extLst>
-          </p:cNvPr>
+            <a:endParaRPr lang="en-US" dirty="0"/>
+          </a:p>
+        </p:txBody>
+      </p:sp>
+      <p:sp>
+        <p:nvSpPr>
+          <p:cNvPr id="3" name="Vertical Text Placeholder 2"/>
           <p:cNvSpPr>
             <a:spLocks noGrp="1"/>
           </p:cNvSpPr>
@@ -615,12 +2588,12 @@
         </p:nvSpPr>
         <p:spPr>
           <a:xfrm>
-            <a:off x="838200" y="365125"/>
-            <a:ext cx="7734300" cy="5811838"/>
+            <a:off x="685800" y="685800"/>
+            <a:ext cx="7823200" cy="5308600"/>
           </a:xfrm>
         </p:spPr>
         <p:txBody>
-          <a:bodyPr vert="eaVert"/>
+          <a:bodyPr vert="eaVert" anchor="t"/>
           <a:lstStyle/>
           <a:p>
             <a:pPr lvl="0"/>
@@ -656,19 +2629,13 @@
               <a:rPr lang="en-US"/>
               <a:t>Fifth level</a:t>
             </a:r>
-            <a:endParaRPr lang="en-IN"/>
-          </a:p>
-        </p:txBody>
-      </p:sp>
-      <p:sp>
-        <p:nvSpPr>
-          <p:cNvPr id="4" name="Date Placeholder 3">
-            <a:extLst>
-              <a:ext uri="{FF2B5EF4-FFF2-40B4-BE49-F238E27FC236}">
-                <a16:creationId xmlns:a16="http://schemas.microsoft.com/office/drawing/2014/main" id="{532AE636-CB51-D73D-DDB9-04342DEBA867}"/>
-              </a:ext>
-            </a:extLst>
-          </p:cNvPr>
+            <a:endParaRPr lang="en-US" dirty="0"/>
+          </a:p>
+        </p:txBody>
+      </p:sp>
+      <p:sp>
+        <p:nvSpPr>
+          <p:cNvPr id="4" name="Date Placeholder 3"/>
           <p:cNvSpPr>
             <a:spLocks noGrp="1"/>
           </p:cNvSpPr>
@@ -683,7 +2650,7 @@
           <a:p>
             <a:fld id="{7B289A56-B7BF-4EE2-A684-7373F14AFF3B}" type="datetimeFigureOut">
               <a:rPr lang="en-IN" smtClean="0"/>
-              <a:t>07-04-2026</a:t>
+              <a:t>15-04-2026</a:t>
             </a:fld>
             <a:endParaRPr lang="en-IN"/>
           </a:p>
@@ -691,13 +2658,7 @@
       </p:sp>
       <p:sp>
         <p:nvSpPr>
-          <p:cNvPr id="5" name="Footer Placeholder 4">
-            <a:extLst>
-              <a:ext uri="{FF2B5EF4-FFF2-40B4-BE49-F238E27FC236}">
-                <a16:creationId xmlns:a16="http://schemas.microsoft.com/office/drawing/2014/main" id="{24ABDAD9-6500-E41D-1CBB-7FC9126F688B}"/>
-              </a:ext>
-            </a:extLst>
-          </p:cNvPr>
+          <p:cNvPr id="5" name="Footer Placeholder 4"/>
           <p:cNvSpPr>
             <a:spLocks noGrp="1"/>
           </p:cNvSpPr>
@@ -716,13 +2677,7 @@
       </p:sp>
       <p:sp>
         <p:nvSpPr>
-          <p:cNvPr id="6" name="Slide Number Placeholder 5">
-            <a:extLst>
-              <a:ext uri="{FF2B5EF4-FFF2-40B4-BE49-F238E27FC236}">
-                <a16:creationId xmlns:a16="http://schemas.microsoft.com/office/drawing/2014/main" id="{1C568266-F247-C64C-3559-6A0C24440CE4}"/>
-              </a:ext>
-            </a:extLst>
-          </p:cNvPr>
+          <p:cNvPr id="6" name="Slide Number Placeholder 5"/>
           <p:cNvSpPr>
             <a:spLocks noGrp="1"/>
           </p:cNvSpPr>
@@ -746,7 +2701,7 @@
     </p:spTree>
     <p:extLst>
       <p:ext uri="{BB962C8B-B14F-4D97-AF65-F5344CB8AC3E}">
-        <p14:creationId xmlns:p14="http://schemas.microsoft.com/office/powerpoint/2010/main" val="197688594"/>
+        <p14:creationId xmlns:p14="http://schemas.microsoft.com/office/powerpoint/2010/main" val="775053676"/>
       </p:ext>
     </p:extLst>
   </p:cSld>
@@ -775,13 +2730,7 @@
       </p:grpSpPr>
       <p:sp>
         <p:nvSpPr>
-          <p:cNvPr id="2" name="Title 1">
-            <a:extLst>
-              <a:ext uri="{FF2B5EF4-FFF2-40B4-BE49-F238E27FC236}">
-                <a16:creationId xmlns:a16="http://schemas.microsoft.com/office/drawing/2014/main" id="{7D661F88-B833-1200-D3CF-EE837B0825B8}"/>
-              </a:ext>
-            </a:extLst>
-          </p:cNvPr>
+          <p:cNvPr id="2" name="Title 1"/>
           <p:cNvSpPr>
             <a:spLocks noGrp="1"/>
           </p:cNvSpPr>
@@ -798,19 +2747,13 @@
               <a:rPr lang="en-US"/>
               <a:t>Click to edit Master title style</a:t>
             </a:r>
-            <a:endParaRPr lang="en-IN"/>
-          </a:p>
-        </p:txBody>
-      </p:sp>
-      <p:sp>
-        <p:nvSpPr>
-          <p:cNvPr id="3" name="Content Placeholder 2">
-            <a:extLst>
-              <a:ext uri="{FF2B5EF4-FFF2-40B4-BE49-F238E27FC236}">
-                <a16:creationId xmlns:a16="http://schemas.microsoft.com/office/drawing/2014/main" id="{9CC8CB8E-71BD-E0B3-64CF-7417B33BCE6E}"/>
-              </a:ext>
-            </a:extLst>
-          </p:cNvPr>
+            <a:endParaRPr lang="en-US" dirty="0"/>
+          </a:p>
+        </p:txBody>
+      </p:sp>
+      <p:sp>
+        <p:nvSpPr>
+          <p:cNvPr id="3" name="Content Placeholder 2"/>
           <p:cNvSpPr>
             <a:spLocks noGrp="1"/>
           </p:cNvSpPr>
@@ -820,7 +2763,7 @@
         </p:nvSpPr>
         <p:spPr/>
         <p:txBody>
-          <a:bodyPr/>
+          <a:bodyPr anchor="ctr"/>
           <a:lstStyle/>
           <a:p>
             <a:pPr lvl="0"/>
@@ -856,19 +2799,13 @@
               <a:rPr lang="en-US"/>
               <a:t>Fifth level</a:t>
             </a:r>
-            <a:endParaRPr lang="en-IN"/>
-          </a:p>
-        </p:txBody>
-      </p:sp>
-      <p:sp>
-        <p:nvSpPr>
-          <p:cNvPr id="4" name="Date Placeholder 3">
-            <a:extLst>
-              <a:ext uri="{FF2B5EF4-FFF2-40B4-BE49-F238E27FC236}">
-                <a16:creationId xmlns:a16="http://schemas.microsoft.com/office/drawing/2014/main" id="{927AA232-E33E-8A21-389D-F57473CF39A9}"/>
-              </a:ext>
-            </a:extLst>
-          </p:cNvPr>
+            <a:endParaRPr lang="en-US" dirty="0"/>
+          </a:p>
+        </p:txBody>
+      </p:sp>
+      <p:sp>
+        <p:nvSpPr>
+          <p:cNvPr id="4" name="Date Placeholder 3"/>
           <p:cNvSpPr>
             <a:spLocks noGrp="1"/>
           </p:cNvSpPr>
@@ -883,7 +2820,7 @@
           <a:p>
             <a:fld id="{7B289A56-B7BF-4EE2-A684-7373F14AFF3B}" type="datetimeFigureOut">
               <a:rPr lang="en-IN" smtClean="0"/>
-              <a:t>07-04-2026</a:t>
+              <a:t>15-04-2026</a:t>
             </a:fld>
             <a:endParaRPr lang="en-IN"/>
           </a:p>
@@ -891,13 +2828,7 @@
       </p:sp>
       <p:sp>
         <p:nvSpPr>
-          <p:cNvPr id="5" name="Footer Placeholder 4">
-            <a:extLst>
-              <a:ext uri="{FF2B5EF4-FFF2-40B4-BE49-F238E27FC236}">
-                <a16:creationId xmlns:a16="http://schemas.microsoft.com/office/drawing/2014/main" id="{033C86FC-555E-1772-0A31-2E81D8C8475A}"/>
-              </a:ext>
-            </a:extLst>
-          </p:cNvPr>
+          <p:cNvPr id="5" name="Footer Placeholder 4"/>
           <p:cNvSpPr>
             <a:spLocks noGrp="1"/>
           </p:cNvSpPr>
@@ -916,13 +2847,7 @@
       </p:sp>
       <p:sp>
         <p:nvSpPr>
-          <p:cNvPr id="6" name="Slide Number Placeholder 5">
-            <a:extLst>
-              <a:ext uri="{FF2B5EF4-FFF2-40B4-BE49-F238E27FC236}">
-                <a16:creationId xmlns:a16="http://schemas.microsoft.com/office/drawing/2014/main" id="{A4983072-3545-FC11-E0FE-8FC24CF2E220}"/>
-              </a:ext>
-            </a:extLst>
-          </p:cNvPr>
+          <p:cNvPr id="6" name="Slide Number Placeholder 5"/>
           <p:cNvSpPr>
             <a:spLocks noGrp="1"/>
           </p:cNvSpPr>
@@ -946,7 +2871,7 @@
     </p:spTree>
     <p:extLst>
       <p:ext uri="{BB962C8B-B14F-4D97-AF65-F5344CB8AC3E}">
-        <p14:creationId xmlns:p14="http://schemas.microsoft.com/office/powerpoint/2010/main" val="2369655819"/>
+        <p14:creationId xmlns:p14="http://schemas.microsoft.com/office/powerpoint/2010/main" val="2670700496"/>
       </p:ext>
     </p:extLst>
   </p:cSld>
@@ -975,13 +2900,7 @@
       </p:grpSpPr>
       <p:sp>
         <p:nvSpPr>
-          <p:cNvPr id="2" name="Title 1">
-            <a:extLst>
-              <a:ext uri="{FF2B5EF4-FFF2-40B4-BE49-F238E27FC236}">
-                <a16:creationId xmlns:a16="http://schemas.microsoft.com/office/drawing/2014/main" id="{BE07C800-8FF8-1209-480E-6D31FB4B1651}"/>
-              </a:ext>
-            </a:extLst>
-          </p:cNvPr>
+          <p:cNvPr id="2" name="Title 1"/>
           <p:cNvSpPr>
             <a:spLocks noGrp="1"/>
           </p:cNvSpPr>
@@ -991,15 +2910,17 @@
         </p:nvSpPr>
         <p:spPr>
           <a:xfrm>
-            <a:off x="831850" y="1709738"/>
-            <a:ext cx="10515600" cy="2852737"/>
+            <a:off x="684211" y="2006600"/>
+            <a:ext cx="8534401" cy="2281600"/>
           </a:xfrm>
         </p:spPr>
         <p:txBody>
-          <a:bodyPr anchor="b"/>
+          <a:bodyPr anchor="b">
+            <a:normAutofit/>
+          </a:bodyPr>
           <a:lstStyle>
-            <a:lvl1pPr>
-              <a:defRPr sz="6000"/>
+            <a:lvl1pPr algn="l">
+              <a:defRPr sz="3600" b="0" cap="all"/>
             </a:lvl1pPr>
           </a:lstStyle>
           <a:p>
@@ -1007,19 +2928,13 @@
               <a:rPr lang="en-US"/>
               <a:t>Click to edit Master title style</a:t>
             </a:r>
-            <a:endParaRPr lang="en-IN"/>
-          </a:p>
-        </p:txBody>
-      </p:sp>
-      <p:sp>
-        <p:nvSpPr>
-          <p:cNvPr id="3" name="Text Placeholder 2">
-            <a:extLst>
-              <a:ext uri="{FF2B5EF4-FFF2-40B4-BE49-F238E27FC236}">
-                <a16:creationId xmlns:a16="http://schemas.microsoft.com/office/drawing/2014/main" id="{4BA770BE-4704-DD13-E41C-FDF47C5AC46A}"/>
-              </a:ext>
-            </a:extLst>
-          </p:cNvPr>
+            <a:endParaRPr lang="en-US" dirty="0"/>
+          </a:p>
+        </p:txBody>
+      </p:sp>
+      <p:sp>
+        <p:nvSpPr>
+          <p:cNvPr id="3" name="Text Placeholder 2"/>
           <p:cNvSpPr>
             <a:spLocks noGrp="1"/>
           </p:cNvSpPr>
@@ -1029,26 +2944,28 @@
         </p:nvSpPr>
         <p:spPr>
           <a:xfrm>
-            <a:off x="831850" y="4589463"/>
-            <a:ext cx="10515600" cy="1500187"/>
+            <a:off x="684213" y="4495800"/>
+            <a:ext cx="8534400" cy="1498600"/>
           </a:xfrm>
         </p:spPr>
         <p:txBody>
-          <a:bodyPr/>
+          <a:bodyPr anchor="t">
+            <a:normAutofit/>
+          </a:bodyPr>
           <a:lstStyle>
-            <a:lvl1pPr marL="0" indent="0">
-              <a:buNone/>
-              <a:defRPr sz="2400">
-                <a:solidFill>
-                  <a:schemeClr val="tx1">
-                    <a:tint val="75000"/>
+            <a:lvl1pPr marL="0" indent="0" algn="l">
+              <a:buNone/>
+              <a:defRPr sz="1800">
+                <a:solidFill>
+                  <a:schemeClr val="bg2">
+                    <a:lumMod val="75000"/>
                   </a:schemeClr>
                 </a:solidFill>
               </a:defRPr>
             </a:lvl1pPr>
             <a:lvl2pPr marL="457200" indent="0">
               <a:buNone/>
-              <a:defRPr sz="2000">
+              <a:defRPr sz="1800">
                 <a:solidFill>
                   <a:schemeClr val="tx1">
                     <a:tint val="75000"/>
@@ -1058,7 +2975,7 @@
             </a:lvl2pPr>
             <a:lvl3pPr marL="914400" indent="0">
               <a:buNone/>
-              <a:defRPr sz="1800">
+              <a:defRPr sz="1600">
                 <a:solidFill>
                   <a:schemeClr val="tx1">
                     <a:tint val="75000"/>
@@ -1068,7 +2985,7 @@
             </a:lvl3pPr>
             <a:lvl4pPr marL="1371600" indent="0">
               <a:buNone/>
-              <a:defRPr sz="1600">
+              <a:defRPr sz="1400">
                 <a:solidFill>
                   <a:schemeClr val="tx1">
                     <a:tint val="75000"/>
@@ -1078,7 +2995,7 @@
             </a:lvl4pPr>
             <a:lvl5pPr marL="1828800" indent="0">
               <a:buNone/>
-              <a:defRPr sz="1600">
+              <a:defRPr sz="1400">
                 <a:solidFill>
                   <a:schemeClr val="tx1">
                     <a:tint val="75000"/>
@@ -1088,7 +3005,7 @@
             </a:lvl5pPr>
             <a:lvl6pPr marL="2286000" indent="0">
               <a:buNone/>
-              <a:defRPr sz="1600">
+              <a:defRPr sz="1400">
                 <a:solidFill>
                   <a:schemeClr val="tx1">
                     <a:tint val="75000"/>
@@ -1098,7 +3015,7 @@
             </a:lvl6pPr>
             <a:lvl7pPr marL="2743200" indent="0">
               <a:buNone/>
-              <a:defRPr sz="1600">
+              <a:defRPr sz="1400">
                 <a:solidFill>
                   <a:schemeClr val="tx1">
                     <a:tint val="75000"/>
@@ -1108,7 +3025,7 @@
             </a:lvl7pPr>
             <a:lvl8pPr marL="3200400" indent="0">
               <a:buNone/>
-              <a:defRPr sz="1600">
+              <a:defRPr sz="1400">
                 <a:solidFill>
                   <a:schemeClr val="tx1">
                     <a:tint val="75000"/>
@@ -1118,7 +3035,7 @@
             </a:lvl8pPr>
             <a:lvl9pPr marL="3657600" indent="0">
               <a:buNone/>
-              <a:defRPr sz="1600">
+              <a:defRPr sz="1400">
                 <a:solidFill>
                   <a:schemeClr val="tx1">
                     <a:tint val="75000"/>
@@ -1138,13 +3055,7 @@
       </p:sp>
       <p:sp>
         <p:nvSpPr>
-          <p:cNvPr id="4" name="Date Placeholder 3">
-            <a:extLst>
-              <a:ext uri="{FF2B5EF4-FFF2-40B4-BE49-F238E27FC236}">
-                <a16:creationId xmlns:a16="http://schemas.microsoft.com/office/drawing/2014/main" id="{1CAB303D-4232-4156-EED1-1723C75B0ABD}"/>
-              </a:ext>
-            </a:extLst>
-          </p:cNvPr>
+          <p:cNvPr id="4" name="Date Placeholder 3"/>
           <p:cNvSpPr>
             <a:spLocks noGrp="1"/>
           </p:cNvSpPr>
@@ -1159,7 +3070,7 @@
           <a:p>
             <a:fld id="{7B289A56-B7BF-4EE2-A684-7373F14AFF3B}" type="datetimeFigureOut">
               <a:rPr lang="en-IN" smtClean="0"/>
-              <a:t>07-04-2026</a:t>
+              <a:t>15-04-2026</a:t>
             </a:fld>
             <a:endParaRPr lang="en-IN"/>
           </a:p>
@@ -1167,13 +3078,7 @@
       </p:sp>
       <p:sp>
         <p:nvSpPr>
-          <p:cNvPr id="5" name="Footer Placeholder 4">
-            <a:extLst>
-              <a:ext uri="{FF2B5EF4-FFF2-40B4-BE49-F238E27FC236}">
-                <a16:creationId xmlns:a16="http://schemas.microsoft.com/office/drawing/2014/main" id="{674DEFFC-4535-7746-363E-449CCC413064}"/>
-              </a:ext>
-            </a:extLst>
-          </p:cNvPr>
+          <p:cNvPr id="5" name="Footer Placeholder 4"/>
           <p:cNvSpPr>
             <a:spLocks noGrp="1"/>
           </p:cNvSpPr>
@@ -1192,13 +3097,7 @@
       </p:sp>
       <p:sp>
         <p:nvSpPr>
-          <p:cNvPr id="6" name="Slide Number Placeholder 5">
-            <a:extLst>
-              <a:ext uri="{FF2B5EF4-FFF2-40B4-BE49-F238E27FC236}">
-                <a16:creationId xmlns:a16="http://schemas.microsoft.com/office/drawing/2014/main" id="{B23B1815-6E61-12F0-67C6-5391B7A7EA22}"/>
-              </a:ext>
-            </a:extLst>
-          </p:cNvPr>
+          <p:cNvPr id="6" name="Slide Number Placeholder 5"/>
           <p:cNvSpPr>
             <a:spLocks noGrp="1"/>
           </p:cNvSpPr>
@@ -1222,7 +3121,7 @@
     </p:spTree>
     <p:extLst>
       <p:ext uri="{BB962C8B-B14F-4D97-AF65-F5344CB8AC3E}">
-        <p14:creationId xmlns:p14="http://schemas.microsoft.com/office/powerpoint/2010/main" val="4102191393"/>
+        <p14:creationId xmlns:p14="http://schemas.microsoft.com/office/powerpoint/2010/main" val="1775099508"/>
       </p:ext>
     </p:extLst>
   </p:cSld>
@@ -1251,13 +3150,7 @@
       </p:grpSpPr>
       <p:sp>
         <p:nvSpPr>
-          <p:cNvPr id="2" name="Title 1">
-            <a:extLst>
-              <a:ext uri="{FF2B5EF4-FFF2-40B4-BE49-F238E27FC236}">
-                <a16:creationId xmlns:a16="http://schemas.microsoft.com/office/drawing/2014/main" id="{F71973CA-2221-B6BA-247A-67888D17E141}"/>
-              </a:ext>
-            </a:extLst>
-          </p:cNvPr>
+          <p:cNvPr id="2" name="Title 1"/>
           <p:cNvSpPr>
             <a:spLocks noGrp="1"/>
           </p:cNvSpPr>
@@ -1274,19 +3167,13 @@
               <a:rPr lang="en-US"/>
               <a:t>Click to edit Master title style</a:t>
             </a:r>
-            <a:endParaRPr lang="en-IN"/>
-          </a:p>
-        </p:txBody>
-      </p:sp>
-      <p:sp>
-        <p:nvSpPr>
-          <p:cNvPr id="3" name="Content Placeholder 2">
-            <a:extLst>
-              <a:ext uri="{FF2B5EF4-FFF2-40B4-BE49-F238E27FC236}">
-                <a16:creationId xmlns:a16="http://schemas.microsoft.com/office/drawing/2014/main" id="{D8A66AE0-2950-2E07-2ADF-40ECF430F5B4}"/>
-              </a:ext>
-            </a:extLst>
-          </p:cNvPr>
+            <a:endParaRPr lang="en-US" dirty="0"/>
+          </a:p>
+        </p:txBody>
+      </p:sp>
+      <p:sp>
+        <p:nvSpPr>
+          <p:cNvPr id="3" name="Content Placeholder 2"/>
           <p:cNvSpPr>
             <a:spLocks noGrp="1"/>
           </p:cNvSpPr>
@@ -1296,12 +3183,14 @@
         </p:nvSpPr>
         <p:spPr>
           <a:xfrm>
-            <a:off x="838200" y="1825625"/>
-            <a:ext cx="5181600" cy="4351338"/>
+            <a:off x="684211" y="685800"/>
+            <a:ext cx="4937655" cy="3615267"/>
           </a:xfrm>
         </p:spPr>
         <p:txBody>
-          <a:bodyPr/>
+          <a:bodyPr>
+            <a:normAutofit/>
+          </a:bodyPr>
           <a:lstStyle/>
           <a:p>
             <a:pPr lvl="0"/>
@@ -1337,19 +3226,13 @@
               <a:rPr lang="en-US"/>
               <a:t>Fifth level</a:t>
             </a:r>
-            <a:endParaRPr lang="en-IN"/>
-          </a:p>
-        </p:txBody>
-      </p:sp>
-      <p:sp>
-        <p:nvSpPr>
-          <p:cNvPr id="4" name="Content Placeholder 3">
-            <a:extLst>
-              <a:ext uri="{FF2B5EF4-FFF2-40B4-BE49-F238E27FC236}">
-                <a16:creationId xmlns:a16="http://schemas.microsoft.com/office/drawing/2014/main" id="{5B1802A0-C2B1-90B6-E2F4-4DA17A2E1DDC}"/>
-              </a:ext>
-            </a:extLst>
-          </p:cNvPr>
+            <a:endParaRPr lang="en-US" dirty="0"/>
+          </a:p>
+        </p:txBody>
+      </p:sp>
+      <p:sp>
+        <p:nvSpPr>
+          <p:cNvPr id="4" name="Content Placeholder 3"/>
           <p:cNvSpPr>
             <a:spLocks noGrp="1"/>
           </p:cNvSpPr>
@@ -1359,12 +3242,14 @@
         </p:nvSpPr>
         <p:spPr>
           <a:xfrm>
-            <a:off x="6172200" y="1825625"/>
-            <a:ext cx="5181600" cy="4351338"/>
+            <a:off x="5808133" y="685801"/>
+            <a:ext cx="4934479" cy="3615266"/>
           </a:xfrm>
         </p:spPr>
         <p:txBody>
-          <a:bodyPr/>
+          <a:bodyPr>
+            <a:normAutofit/>
+          </a:bodyPr>
           <a:lstStyle/>
           <a:p>
             <a:pPr lvl="0"/>
@@ -1400,19 +3285,13 @@
               <a:rPr lang="en-US"/>
               <a:t>Fifth level</a:t>
             </a:r>
-            <a:endParaRPr lang="en-IN"/>
-          </a:p>
-        </p:txBody>
-      </p:sp>
-      <p:sp>
-        <p:nvSpPr>
-          <p:cNvPr id="5" name="Date Placeholder 4">
-            <a:extLst>
-              <a:ext uri="{FF2B5EF4-FFF2-40B4-BE49-F238E27FC236}">
-                <a16:creationId xmlns:a16="http://schemas.microsoft.com/office/drawing/2014/main" id="{21FC01AE-CCB7-63D9-CBBB-F645B0F4EA84}"/>
-              </a:ext>
-            </a:extLst>
-          </p:cNvPr>
+            <a:endParaRPr lang="en-US" dirty="0"/>
+          </a:p>
+        </p:txBody>
+      </p:sp>
+      <p:sp>
+        <p:nvSpPr>
+          <p:cNvPr id="5" name="Date Placeholder 4"/>
           <p:cNvSpPr>
             <a:spLocks noGrp="1"/>
           </p:cNvSpPr>
@@ -1427,7 +3306,7 @@
           <a:p>
             <a:fld id="{7B289A56-B7BF-4EE2-A684-7373F14AFF3B}" type="datetimeFigureOut">
               <a:rPr lang="en-IN" smtClean="0"/>
-              <a:t>07-04-2026</a:t>
+              <a:t>15-04-2026</a:t>
             </a:fld>
             <a:endParaRPr lang="en-IN"/>
           </a:p>
@@ -1435,13 +3314,7 @@
       </p:sp>
       <p:sp>
         <p:nvSpPr>
-          <p:cNvPr id="6" name="Footer Placeholder 5">
-            <a:extLst>
-              <a:ext uri="{FF2B5EF4-FFF2-40B4-BE49-F238E27FC236}">
-                <a16:creationId xmlns:a16="http://schemas.microsoft.com/office/drawing/2014/main" id="{FFE62A61-4168-26CC-93B3-683820DDEF9B}"/>
-              </a:ext>
-            </a:extLst>
-          </p:cNvPr>
+          <p:cNvPr id="6" name="Footer Placeholder 5"/>
           <p:cNvSpPr>
             <a:spLocks noGrp="1"/>
           </p:cNvSpPr>
@@ -1460,13 +3333,7 @@
       </p:sp>
       <p:sp>
         <p:nvSpPr>
-          <p:cNvPr id="7" name="Slide Number Placeholder 6">
-            <a:extLst>
-              <a:ext uri="{FF2B5EF4-FFF2-40B4-BE49-F238E27FC236}">
-                <a16:creationId xmlns:a16="http://schemas.microsoft.com/office/drawing/2014/main" id="{4634E477-B40D-8D3E-6DC2-1AC9B036FDE7}"/>
-              </a:ext>
-            </a:extLst>
-          </p:cNvPr>
+          <p:cNvPr id="7" name="Slide Number Placeholder 6"/>
           <p:cNvSpPr>
             <a:spLocks noGrp="1"/>
           </p:cNvSpPr>
@@ -1490,7 +3357,7 @@
     </p:spTree>
     <p:extLst>
       <p:ext uri="{BB962C8B-B14F-4D97-AF65-F5344CB8AC3E}">
-        <p14:creationId xmlns:p14="http://schemas.microsoft.com/office/powerpoint/2010/main" val="3680288724"/>
+        <p14:creationId xmlns:p14="http://schemas.microsoft.com/office/powerpoint/2010/main" val="1695688243"/>
       </p:ext>
     </p:extLst>
   </p:cSld>
@@ -1519,13 +3386,7 @@
       </p:grpSpPr>
       <p:sp>
         <p:nvSpPr>
-          <p:cNvPr id="2" name="Title 1">
-            <a:extLst>
-              <a:ext uri="{FF2B5EF4-FFF2-40B4-BE49-F238E27FC236}">
-                <a16:creationId xmlns:a16="http://schemas.microsoft.com/office/drawing/2014/main" id="{44865982-7856-A120-897F-D70473069296}"/>
-              </a:ext>
-            </a:extLst>
-          </p:cNvPr>
+          <p:cNvPr id="2" name="Title 1"/>
           <p:cNvSpPr>
             <a:spLocks noGrp="1"/>
           </p:cNvSpPr>
@@ -1533,33 +3394,26 @@
             <p:ph type="title"/>
           </p:nvPr>
         </p:nvSpPr>
-        <p:spPr>
-          <a:xfrm>
-            <a:off x="839788" y="365125"/>
-            <a:ext cx="10515600" cy="1325563"/>
-          </a:xfrm>
-        </p:spPr>
+        <p:spPr/>
         <p:txBody>
           <a:bodyPr/>
-          <a:lstStyle/>
+          <a:lstStyle>
+            <a:lvl1pPr>
+              <a:defRPr/>
+            </a:lvl1pPr>
+          </a:lstStyle>
           <a:p>
             <a:r>
               <a:rPr lang="en-US"/>
               <a:t>Click to edit Master title style</a:t>
             </a:r>
-            <a:endParaRPr lang="en-IN"/>
-          </a:p>
-        </p:txBody>
-      </p:sp>
-      <p:sp>
-        <p:nvSpPr>
-          <p:cNvPr id="3" name="Text Placeholder 2">
-            <a:extLst>
-              <a:ext uri="{FF2B5EF4-FFF2-40B4-BE49-F238E27FC236}">
-                <a16:creationId xmlns:a16="http://schemas.microsoft.com/office/drawing/2014/main" id="{538D52EB-C6C9-14DB-C39F-05A13FAA7FA8}"/>
-              </a:ext>
-            </a:extLst>
-          </p:cNvPr>
+            <a:endParaRPr lang="en-US" dirty="0"/>
+          </a:p>
+        </p:txBody>
+      </p:sp>
+      <p:sp>
+        <p:nvSpPr>
+          <p:cNvPr id="3" name="Text Placeholder 2"/>
           <p:cNvSpPr>
             <a:spLocks noGrp="1"/>
           </p:cNvSpPr>
@@ -1569,16 +3423,22 @@
         </p:nvSpPr>
         <p:spPr>
           <a:xfrm>
-            <a:off x="839788" y="1681163"/>
-            <a:ext cx="5157787" cy="823912"/>
+            <a:off x="972080" y="685800"/>
+            <a:ext cx="4649787" cy="576262"/>
           </a:xfrm>
         </p:spPr>
         <p:txBody>
-          <a:bodyPr anchor="b"/>
+          <a:bodyPr anchor="b">
+            <a:noAutofit/>
+          </a:bodyPr>
           <a:lstStyle>
             <a:lvl1pPr marL="0" indent="0">
               <a:buNone/>
-              <a:defRPr sz="2400" b="1"/>
+              <a:defRPr sz="2800" b="0">
+                <a:solidFill>
+                  <a:schemeClr val="tx1"/>
+                </a:solidFill>
+              </a:defRPr>
             </a:lvl1pPr>
             <a:lvl2pPr marL="457200" indent="0">
               <a:buNone/>
@@ -1624,13 +3484,7 @@
       </p:sp>
       <p:sp>
         <p:nvSpPr>
-          <p:cNvPr id="4" name="Content Placeholder 3">
-            <a:extLst>
-              <a:ext uri="{FF2B5EF4-FFF2-40B4-BE49-F238E27FC236}">
-                <a16:creationId xmlns:a16="http://schemas.microsoft.com/office/drawing/2014/main" id="{2F9939C4-C3A8-5DC6-5A03-4E06E5BD6A5F}"/>
-              </a:ext>
-            </a:extLst>
-          </p:cNvPr>
+          <p:cNvPr id="4" name="Content Placeholder 3"/>
           <p:cNvSpPr>
             <a:spLocks noGrp="1"/>
           </p:cNvSpPr>
@@ -1640,12 +3494,14 @@
         </p:nvSpPr>
         <p:spPr>
           <a:xfrm>
-            <a:off x="839788" y="2505075"/>
-            <a:ext cx="5157787" cy="3684588"/>
+            <a:off x="684211" y="1270529"/>
+            <a:ext cx="4937655" cy="3030538"/>
           </a:xfrm>
         </p:spPr>
         <p:txBody>
-          <a:bodyPr/>
+          <a:bodyPr anchor="t">
+            <a:normAutofit/>
+          </a:bodyPr>
           <a:lstStyle/>
           <a:p>
             <a:pPr lvl="0"/>
@@ -1681,19 +3537,13 @@
               <a:rPr lang="en-US"/>
               <a:t>Fifth level</a:t>
             </a:r>
-            <a:endParaRPr lang="en-IN"/>
-          </a:p>
-        </p:txBody>
-      </p:sp>
-      <p:sp>
-        <p:nvSpPr>
-          <p:cNvPr id="5" name="Text Placeholder 4">
-            <a:extLst>
-              <a:ext uri="{FF2B5EF4-FFF2-40B4-BE49-F238E27FC236}">
-                <a16:creationId xmlns:a16="http://schemas.microsoft.com/office/drawing/2014/main" id="{94451D85-6826-075A-E2DD-716FBE57BE32}"/>
-              </a:ext>
-            </a:extLst>
-          </p:cNvPr>
+            <a:endParaRPr lang="en-US" dirty="0"/>
+          </a:p>
+        </p:txBody>
+      </p:sp>
+      <p:sp>
+        <p:nvSpPr>
+          <p:cNvPr id="5" name="Text Placeholder 4"/>
           <p:cNvSpPr>
             <a:spLocks noGrp="1"/>
           </p:cNvSpPr>
@@ -1703,16 +3553,22 @@
         </p:nvSpPr>
         <p:spPr>
           <a:xfrm>
-            <a:off x="6172200" y="1681163"/>
-            <a:ext cx="5183188" cy="823912"/>
+            <a:off x="6079066" y="685800"/>
+            <a:ext cx="4665134" cy="576262"/>
           </a:xfrm>
         </p:spPr>
         <p:txBody>
-          <a:bodyPr anchor="b"/>
+          <a:bodyPr anchor="b">
+            <a:noAutofit/>
+          </a:bodyPr>
           <a:lstStyle>
             <a:lvl1pPr marL="0" indent="0">
               <a:buNone/>
-              <a:defRPr sz="2400" b="1"/>
+              <a:defRPr sz="2800" b="0">
+                <a:solidFill>
+                  <a:schemeClr val="tx1"/>
+                </a:solidFill>
+              </a:defRPr>
             </a:lvl1pPr>
             <a:lvl2pPr marL="457200" indent="0">
               <a:buNone/>
@@ -1758,13 +3614,7 @@
       </p:sp>
       <p:sp>
         <p:nvSpPr>
-          <p:cNvPr id="6" name="Content Placeholder 5">
-            <a:extLst>
-              <a:ext uri="{FF2B5EF4-FFF2-40B4-BE49-F238E27FC236}">
-                <a16:creationId xmlns:a16="http://schemas.microsoft.com/office/drawing/2014/main" id="{DCA66085-DC5D-ED87-50D6-6609036B971C}"/>
-              </a:ext>
-            </a:extLst>
-          </p:cNvPr>
+          <p:cNvPr id="6" name="Content Placeholder 5"/>
           <p:cNvSpPr>
             <a:spLocks noGrp="1"/>
           </p:cNvSpPr>
@@ -1774,12 +3624,14 @@
         </p:nvSpPr>
         <p:spPr>
           <a:xfrm>
-            <a:off x="6172200" y="2505075"/>
-            <a:ext cx="5183188" cy="3684588"/>
+            <a:off x="5806545" y="1262062"/>
+            <a:ext cx="4929188" cy="3030538"/>
           </a:xfrm>
         </p:spPr>
         <p:txBody>
-          <a:bodyPr/>
+          <a:bodyPr anchor="t">
+            <a:normAutofit/>
+          </a:bodyPr>
           <a:lstStyle/>
           <a:p>
             <a:pPr lvl="0"/>
@@ -1815,19 +3667,13 @@
               <a:rPr lang="en-US"/>
               <a:t>Fifth level</a:t>
             </a:r>
-            <a:endParaRPr lang="en-IN"/>
-          </a:p>
-        </p:txBody>
-      </p:sp>
-      <p:sp>
-        <p:nvSpPr>
-          <p:cNvPr id="7" name="Date Placeholder 6">
-            <a:extLst>
-              <a:ext uri="{FF2B5EF4-FFF2-40B4-BE49-F238E27FC236}">
-                <a16:creationId xmlns:a16="http://schemas.microsoft.com/office/drawing/2014/main" id="{DB8002D5-A8B9-4663-693D-13244095A09D}"/>
-              </a:ext>
-            </a:extLst>
-          </p:cNvPr>
+            <a:endParaRPr lang="en-US" dirty="0"/>
+          </a:p>
+        </p:txBody>
+      </p:sp>
+      <p:sp>
+        <p:nvSpPr>
+          <p:cNvPr id="7" name="Date Placeholder 6"/>
           <p:cNvSpPr>
             <a:spLocks noGrp="1"/>
           </p:cNvSpPr>
@@ -1842,7 +3688,7 @@
           <a:p>
             <a:fld id="{7B289A56-B7BF-4EE2-A684-7373F14AFF3B}" type="datetimeFigureOut">
               <a:rPr lang="en-IN" smtClean="0"/>
-              <a:t>07-04-2026</a:t>
+              <a:t>15-04-2026</a:t>
             </a:fld>
             <a:endParaRPr lang="en-IN"/>
           </a:p>
@@ -1850,13 +3696,7 @@
       </p:sp>
       <p:sp>
         <p:nvSpPr>
-          <p:cNvPr id="8" name="Footer Placeholder 7">
-            <a:extLst>
-              <a:ext uri="{FF2B5EF4-FFF2-40B4-BE49-F238E27FC236}">
-                <a16:creationId xmlns:a16="http://schemas.microsoft.com/office/drawing/2014/main" id="{9A5C1A38-7DB7-27B3-EE2B-0FA8A1EA1472}"/>
-              </a:ext>
-            </a:extLst>
-          </p:cNvPr>
+          <p:cNvPr id="8" name="Footer Placeholder 7"/>
           <p:cNvSpPr>
             <a:spLocks noGrp="1"/>
           </p:cNvSpPr>
@@ -1875,13 +3715,7 @@
       </p:sp>
       <p:sp>
         <p:nvSpPr>
-          <p:cNvPr id="9" name="Slide Number Placeholder 8">
-            <a:extLst>
-              <a:ext uri="{FF2B5EF4-FFF2-40B4-BE49-F238E27FC236}">
-                <a16:creationId xmlns:a16="http://schemas.microsoft.com/office/drawing/2014/main" id="{69C0E241-9EDE-42DD-B32D-8D7A25957E41}"/>
-              </a:ext>
-            </a:extLst>
-          </p:cNvPr>
+          <p:cNvPr id="9" name="Slide Number Placeholder 8"/>
           <p:cNvSpPr>
             <a:spLocks noGrp="1"/>
           </p:cNvSpPr>
@@ -1905,7 +3739,7 @@
     </p:spTree>
     <p:extLst>
       <p:ext uri="{BB962C8B-B14F-4D97-AF65-F5344CB8AC3E}">
-        <p14:creationId xmlns:p14="http://schemas.microsoft.com/office/powerpoint/2010/main" val="333382883"/>
+        <p14:creationId xmlns:p14="http://schemas.microsoft.com/office/powerpoint/2010/main" val="3841420970"/>
       </p:ext>
     </p:extLst>
   </p:cSld>
@@ -1934,13 +3768,7 @@
       </p:grpSpPr>
       <p:sp>
         <p:nvSpPr>
-          <p:cNvPr id="2" name="Title 1">
-            <a:extLst>
-              <a:ext uri="{FF2B5EF4-FFF2-40B4-BE49-F238E27FC236}">
-                <a16:creationId xmlns:a16="http://schemas.microsoft.com/office/drawing/2014/main" id="{B2A3C722-C2C3-AD81-3B33-252378421D3E}"/>
-              </a:ext>
-            </a:extLst>
-          </p:cNvPr>
+          <p:cNvPr id="2" name="Title 1"/>
           <p:cNvSpPr>
             <a:spLocks noGrp="1"/>
           </p:cNvSpPr>
@@ -1957,19 +3785,13 @@
               <a:rPr lang="en-US"/>
               <a:t>Click to edit Master title style</a:t>
             </a:r>
-            <a:endParaRPr lang="en-IN"/>
-          </a:p>
-        </p:txBody>
-      </p:sp>
-      <p:sp>
-        <p:nvSpPr>
-          <p:cNvPr id="3" name="Date Placeholder 2">
-            <a:extLst>
-              <a:ext uri="{FF2B5EF4-FFF2-40B4-BE49-F238E27FC236}">
-                <a16:creationId xmlns:a16="http://schemas.microsoft.com/office/drawing/2014/main" id="{CF7C2B20-69F1-93CB-4468-49A7AC79F6BE}"/>
-              </a:ext>
-            </a:extLst>
-          </p:cNvPr>
+            <a:endParaRPr lang="en-US" dirty="0"/>
+          </a:p>
+        </p:txBody>
+      </p:sp>
+      <p:sp>
+        <p:nvSpPr>
+          <p:cNvPr id="3" name="Date Placeholder 2"/>
           <p:cNvSpPr>
             <a:spLocks noGrp="1"/>
           </p:cNvSpPr>
@@ -1984,7 +3806,7 @@
           <a:p>
             <a:fld id="{7B289A56-B7BF-4EE2-A684-7373F14AFF3B}" type="datetimeFigureOut">
               <a:rPr lang="en-IN" smtClean="0"/>
-              <a:t>07-04-2026</a:t>
+              <a:t>15-04-2026</a:t>
             </a:fld>
             <a:endParaRPr lang="en-IN"/>
           </a:p>
@@ -1992,13 +3814,7 @@
       </p:sp>
       <p:sp>
         <p:nvSpPr>
-          <p:cNvPr id="4" name="Footer Placeholder 3">
-            <a:extLst>
-              <a:ext uri="{FF2B5EF4-FFF2-40B4-BE49-F238E27FC236}">
-                <a16:creationId xmlns:a16="http://schemas.microsoft.com/office/drawing/2014/main" id="{E4F5AEDF-21FC-20A9-A97C-010FF7361913}"/>
-              </a:ext>
-            </a:extLst>
-          </p:cNvPr>
+          <p:cNvPr id="4" name="Footer Placeholder 3"/>
           <p:cNvSpPr>
             <a:spLocks noGrp="1"/>
           </p:cNvSpPr>
@@ -2017,13 +3833,7 @@
       </p:sp>
       <p:sp>
         <p:nvSpPr>
-          <p:cNvPr id="5" name="Slide Number Placeholder 4">
-            <a:extLst>
-              <a:ext uri="{FF2B5EF4-FFF2-40B4-BE49-F238E27FC236}">
-                <a16:creationId xmlns:a16="http://schemas.microsoft.com/office/drawing/2014/main" id="{54A905B7-E5B8-FCA6-C612-AD126D9F070F}"/>
-              </a:ext>
-            </a:extLst>
-          </p:cNvPr>
+          <p:cNvPr id="5" name="Slide Number Placeholder 4"/>
           <p:cNvSpPr>
             <a:spLocks noGrp="1"/>
           </p:cNvSpPr>
@@ -2047,7 +3857,7 @@
     </p:spTree>
     <p:extLst>
       <p:ext uri="{BB962C8B-B14F-4D97-AF65-F5344CB8AC3E}">
-        <p14:creationId xmlns:p14="http://schemas.microsoft.com/office/powerpoint/2010/main" val="1730290357"/>
+        <p14:creationId xmlns:p14="http://schemas.microsoft.com/office/powerpoint/2010/main" val="1128935069"/>
       </p:ext>
     </p:extLst>
   </p:cSld>
@@ -2076,13 +3886,7 @@
       </p:grpSpPr>
       <p:sp>
         <p:nvSpPr>
-          <p:cNvPr id="2" name="Date Placeholder 1">
-            <a:extLst>
-              <a:ext uri="{FF2B5EF4-FFF2-40B4-BE49-F238E27FC236}">
-                <a16:creationId xmlns:a16="http://schemas.microsoft.com/office/drawing/2014/main" id="{B75F24FB-A0D9-0867-6BDA-FAA10E8AFA24}"/>
-              </a:ext>
-            </a:extLst>
-          </p:cNvPr>
+          <p:cNvPr id="2" name="Date Placeholder 1"/>
           <p:cNvSpPr>
             <a:spLocks noGrp="1"/>
           </p:cNvSpPr>
@@ -2097,7 +3901,7 @@
           <a:p>
             <a:fld id="{7B289A56-B7BF-4EE2-A684-7373F14AFF3B}" type="datetimeFigureOut">
               <a:rPr lang="en-IN" smtClean="0"/>
-              <a:t>07-04-2026</a:t>
+              <a:t>15-04-2026</a:t>
             </a:fld>
             <a:endParaRPr lang="en-IN"/>
           </a:p>
@@ -2105,13 +3909,7 @@
       </p:sp>
       <p:sp>
         <p:nvSpPr>
-          <p:cNvPr id="3" name="Footer Placeholder 2">
-            <a:extLst>
-              <a:ext uri="{FF2B5EF4-FFF2-40B4-BE49-F238E27FC236}">
-                <a16:creationId xmlns:a16="http://schemas.microsoft.com/office/drawing/2014/main" id="{0528FC46-75DF-0D30-C8E5-88F2C536162A}"/>
-              </a:ext>
-            </a:extLst>
-          </p:cNvPr>
+          <p:cNvPr id="3" name="Footer Placeholder 2"/>
           <p:cNvSpPr>
             <a:spLocks noGrp="1"/>
           </p:cNvSpPr>
@@ -2130,13 +3928,7 @@
       </p:sp>
       <p:sp>
         <p:nvSpPr>
-          <p:cNvPr id="4" name="Slide Number Placeholder 3">
-            <a:extLst>
-              <a:ext uri="{FF2B5EF4-FFF2-40B4-BE49-F238E27FC236}">
-                <a16:creationId xmlns:a16="http://schemas.microsoft.com/office/drawing/2014/main" id="{5FCC571C-B718-3EBF-2B95-85CEF876BE72}"/>
-              </a:ext>
-            </a:extLst>
-          </p:cNvPr>
+          <p:cNvPr id="4" name="Slide Number Placeholder 3"/>
           <p:cNvSpPr>
             <a:spLocks noGrp="1"/>
           </p:cNvSpPr>
@@ -2160,7 +3952,7 @@
     </p:spTree>
     <p:extLst>
       <p:ext uri="{BB962C8B-B14F-4D97-AF65-F5344CB8AC3E}">
-        <p14:creationId xmlns:p14="http://schemas.microsoft.com/office/powerpoint/2010/main" val="2842041900"/>
+        <p14:creationId xmlns:p14="http://schemas.microsoft.com/office/powerpoint/2010/main" val="1357368699"/>
       </p:ext>
     </p:extLst>
   </p:cSld>
@@ -2189,13 +3981,7 @@
       </p:grpSpPr>
       <p:sp>
         <p:nvSpPr>
-          <p:cNvPr id="2" name="Title 1">
-            <a:extLst>
-              <a:ext uri="{FF2B5EF4-FFF2-40B4-BE49-F238E27FC236}">
-                <a16:creationId xmlns:a16="http://schemas.microsoft.com/office/drawing/2014/main" id="{FF9056D2-DEB1-30AE-51E1-EE91F66CAD3F}"/>
-              </a:ext>
-            </a:extLst>
-          </p:cNvPr>
+          <p:cNvPr id="2" name="Title 1"/>
           <p:cNvSpPr>
             <a:spLocks noGrp="1"/>
           </p:cNvSpPr>
@@ -2205,15 +3991,17 @@
         </p:nvSpPr>
         <p:spPr>
           <a:xfrm>
-            <a:off x="839788" y="457200"/>
-            <a:ext cx="3932237" cy="1600200"/>
+            <a:off x="7085012" y="685800"/>
+            <a:ext cx="3657600" cy="1371600"/>
           </a:xfrm>
         </p:spPr>
         <p:txBody>
-          <a:bodyPr anchor="b"/>
+          <a:bodyPr anchor="b">
+            <a:normAutofit/>
+          </a:bodyPr>
           <a:lstStyle>
-            <a:lvl1pPr>
-              <a:defRPr sz="3200"/>
+            <a:lvl1pPr algn="l">
+              <a:defRPr sz="2400" b="0"/>
             </a:lvl1pPr>
           </a:lstStyle>
           <a:p>
@@ -2221,19 +4009,13 @@
               <a:rPr lang="en-US"/>
               <a:t>Click to edit Master title style</a:t>
             </a:r>
-            <a:endParaRPr lang="en-IN"/>
-          </a:p>
-        </p:txBody>
-      </p:sp>
-      <p:sp>
-        <p:nvSpPr>
-          <p:cNvPr id="3" name="Content Placeholder 2">
-            <a:extLst>
-              <a:ext uri="{FF2B5EF4-FFF2-40B4-BE49-F238E27FC236}">
-                <a16:creationId xmlns:a16="http://schemas.microsoft.com/office/drawing/2014/main" id="{425EAE68-FA8B-41E2-E3FB-36A46A154662}"/>
-              </a:ext>
-            </a:extLst>
-          </p:cNvPr>
+            <a:endParaRPr lang="en-US" dirty="0"/>
+          </a:p>
+        </p:txBody>
+      </p:sp>
+      <p:sp>
+        <p:nvSpPr>
+          <p:cNvPr id="3" name="Content Placeholder 2"/>
           <p:cNvSpPr>
             <a:spLocks noGrp="1"/>
           </p:cNvSpPr>
@@ -2243,41 +4025,15 @@
         </p:nvSpPr>
         <p:spPr>
           <a:xfrm>
-            <a:off x="5183188" y="987425"/>
-            <a:ext cx="6172200" cy="4873625"/>
+            <a:off x="684212" y="685800"/>
+            <a:ext cx="5943601" cy="5308600"/>
           </a:xfrm>
         </p:spPr>
         <p:txBody>
-          <a:bodyPr/>
-          <a:lstStyle>
-            <a:lvl1pPr>
-              <a:defRPr sz="3200"/>
-            </a:lvl1pPr>
-            <a:lvl2pPr>
-              <a:defRPr sz="2800"/>
-            </a:lvl2pPr>
-            <a:lvl3pPr>
-              <a:defRPr sz="2400"/>
-            </a:lvl3pPr>
-            <a:lvl4pPr>
-              <a:defRPr sz="2000"/>
-            </a:lvl4pPr>
-            <a:lvl5pPr>
-              <a:defRPr sz="2000"/>
-            </a:lvl5pPr>
-            <a:lvl6pPr>
-              <a:defRPr sz="2000"/>
-            </a:lvl6pPr>
-            <a:lvl7pPr>
-              <a:defRPr sz="2000"/>
-            </a:lvl7pPr>
-            <a:lvl8pPr>
-              <a:defRPr sz="2000"/>
-            </a:lvl8pPr>
-            <a:lvl9pPr>
-              <a:defRPr sz="2000"/>
-            </a:lvl9pPr>
-          </a:lstStyle>
+          <a:bodyPr anchor="ctr">
+            <a:normAutofit/>
+          </a:bodyPr>
+          <a:lstStyle/>
           <a:p>
             <a:pPr lvl="0"/>
             <a:r>
@@ -2312,19 +4068,13 @@
               <a:rPr lang="en-US"/>
               <a:t>Fifth level</a:t>
             </a:r>
-            <a:endParaRPr lang="en-IN"/>
-          </a:p>
-        </p:txBody>
-      </p:sp>
-      <p:sp>
-        <p:nvSpPr>
-          <p:cNvPr id="4" name="Text Placeholder 3">
-            <a:extLst>
-              <a:ext uri="{FF2B5EF4-FFF2-40B4-BE49-F238E27FC236}">
-                <a16:creationId xmlns:a16="http://schemas.microsoft.com/office/drawing/2014/main" id="{573C4BCD-7C3D-22E6-24BE-7467A7592257}"/>
-              </a:ext>
-            </a:extLst>
-          </p:cNvPr>
+            <a:endParaRPr lang="en-US" dirty="0"/>
+          </a:p>
+        </p:txBody>
+      </p:sp>
+      <p:sp>
+        <p:nvSpPr>
+          <p:cNvPr id="4" name="Text Placeholder 3"/>
           <p:cNvSpPr>
             <a:spLocks noGrp="1"/>
           </p:cNvSpPr>
@@ -2334,12 +4084,14 @@
         </p:nvSpPr>
         <p:spPr>
           <a:xfrm>
-            <a:off x="839788" y="2057400"/>
-            <a:ext cx="3932237" cy="3811588"/>
+            <a:off x="7085012" y="2209799"/>
+            <a:ext cx="3657600" cy="2091267"/>
           </a:xfrm>
         </p:spPr>
         <p:txBody>
-          <a:bodyPr/>
+          <a:bodyPr anchor="t">
+            <a:normAutofit/>
+          </a:bodyPr>
           <a:lstStyle>
             <a:lvl1pPr marL="0" indent="0">
               <a:buNone/>
@@ -2347,35 +4099,35 @@
             </a:lvl1pPr>
             <a:lvl2pPr marL="457200" indent="0">
               <a:buNone/>
-              <a:defRPr sz="1400"/>
+              <a:defRPr sz="1200"/>
             </a:lvl2pPr>
             <a:lvl3pPr marL="914400" indent="0">
               <a:buNone/>
-              <a:defRPr sz="1200"/>
+              <a:defRPr sz="1000"/>
             </a:lvl3pPr>
             <a:lvl4pPr marL="1371600" indent="0">
               <a:buNone/>
-              <a:defRPr sz="1000"/>
+              <a:defRPr sz="900"/>
             </a:lvl4pPr>
             <a:lvl5pPr marL="1828800" indent="0">
               <a:buNone/>
-              <a:defRPr sz="1000"/>
+              <a:defRPr sz="900"/>
             </a:lvl5pPr>
             <a:lvl6pPr marL="2286000" indent="0">
               <a:buNone/>
-              <a:defRPr sz="1000"/>
+              <a:defRPr sz="900"/>
             </a:lvl6pPr>
             <a:lvl7pPr marL="2743200" indent="0">
               <a:buNone/>
-              <a:defRPr sz="1000"/>
+              <a:defRPr sz="900"/>
             </a:lvl7pPr>
             <a:lvl8pPr marL="3200400" indent="0">
               <a:buNone/>
-              <a:defRPr sz="1000"/>
+              <a:defRPr sz="900"/>
             </a:lvl8pPr>
             <a:lvl9pPr marL="3657600" indent="0">
               <a:buNone/>
-              <a:defRPr sz="1000"/>
+              <a:defRPr sz="900"/>
             </a:lvl9pPr>
           </a:lstStyle>
           <a:p>
@@ -2389,13 +4141,7 @@
       </p:sp>
       <p:sp>
         <p:nvSpPr>
-          <p:cNvPr id="5" name="Date Placeholder 4">
-            <a:extLst>
-              <a:ext uri="{FF2B5EF4-FFF2-40B4-BE49-F238E27FC236}">
-                <a16:creationId xmlns:a16="http://schemas.microsoft.com/office/drawing/2014/main" id="{0643662B-AE05-9268-0E56-CD679C6B26ED}"/>
-              </a:ext>
-            </a:extLst>
-          </p:cNvPr>
+          <p:cNvPr id="5" name="Date Placeholder 4"/>
           <p:cNvSpPr>
             <a:spLocks noGrp="1"/>
           </p:cNvSpPr>
@@ -2410,7 +4156,7 @@
           <a:p>
             <a:fld id="{7B289A56-B7BF-4EE2-A684-7373F14AFF3B}" type="datetimeFigureOut">
               <a:rPr lang="en-IN" smtClean="0"/>
-              <a:t>07-04-2026</a:t>
+              <a:t>15-04-2026</a:t>
             </a:fld>
             <a:endParaRPr lang="en-IN"/>
           </a:p>
@@ -2418,13 +4164,7 @@
       </p:sp>
       <p:sp>
         <p:nvSpPr>
-          <p:cNvPr id="6" name="Footer Placeholder 5">
-            <a:extLst>
-              <a:ext uri="{FF2B5EF4-FFF2-40B4-BE49-F238E27FC236}">
-                <a16:creationId xmlns:a16="http://schemas.microsoft.com/office/drawing/2014/main" id="{A6C6A849-17CD-A798-9990-6220B27F19B8}"/>
-              </a:ext>
-            </a:extLst>
-          </p:cNvPr>
+          <p:cNvPr id="6" name="Footer Placeholder 5"/>
           <p:cNvSpPr>
             <a:spLocks noGrp="1"/>
           </p:cNvSpPr>
@@ -2443,13 +4183,7 @@
       </p:sp>
       <p:sp>
         <p:nvSpPr>
-          <p:cNvPr id="7" name="Slide Number Placeholder 6">
-            <a:extLst>
-              <a:ext uri="{FF2B5EF4-FFF2-40B4-BE49-F238E27FC236}">
-                <a16:creationId xmlns:a16="http://schemas.microsoft.com/office/drawing/2014/main" id="{F18D7318-CA5C-54BF-3E83-9C37673518A4}"/>
-              </a:ext>
-            </a:extLst>
-          </p:cNvPr>
+          <p:cNvPr id="7" name="Slide Number Placeholder 6"/>
           <p:cNvSpPr>
             <a:spLocks noGrp="1"/>
           </p:cNvSpPr>
@@ -2473,7 +4207,7 @@
     </p:spTree>
     <p:extLst>
       <p:ext uri="{BB962C8B-B14F-4D97-AF65-F5344CB8AC3E}">
-        <p14:creationId xmlns:p14="http://schemas.microsoft.com/office/powerpoint/2010/main" val="2958738779"/>
+        <p14:creationId xmlns:p14="http://schemas.microsoft.com/office/powerpoint/2010/main" val="408901738"/>
       </p:ext>
     </p:extLst>
   </p:cSld>
@@ -2502,13 +4236,7 @@
       </p:grpSpPr>
       <p:sp>
         <p:nvSpPr>
-          <p:cNvPr id="2" name="Title 1">
-            <a:extLst>
-              <a:ext uri="{FF2B5EF4-FFF2-40B4-BE49-F238E27FC236}">
-                <a16:creationId xmlns:a16="http://schemas.microsoft.com/office/drawing/2014/main" id="{F3EA8056-573E-5E0D-778E-4DE41CB98783}"/>
-              </a:ext>
-            </a:extLst>
-          </p:cNvPr>
+          <p:cNvPr id="2" name="Title 1"/>
           <p:cNvSpPr>
             <a:spLocks noGrp="1"/>
           </p:cNvSpPr>
@@ -2518,15 +4246,17 @@
         </p:nvSpPr>
         <p:spPr>
           <a:xfrm>
-            <a:off x="839788" y="457200"/>
-            <a:ext cx="3932237" cy="1600200"/>
+            <a:off x="4722812" y="1447800"/>
+            <a:ext cx="6019800" cy="1143000"/>
           </a:xfrm>
         </p:spPr>
         <p:txBody>
-          <a:bodyPr anchor="b"/>
+          <a:bodyPr anchor="b">
+            <a:normAutofit/>
+          </a:bodyPr>
           <a:lstStyle>
-            <a:lvl1pPr>
-              <a:defRPr sz="3200"/>
+            <a:lvl1pPr algn="l">
+              <a:defRPr sz="2800" b="0"/>
             </a:lvl1pPr>
           </a:lstStyle>
           <a:p>
@@ -2534,21 +4264,15 @@
               <a:rPr lang="en-US"/>
               <a:t>Click to edit Master title style</a:t>
             </a:r>
-            <a:endParaRPr lang="en-IN"/>
-          </a:p>
-        </p:txBody>
-      </p:sp>
-      <p:sp>
-        <p:nvSpPr>
-          <p:cNvPr id="3" name="Picture Placeholder 2">
-            <a:extLst>
-              <a:ext uri="{FF2B5EF4-FFF2-40B4-BE49-F238E27FC236}">
-                <a16:creationId xmlns:a16="http://schemas.microsoft.com/office/drawing/2014/main" id="{49A09817-F19E-6A4F-5FF8-2F3D3AAF117F}"/>
-              </a:ext>
-            </a:extLst>
-          </p:cNvPr>
+            <a:endParaRPr lang="en-US" dirty="0"/>
+          </a:p>
+        </p:txBody>
+      </p:sp>
+      <p:sp>
+        <p:nvSpPr>
+          <p:cNvPr id="14" name="Picture Placeholder 2"/>
           <p:cNvSpPr>
-            <a:spLocks noGrp="1"/>
+            <a:spLocks noGrp="1" noChangeAspect="1"/>
           </p:cNvSpPr>
           <p:nvPr>
             <p:ph type="pic" idx="1"/>
@@ -2556,64 +4280,84 @@
         </p:nvSpPr>
         <p:spPr>
           <a:xfrm>
-            <a:off x="5183188" y="987425"/>
-            <a:ext cx="6172200" cy="4873625"/>
+            <a:off x="989012" y="914400"/>
+            <a:ext cx="3280974" cy="4572000"/>
           </a:xfrm>
+          <a:prstGeom prst="snip2DiagRect">
+            <a:avLst>
+              <a:gd name="adj1" fmla="val 10815"/>
+              <a:gd name="adj2" fmla="val 0"/>
+            </a:avLst>
+          </a:prstGeom>
+          <a:ln w="15875">
+            <a:solidFill>
+              <a:schemeClr val="tx1">
+                <a:alpha val="40000"/>
+              </a:schemeClr>
+            </a:solidFill>
+          </a:ln>
+          <a:effectLst>
+            <a:innerShdw blurRad="57150" dist="38100" dir="14460000">
+              <a:srgbClr val="000000">
+                <a:alpha val="70000"/>
+              </a:srgbClr>
+            </a:innerShdw>
+          </a:effectLst>
         </p:spPr>
         <p:txBody>
-          <a:bodyPr/>
+          <a:bodyPr anchor="t">
+            <a:normAutofit/>
+          </a:bodyPr>
           <a:lstStyle>
-            <a:lvl1pPr marL="0" indent="0">
-              <a:buNone/>
-              <a:defRPr sz="3200"/>
+            <a:lvl1pPr marL="0" indent="0" algn="ctr">
+              <a:buNone/>
+              <a:defRPr sz="1600"/>
             </a:lvl1pPr>
             <a:lvl2pPr marL="457200" indent="0">
               <a:buNone/>
-              <a:defRPr sz="2800"/>
+              <a:defRPr sz="1600"/>
             </a:lvl2pPr>
             <a:lvl3pPr marL="914400" indent="0">
               <a:buNone/>
-              <a:defRPr sz="2400"/>
+              <a:defRPr sz="1600"/>
             </a:lvl3pPr>
             <a:lvl4pPr marL="1371600" indent="0">
               <a:buNone/>
-              <a:defRPr sz="2000"/>
+              <a:defRPr sz="1600"/>
             </a:lvl4pPr>
             <a:lvl5pPr marL="1828800" indent="0">
               <a:buNone/>
-              <a:defRPr sz="2000"/>
+              <a:defRPr sz="1600"/>
             </a:lvl5pPr>
             <a:lvl6pPr marL="2286000" indent="0">
               <a:buNone/>
-              <a:defRPr sz="2000"/>
+              <a:defRPr sz="1600"/>
             </a:lvl6pPr>
             <a:lvl7pPr marL="2743200" indent="0">
               <a:buNone/>
-              <a:defRPr sz="2000"/>
+              <a:defRPr sz="1600"/>
             </a:lvl7pPr>
             <a:lvl8pPr marL="3200400" indent="0">
               <a:buNone/>
-              <a:defRPr sz="2000"/>
+              <a:defRPr sz="1600"/>
             </a:lvl8pPr>
             <a:lvl9pPr marL="3657600" indent="0">
               <a:buNone/>
-              <a:defRPr sz="2000"/>
+              <a:defRPr sz="1600"/>
             </a:lvl9pPr>
           </a:lstStyle>
           <a:p>
-            <a:endParaRPr lang="en-IN"/>
-          </a:p>
-        </p:txBody>
-      </p:sp>
-      <p:sp>
-        <p:nvSpPr>
-          <p:cNvPr id="4" name="Text Placeholder 3">
-            <a:extLst>
-              <a:ext uri="{FF2B5EF4-FFF2-40B4-BE49-F238E27FC236}">
-                <a16:creationId xmlns:a16="http://schemas.microsoft.com/office/drawing/2014/main" id="{65E0419C-229C-2594-B804-6EA900883037}"/>
-              </a:ext>
-            </a:extLst>
-          </p:cNvPr>
+            <a:r>
+              <a:rPr lang="en-US"/>
+              <a:t>Click icon to add picture</a:t>
+            </a:r>
+            <a:endParaRPr lang="en-US" dirty="0"/>
+          </a:p>
+        </p:txBody>
+      </p:sp>
+      <p:sp>
+        <p:nvSpPr>
+          <p:cNvPr id="4" name="Text Placeholder 3"/>
           <p:cNvSpPr>
             <a:spLocks noGrp="1"/>
           </p:cNvSpPr>
@@ -2623,48 +4367,50 @@
         </p:nvSpPr>
         <p:spPr>
           <a:xfrm>
-            <a:off x="839788" y="2057400"/>
-            <a:ext cx="3932237" cy="3811588"/>
+            <a:off x="4722812" y="2777066"/>
+            <a:ext cx="6021388" cy="2048933"/>
           </a:xfrm>
         </p:spPr>
         <p:txBody>
-          <a:bodyPr/>
+          <a:bodyPr anchor="t">
+            <a:normAutofit/>
+          </a:bodyPr>
           <a:lstStyle>
             <a:lvl1pPr marL="0" indent="0">
               <a:buNone/>
-              <a:defRPr sz="1600"/>
+              <a:defRPr sz="1800"/>
             </a:lvl1pPr>
             <a:lvl2pPr marL="457200" indent="0">
               <a:buNone/>
-              <a:defRPr sz="1400"/>
+              <a:defRPr sz="1200"/>
             </a:lvl2pPr>
             <a:lvl3pPr marL="914400" indent="0">
               <a:buNone/>
-              <a:defRPr sz="1200"/>
+              <a:defRPr sz="1000"/>
             </a:lvl3pPr>
             <a:lvl4pPr marL="1371600" indent="0">
               <a:buNone/>
-              <a:defRPr sz="1000"/>
+              <a:defRPr sz="900"/>
             </a:lvl4pPr>
             <a:lvl5pPr marL="1828800" indent="0">
               <a:buNone/>
-              <a:defRPr sz="1000"/>
+              <a:defRPr sz="900"/>
             </a:lvl5pPr>
             <a:lvl6pPr marL="2286000" indent="0">
               <a:buNone/>
-              <a:defRPr sz="1000"/>
+              <a:defRPr sz="900"/>
             </a:lvl6pPr>
             <a:lvl7pPr marL="2743200" indent="0">
               <a:buNone/>
-              <a:defRPr sz="1000"/>
+              <a:defRPr sz="900"/>
             </a:lvl7pPr>
             <a:lvl8pPr marL="3200400" indent="0">
               <a:buNone/>
-              <a:defRPr sz="1000"/>
+              <a:defRPr sz="900"/>
             </a:lvl8pPr>
             <a:lvl9pPr marL="3657600" indent="0">
               <a:buNone/>
-              <a:defRPr sz="1000"/>
+              <a:defRPr sz="900"/>
             </a:lvl9pPr>
           </a:lstStyle>
           <a:p>
@@ -2678,13 +4424,7 @@
       </p:sp>
       <p:sp>
         <p:nvSpPr>
-          <p:cNvPr id="5" name="Date Placeholder 4">
-            <a:extLst>
-              <a:ext uri="{FF2B5EF4-FFF2-40B4-BE49-F238E27FC236}">
-                <a16:creationId xmlns:a16="http://schemas.microsoft.com/office/drawing/2014/main" id="{1F38213C-4F0F-7E55-13F1-BAAD409512C6}"/>
-              </a:ext>
-            </a:extLst>
-          </p:cNvPr>
+          <p:cNvPr id="5" name="Date Placeholder 4"/>
           <p:cNvSpPr>
             <a:spLocks noGrp="1"/>
           </p:cNvSpPr>
@@ -2699,7 +4439,7 @@
           <a:p>
             <a:fld id="{7B289A56-B7BF-4EE2-A684-7373F14AFF3B}" type="datetimeFigureOut">
               <a:rPr lang="en-IN" smtClean="0"/>
-              <a:t>07-04-2026</a:t>
+              <a:t>15-04-2026</a:t>
             </a:fld>
             <a:endParaRPr lang="en-IN"/>
           </a:p>
@@ -2707,13 +4447,7 @@
       </p:sp>
       <p:sp>
         <p:nvSpPr>
-          <p:cNvPr id="6" name="Footer Placeholder 5">
-            <a:extLst>
-              <a:ext uri="{FF2B5EF4-FFF2-40B4-BE49-F238E27FC236}">
-                <a16:creationId xmlns:a16="http://schemas.microsoft.com/office/drawing/2014/main" id="{F47548F3-EEE0-2CB0-0510-48D1CC2F1AAE}"/>
-              </a:ext>
-            </a:extLst>
-          </p:cNvPr>
+          <p:cNvPr id="6" name="Footer Placeholder 5"/>
           <p:cNvSpPr>
             <a:spLocks noGrp="1"/>
           </p:cNvSpPr>
@@ -2732,13 +4466,7 @@
       </p:sp>
       <p:sp>
         <p:nvSpPr>
-          <p:cNvPr id="7" name="Slide Number Placeholder 6">
-            <a:extLst>
-              <a:ext uri="{FF2B5EF4-FFF2-40B4-BE49-F238E27FC236}">
-                <a16:creationId xmlns:a16="http://schemas.microsoft.com/office/drawing/2014/main" id="{62F2A5B8-D47F-A235-0038-FCFC9CC9015F}"/>
-              </a:ext>
-            </a:extLst>
-          </p:cNvPr>
+          <p:cNvPr id="7" name="Slide Number Placeholder 6"/>
           <p:cNvSpPr>
             <a:spLocks noGrp="1"/>
           </p:cNvSpPr>
@@ -2762,7 +4490,7 @@
     </p:spTree>
     <p:extLst>
       <p:ext uri="{BB962C8B-B14F-4D97-AF65-F5344CB8AC3E}">
-        <p14:creationId xmlns:p14="http://schemas.microsoft.com/office/powerpoint/2010/main" val="1478694174"/>
+        <p14:creationId xmlns:p14="http://schemas.microsoft.com/office/powerpoint/2010/main" val="3252693112"/>
       </p:ext>
     </p:extLst>
   </p:cSld>
@@ -2776,8 +4504,8 @@
 <p:sldMaster xmlns:a="http://schemas.openxmlformats.org/drawingml/2006/main" xmlns:r="http://schemas.openxmlformats.org/officeDocument/2006/relationships" xmlns:p="http://schemas.openxmlformats.org/presentationml/2006/main">
   <p:cSld>
     <p:bg>
-      <p:bgRef idx="1001">
-        <a:schemeClr val="bg1"/>
+      <p:bgRef idx="1002">
+        <a:schemeClr val="bg2"/>
       </p:bgRef>
     </p:bg>
     <p:spTree>
@@ -2794,15 +4522,199 @@
           <a:chExt cx="0" cy="0"/>
         </a:xfrm>
       </p:grpSpPr>
-      <p:sp>
-        <p:nvSpPr>
-          <p:cNvPr id="2" name="Title Placeholder 1">
-            <a:extLst>
-              <a:ext uri="{FF2B5EF4-FFF2-40B4-BE49-F238E27FC236}">
-                <a16:creationId xmlns:a16="http://schemas.microsoft.com/office/drawing/2014/main" id="{2B916DC5-6480-E0BC-F1F7-D7E605F29628}"/>
-              </a:ext>
-            </a:extLst>
-          </p:cNvPr>
+      <p:grpSp>
+        <p:nvGrpSpPr>
+          <p:cNvPr id="7" name="Group 6"/>
+          <p:cNvGrpSpPr/>
+          <p:nvPr/>
+        </p:nvGrpSpPr>
+        <p:grpSpPr>
+          <a:xfrm>
+            <a:off x="9206969" y="2963333"/>
+            <a:ext cx="2981858" cy="3208867"/>
+            <a:chOff x="9206969" y="2963333"/>
+            <a:chExt cx="2981858" cy="3208867"/>
+          </a:xfrm>
+        </p:grpSpPr>
+        <p:cxnSp>
+          <p:nvCxnSpPr>
+            <p:cNvPr id="8" name="Straight Connector 7"/>
+            <p:cNvCxnSpPr/>
+            <p:nvPr/>
+          </p:nvCxnSpPr>
+          <p:spPr>
+            <a:xfrm flipH="1">
+              <a:off x="11276012" y="2963333"/>
+              <a:ext cx="912814" cy="912812"/>
+            </a:xfrm>
+            <a:prstGeom prst="line">
+              <a:avLst/>
+            </a:prstGeom>
+            <a:ln w="9525">
+              <a:solidFill>
+                <a:schemeClr val="tx1"/>
+              </a:solidFill>
+            </a:ln>
+          </p:spPr>
+          <p:style>
+            <a:lnRef idx="2">
+              <a:schemeClr val="accent1"/>
+            </a:lnRef>
+            <a:fillRef idx="0">
+              <a:schemeClr val="accent1"/>
+            </a:fillRef>
+            <a:effectRef idx="1">
+              <a:schemeClr val="accent1"/>
+            </a:effectRef>
+            <a:fontRef idx="minor">
+              <a:schemeClr val="tx1"/>
+            </a:fontRef>
+          </p:style>
+        </p:cxnSp>
+        <p:cxnSp>
+          <p:nvCxnSpPr>
+            <p:cNvPr id="9" name="Straight Connector 8"/>
+            <p:cNvCxnSpPr/>
+            <p:nvPr/>
+          </p:nvCxnSpPr>
+          <p:spPr>
+            <a:xfrm flipH="1">
+              <a:off x="9206969" y="3190344"/>
+              <a:ext cx="2981857" cy="2981856"/>
+            </a:xfrm>
+            <a:prstGeom prst="line">
+              <a:avLst/>
+            </a:prstGeom>
+            <a:ln w="9525">
+              <a:solidFill>
+                <a:schemeClr val="tx1"/>
+              </a:solidFill>
+            </a:ln>
+          </p:spPr>
+          <p:style>
+            <a:lnRef idx="2">
+              <a:schemeClr val="accent1"/>
+            </a:lnRef>
+            <a:fillRef idx="0">
+              <a:schemeClr val="accent1"/>
+            </a:fillRef>
+            <a:effectRef idx="1">
+              <a:schemeClr val="accent1"/>
+            </a:effectRef>
+            <a:fontRef idx="minor">
+              <a:schemeClr val="tx1"/>
+            </a:fontRef>
+          </p:style>
+        </p:cxnSp>
+        <p:cxnSp>
+          <p:nvCxnSpPr>
+            <p:cNvPr id="10" name="Straight Connector 9"/>
+            <p:cNvCxnSpPr/>
+            <p:nvPr/>
+          </p:nvCxnSpPr>
+          <p:spPr>
+            <a:xfrm flipH="1">
+              <a:off x="10292292" y="3285067"/>
+              <a:ext cx="1896534" cy="1896533"/>
+            </a:xfrm>
+            <a:prstGeom prst="line">
+              <a:avLst/>
+            </a:prstGeom>
+            <a:ln w="9525">
+              <a:solidFill>
+                <a:schemeClr val="tx1"/>
+              </a:solidFill>
+            </a:ln>
+          </p:spPr>
+          <p:style>
+            <a:lnRef idx="2">
+              <a:schemeClr val="accent1"/>
+            </a:lnRef>
+            <a:fillRef idx="0">
+              <a:schemeClr val="accent1"/>
+            </a:fillRef>
+            <a:effectRef idx="1">
+              <a:schemeClr val="accent1"/>
+            </a:effectRef>
+            <a:fontRef idx="minor">
+              <a:schemeClr val="tx1"/>
+            </a:fontRef>
+          </p:style>
+        </p:cxnSp>
+        <p:cxnSp>
+          <p:nvCxnSpPr>
+            <p:cNvPr id="11" name="Straight Connector 10"/>
+            <p:cNvCxnSpPr/>
+            <p:nvPr/>
+          </p:nvCxnSpPr>
+          <p:spPr>
+            <a:xfrm flipH="1">
+              <a:off x="10443103" y="3131080"/>
+              <a:ext cx="1745722" cy="1745720"/>
+            </a:xfrm>
+            <a:prstGeom prst="line">
+              <a:avLst/>
+            </a:prstGeom>
+            <a:ln w="28575">
+              <a:solidFill>
+                <a:schemeClr val="tx1"/>
+              </a:solidFill>
+            </a:ln>
+          </p:spPr>
+          <p:style>
+            <a:lnRef idx="2">
+              <a:schemeClr val="accent1"/>
+            </a:lnRef>
+            <a:fillRef idx="0">
+              <a:schemeClr val="accent1"/>
+            </a:fillRef>
+            <a:effectRef idx="1">
+              <a:schemeClr val="accent1"/>
+            </a:effectRef>
+            <a:fontRef idx="minor">
+              <a:schemeClr val="tx1"/>
+            </a:fontRef>
+          </p:style>
+        </p:cxnSp>
+        <p:cxnSp>
+          <p:nvCxnSpPr>
+            <p:cNvPr id="12" name="Straight Connector 11"/>
+            <p:cNvCxnSpPr/>
+            <p:nvPr/>
+          </p:nvCxnSpPr>
+          <p:spPr>
+            <a:xfrm flipH="1">
+              <a:off x="10918826" y="3683001"/>
+              <a:ext cx="1270001" cy="1269999"/>
+            </a:xfrm>
+            <a:prstGeom prst="line">
+              <a:avLst/>
+            </a:prstGeom>
+            <a:ln w="28575">
+              <a:solidFill>
+                <a:schemeClr val="tx1"/>
+              </a:solidFill>
+            </a:ln>
+          </p:spPr>
+          <p:style>
+            <a:lnRef idx="2">
+              <a:schemeClr val="accent1"/>
+            </a:lnRef>
+            <a:fillRef idx="0">
+              <a:schemeClr val="accent1"/>
+            </a:fillRef>
+            <a:effectRef idx="1">
+              <a:schemeClr val="accent1"/>
+            </a:effectRef>
+            <a:fontRef idx="minor">
+              <a:schemeClr val="tx1"/>
+            </a:fontRef>
+          </p:style>
+        </p:cxnSp>
+      </p:grpSp>
+      <p:sp>
+        <p:nvSpPr>
+          <p:cNvPr id="2" name="Title Placeholder 1"/>
           <p:cNvSpPr>
             <a:spLocks noGrp="1"/>
           </p:cNvSpPr>
@@ -2812,12 +4724,13 @@
         </p:nvSpPr>
         <p:spPr>
           <a:xfrm>
-            <a:off x="838200" y="365125"/>
-            <a:ext cx="10515600" cy="1325563"/>
+            <a:off x="684212" y="4487332"/>
+            <a:ext cx="8534400" cy="1507067"/>
           </a:xfrm>
           <a:prstGeom prst="rect">
             <a:avLst/>
           </a:prstGeom>
+          <a:effectLst/>
         </p:spPr>
         <p:txBody>
           <a:bodyPr vert="horz" lIns="91440" tIns="45720" rIns="91440" bIns="45720" rtlCol="0" anchor="ctr">
@@ -2829,19 +4742,13 @@
               <a:rPr lang="en-US"/>
               <a:t>Click to edit Master title style</a:t>
             </a:r>
-            <a:endParaRPr lang="en-IN"/>
-          </a:p>
-        </p:txBody>
-      </p:sp>
-      <p:sp>
-        <p:nvSpPr>
-          <p:cNvPr id="3" name="Text Placeholder 2">
-            <a:extLst>
-              <a:ext uri="{FF2B5EF4-FFF2-40B4-BE49-F238E27FC236}">
-                <a16:creationId xmlns:a16="http://schemas.microsoft.com/office/drawing/2014/main" id="{5E45A303-F574-AA86-3F6C-B592CDEE8AE5}"/>
-              </a:ext>
-            </a:extLst>
-          </p:cNvPr>
+            <a:endParaRPr lang="en-US" dirty="0"/>
+          </a:p>
+        </p:txBody>
+      </p:sp>
+      <p:sp>
+        <p:nvSpPr>
+          <p:cNvPr id="3" name="Text Placeholder 2"/>
           <p:cNvSpPr>
             <a:spLocks noGrp="1"/>
           </p:cNvSpPr>
@@ -2851,15 +4758,15 @@
         </p:nvSpPr>
         <p:spPr>
           <a:xfrm>
-            <a:off x="838200" y="1825625"/>
-            <a:ext cx="10515600" cy="4351338"/>
+            <a:off x="684212" y="685800"/>
+            <a:ext cx="8534400" cy="3615267"/>
           </a:xfrm>
           <a:prstGeom prst="rect">
             <a:avLst/>
           </a:prstGeom>
         </p:spPr>
         <p:txBody>
-          <a:bodyPr vert="horz" lIns="91440" tIns="45720" rIns="91440" bIns="45720" rtlCol="0">
+          <a:bodyPr vert="horz" lIns="91440" tIns="45720" rIns="91440" bIns="45720" rtlCol="0" anchor="ctr">
             <a:normAutofit/>
           </a:bodyPr>
           <a:lstStyle/>
@@ -2897,19 +4804,13 @@
               <a:rPr lang="en-US"/>
               <a:t>Fifth level</a:t>
             </a:r>
-            <a:endParaRPr lang="en-IN"/>
-          </a:p>
-        </p:txBody>
-      </p:sp>
-      <p:sp>
-        <p:nvSpPr>
-          <p:cNvPr id="4" name="Date Placeholder 3">
-            <a:extLst>
-              <a:ext uri="{FF2B5EF4-FFF2-40B4-BE49-F238E27FC236}">
-                <a16:creationId xmlns:a16="http://schemas.microsoft.com/office/drawing/2014/main" id="{E5335D02-92E6-CE42-BFE8-8029C2A42A48}"/>
-              </a:ext>
-            </a:extLst>
-          </p:cNvPr>
+            <a:endParaRPr lang="en-US" dirty="0"/>
+          </a:p>
+        </p:txBody>
+      </p:sp>
+      <p:sp>
+        <p:nvSpPr>
+          <p:cNvPr id="4" name="Date Placeholder 3"/>
           <p:cNvSpPr>
             <a:spLocks noGrp="1"/>
           </p:cNvSpPr>
@@ -2919,30 +4820,32 @@
         </p:nvSpPr>
         <p:spPr>
           <a:xfrm>
-            <a:off x="838200" y="6356350"/>
-            <a:ext cx="2743200" cy="365125"/>
+            <a:off x="9904412" y="6172200"/>
+            <a:ext cx="1600200" cy="365125"/>
           </a:xfrm>
           <a:prstGeom prst="rect">
             <a:avLst/>
           </a:prstGeom>
         </p:spPr>
         <p:txBody>
-          <a:bodyPr vert="horz" lIns="91440" tIns="45720" rIns="91440" bIns="45720" rtlCol="0" anchor="ctr"/>
+          <a:bodyPr vert="horz" lIns="91440" tIns="45720" rIns="91440" bIns="45720" rtlCol="0" anchor="t"/>
           <a:lstStyle>
-            <a:lvl1pPr algn="l">
-              <a:defRPr sz="1200">
-                <a:solidFill>
-                  <a:schemeClr val="tx1">
-                    <a:tint val="75000"/>
-                  </a:schemeClr>
-                </a:solidFill>
+            <a:lvl1pPr algn="r">
+              <a:defRPr sz="1000" b="0" i="0">
+                <a:solidFill>
+                  <a:schemeClr val="bg2">
+                    <a:lumMod val="50000"/>
+                  </a:schemeClr>
+                </a:solidFill>
+                <a:effectLst/>
+                <a:latin typeface="+mn-lt"/>
               </a:defRPr>
             </a:lvl1pPr>
           </a:lstStyle>
           <a:p>
             <a:fld id="{7B289A56-B7BF-4EE2-A684-7373F14AFF3B}" type="datetimeFigureOut">
               <a:rPr lang="en-IN" smtClean="0"/>
-              <a:t>07-04-2026</a:t>
+              <a:t>15-04-2026</a:t>
             </a:fld>
             <a:endParaRPr lang="en-IN"/>
           </a:p>
@@ -2950,13 +4853,7 @@
       </p:sp>
       <p:sp>
         <p:nvSpPr>
-          <p:cNvPr id="5" name="Footer Placeholder 4">
-            <a:extLst>
-              <a:ext uri="{FF2B5EF4-FFF2-40B4-BE49-F238E27FC236}">
-                <a16:creationId xmlns:a16="http://schemas.microsoft.com/office/drawing/2014/main" id="{8B90A4AE-F6D4-1200-163D-1FE1D2E81FC8}"/>
-              </a:ext>
-            </a:extLst>
-          </p:cNvPr>
+          <p:cNvPr id="5" name="Footer Placeholder 4"/>
           <p:cNvSpPr>
             <a:spLocks noGrp="1"/>
           </p:cNvSpPr>
@@ -2966,23 +4863,25 @@
         </p:nvSpPr>
         <p:spPr>
           <a:xfrm>
-            <a:off x="4038600" y="6356350"/>
-            <a:ext cx="4114800" cy="365125"/>
+            <a:off x="684212" y="6172200"/>
+            <a:ext cx="7543800" cy="365125"/>
           </a:xfrm>
           <a:prstGeom prst="rect">
             <a:avLst/>
           </a:prstGeom>
         </p:spPr>
         <p:txBody>
-          <a:bodyPr vert="horz" lIns="91440" tIns="45720" rIns="91440" bIns="45720" rtlCol="0" anchor="ctr"/>
+          <a:bodyPr vert="horz" lIns="91440" tIns="45720" rIns="91440" bIns="45720" rtlCol="0" anchor="t"/>
           <a:lstStyle>
-            <a:lvl1pPr algn="ctr">
-              <a:defRPr sz="1200">
-                <a:solidFill>
-                  <a:schemeClr val="tx1">
-                    <a:tint val="75000"/>
-                  </a:schemeClr>
-                </a:solidFill>
+            <a:lvl1pPr algn="l">
+              <a:defRPr sz="1000" b="0" i="0">
+                <a:solidFill>
+                  <a:schemeClr val="bg2">
+                    <a:lumMod val="50000"/>
+                  </a:schemeClr>
+                </a:solidFill>
+                <a:effectLst/>
+                <a:latin typeface="+mn-lt"/>
               </a:defRPr>
             </a:lvl1pPr>
           </a:lstStyle>
@@ -2993,13 +4892,7 @@
       </p:sp>
       <p:sp>
         <p:nvSpPr>
-          <p:cNvPr id="6" name="Slide Number Placeholder 5">
-            <a:extLst>
-              <a:ext uri="{FF2B5EF4-FFF2-40B4-BE49-F238E27FC236}">
-                <a16:creationId xmlns:a16="http://schemas.microsoft.com/office/drawing/2014/main" id="{7EAA569D-EF3A-0E41-7F3B-0EDD07E67EED}"/>
-              </a:ext>
-            </a:extLst>
-          </p:cNvPr>
+          <p:cNvPr id="6" name="Slide Number Placeholder 5"/>
           <p:cNvSpPr>
             <a:spLocks noGrp="1"/>
           </p:cNvSpPr>
@@ -3009,23 +4902,25 @@
         </p:nvSpPr>
         <p:spPr>
           <a:xfrm>
-            <a:off x="8610600" y="6356350"/>
-            <a:ext cx="2743200" cy="365125"/>
+            <a:off x="10363200" y="5578475"/>
+            <a:ext cx="1142245" cy="669925"/>
           </a:xfrm>
           <a:prstGeom prst="rect">
             <a:avLst/>
           </a:prstGeom>
         </p:spPr>
         <p:txBody>
-          <a:bodyPr vert="horz" lIns="91440" tIns="45720" rIns="91440" bIns="45720" rtlCol="0" anchor="ctr"/>
+          <a:bodyPr vert="horz" lIns="91440" tIns="45720" rIns="91440" bIns="45720" rtlCol="0" anchor="b"/>
           <a:lstStyle>
             <a:lvl1pPr algn="r">
-              <a:defRPr sz="1200">
-                <a:solidFill>
-                  <a:schemeClr val="tx1">
-                    <a:tint val="75000"/>
-                  </a:schemeClr>
-                </a:solidFill>
+              <a:defRPr sz="3200" b="0" i="0">
+                <a:solidFill>
+                  <a:schemeClr val="bg2">
+                    <a:lumMod val="50000"/>
+                  </a:schemeClr>
+                </a:solidFill>
+                <a:effectLst/>
+                <a:latin typeface="+mn-lt"/>
               </a:defRPr>
             </a:lvl1pPr>
           </a:lstStyle>
@@ -3041,202 +4936,328 @@
     </p:spTree>
     <p:extLst>
       <p:ext uri="{BB962C8B-B14F-4D97-AF65-F5344CB8AC3E}">
-        <p14:creationId xmlns:p14="http://schemas.microsoft.com/office/powerpoint/2010/main" val="4169888826"/>
+        <p14:creationId xmlns:p14="http://schemas.microsoft.com/office/powerpoint/2010/main" val="1198731704"/>
       </p:ext>
     </p:extLst>
   </p:cSld>
-  <p:clrMap bg1="lt1" tx1="dk1" bg2="lt2" tx2="dk2" accent1="accent1" accent2="accent2" accent3="accent3" accent4="accent4" accent5="accent5" accent6="accent6" hlink="hlink" folHlink="folHlink"/>
+  <p:clrMap bg1="dk1" tx1="lt1" bg2="dk2" tx2="lt2" accent1="accent1" accent2="accent2" accent3="accent3" accent4="accent4" accent5="accent5" accent6="accent6" hlink="hlink" folHlink="folHlink"/>
   <p:sldLayoutIdLst>
-    <p:sldLayoutId id="2147483649" r:id="rId1"/>
-    <p:sldLayoutId id="2147483650" r:id="rId2"/>
-    <p:sldLayoutId id="2147483651" r:id="rId3"/>
-    <p:sldLayoutId id="2147483652" r:id="rId4"/>
-    <p:sldLayoutId id="2147483653" r:id="rId5"/>
-    <p:sldLayoutId id="2147483654" r:id="rId6"/>
-    <p:sldLayoutId id="2147483655" r:id="rId7"/>
-    <p:sldLayoutId id="2147483656" r:id="rId8"/>
-    <p:sldLayoutId id="2147483657" r:id="rId9"/>
-    <p:sldLayoutId id="2147483658" r:id="rId10"/>
-    <p:sldLayoutId id="2147483659" r:id="rId11"/>
+    <p:sldLayoutId id="2147483786" r:id="rId1"/>
+    <p:sldLayoutId id="2147483787" r:id="rId2"/>
+    <p:sldLayoutId id="2147483788" r:id="rId3"/>
+    <p:sldLayoutId id="2147483789" r:id="rId4"/>
+    <p:sldLayoutId id="2147483790" r:id="rId5"/>
+    <p:sldLayoutId id="2147483791" r:id="rId6"/>
+    <p:sldLayoutId id="2147483792" r:id="rId7"/>
+    <p:sldLayoutId id="2147483793" r:id="rId8"/>
+    <p:sldLayoutId id="2147483794" r:id="rId9"/>
+    <p:sldLayoutId id="2147483795" r:id="rId10"/>
+    <p:sldLayoutId id="2147483796" r:id="rId11"/>
+    <p:sldLayoutId id="2147483797" r:id="rId12"/>
+    <p:sldLayoutId id="2147483798" r:id="rId13"/>
+    <p:sldLayoutId id="2147483799" r:id="rId14"/>
+    <p:sldLayoutId id="2147483800" r:id="rId15"/>
+    <p:sldLayoutId id="2147483801" r:id="rId16"/>
+    <p:sldLayoutId id="2147483802" r:id="rId17"/>
   </p:sldLayoutIdLst>
   <p:txStyles>
     <p:titleStyle>
-      <a:lvl1pPr algn="l" defTabSz="914400" rtl="0" eaLnBrk="1" latinLnBrk="0" hangingPunct="1">
-        <a:lnSpc>
-          <a:spcPct val="90000"/>
-        </a:lnSpc>
+      <a:lvl1pPr algn="l" defTabSz="457200" rtl="0" eaLnBrk="1" latinLnBrk="0" hangingPunct="1">
         <a:spcBef>
           <a:spcPct val="0"/>
         </a:spcBef>
         <a:buNone/>
-        <a:defRPr sz="4400" kern="1200">
+        <a:defRPr sz="3600" kern="1200" cap="all">
+          <a:ln w="3175" cmpd="sng">
+            <a:noFill/>
+          </a:ln>
           <a:solidFill>
             <a:schemeClr val="tx1"/>
           </a:solidFill>
+          <a:effectLst/>
           <a:latin typeface="+mj-lt"/>
           <a:ea typeface="+mj-ea"/>
           <a:cs typeface="+mj-cs"/>
         </a:defRPr>
       </a:lvl1pPr>
+      <a:lvl2pPr eaLnBrk="1" hangingPunct="1">
+        <a:defRPr>
+          <a:solidFill>
+            <a:schemeClr val="tx2"/>
+          </a:solidFill>
+        </a:defRPr>
+      </a:lvl2pPr>
+      <a:lvl3pPr eaLnBrk="1" hangingPunct="1">
+        <a:defRPr>
+          <a:solidFill>
+            <a:schemeClr val="tx2"/>
+          </a:solidFill>
+        </a:defRPr>
+      </a:lvl3pPr>
+      <a:lvl4pPr eaLnBrk="1" hangingPunct="1">
+        <a:defRPr>
+          <a:solidFill>
+            <a:schemeClr val="tx2"/>
+          </a:solidFill>
+        </a:defRPr>
+      </a:lvl4pPr>
+      <a:lvl5pPr eaLnBrk="1" hangingPunct="1">
+        <a:defRPr>
+          <a:solidFill>
+            <a:schemeClr val="tx2"/>
+          </a:solidFill>
+        </a:defRPr>
+      </a:lvl5pPr>
+      <a:lvl6pPr eaLnBrk="1" hangingPunct="1">
+        <a:defRPr>
+          <a:solidFill>
+            <a:schemeClr val="tx2"/>
+          </a:solidFill>
+        </a:defRPr>
+      </a:lvl6pPr>
+      <a:lvl7pPr eaLnBrk="1" hangingPunct="1">
+        <a:defRPr>
+          <a:solidFill>
+            <a:schemeClr val="tx2"/>
+          </a:solidFill>
+        </a:defRPr>
+      </a:lvl7pPr>
+      <a:lvl8pPr eaLnBrk="1" hangingPunct="1">
+        <a:defRPr>
+          <a:solidFill>
+            <a:schemeClr val="tx2"/>
+          </a:solidFill>
+        </a:defRPr>
+      </a:lvl8pPr>
+      <a:lvl9pPr eaLnBrk="1" hangingPunct="1">
+        <a:defRPr>
+          <a:solidFill>
+            <a:schemeClr val="tx2"/>
+          </a:solidFill>
+        </a:defRPr>
+      </a:lvl9pPr>
     </p:titleStyle>
     <p:bodyStyle>
-      <a:lvl1pPr marL="228600" indent="-228600" algn="l" defTabSz="914400" rtl="0" eaLnBrk="1" latinLnBrk="0" hangingPunct="1">
-        <a:lnSpc>
-          <a:spcPct val="90000"/>
-        </a:lnSpc>
+      <a:lvl1pPr marL="285750" indent="-285750" algn="l" defTabSz="457200" rtl="0" eaLnBrk="1" latinLnBrk="0" hangingPunct="1">
         <a:spcBef>
-          <a:spcPts val="1000"/>
+          <a:spcPct val="20000"/>
         </a:spcBef>
-        <a:buFont typeface="Arial" panose="020B0604020202020204" pitchFamily="34" charset="0"/>
-        <a:buChar char="•"/>
-        <a:defRPr sz="2800" kern="1200">
+        <a:spcAft>
+          <a:spcPts val="600"/>
+        </a:spcAft>
+        <a:buClr>
+          <a:schemeClr val="tx1"/>
+        </a:buClr>
+        <a:buSzPct val="80000"/>
+        <a:buFont typeface="Wingdings 3" panose="05040102010807070707" pitchFamily="18" charset="2"/>
+        <a:buChar char=""/>
+        <a:defRPr sz="2000" kern="1200" cap="none">
           <a:solidFill>
-            <a:schemeClr val="tx1"/>
+            <a:schemeClr val="bg2">
+              <a:lumMod val="75000"/>
+            </a:schemeClr>
           </a:solidFill>
+          <a:effectLst/>
           <a:latin typeface="+mn-lt"/>
           <a:ea typeface="+mn-ea"/>
           <a:cs typeface="+mn-cs"/>
         </a:defRPr>
       </a:lvl1pPr>
-      <a:lvl2pPr marL="685800" indent="-228600" algn="l" defTabSz="914400" rtl="0" eaLnBrk="1" latinLnBrk="0" hangingPunct="1">
-        <a:lnSpc>
-          <a:spcPct val="90000"/>
-        </a:lnSpc>
+      <a:lvl2pPr marL="742950" indent="-285750" algn="l" defTabSz="457200" rtl="0" eaLnBrk="1" latinLnBrk="0" hangingPunct="1">
         <a:spcBef>
-          <a:spcPts val="500"/>
+          <a:spcPct val="20000"/>
         </a:spcBef>
-        <a:buFont typeface="Arial" panose="020B0604020202020204" pitchFamily="34" charset="0"/>
-        <a:buChar char="•"/>
-        <a:defRPr sz="2400" kern="1200">
+        <a:spcAft>
+          <a:spcPts val="600"/>
+        </a:spcAft>
+        <a:buClr>
+          <a:schemeClr val="tx1"/>
+        </a:buClr>
+        <a:buSzPct val="80000"/>
+        <a:buFont typeface="Wingdings 3" panose="05040102010807070707" pitchFamily="18" charset="2"/>
+        <a:buChar char=""/>
+        <a:defRPr sz="1800" kern="1200" cap="none">
           <a:solidFill>
-            <a:schemeClr val="tx1"/>
+            <a:schemeClr val="bg2">
+              <a:lumMod val="75000"/>
+            </a:schemeClr>
           </a:solidFill>
+          <a:effectLst/>
           <a:latin typeface="+mn-lt"/>
           <a:ea typeface="+mn-ea"/>
           <a:cs typeface="+mn-cs"/>
         </a:defRPr>
       </a:lvl2pPr>
-      <a:lvl3pPr marL="1143000" indent="-228600" algn="l" defTabSz="914400" rtl="0" eaLnBrk="1" latinLnBrk="0" hangingPunct="1">
-        <a:lnSpc>
-          <a:spcPct val="90000"/>
-        </a:lnSpc>
+      <a:lvl3pPr marL="1200150" indent="-285750" algn="l" defTabSz="457200" rtl="0" eaLnBrk="1" latinLnBrk="0" hangingPunct="1">
         <a:spcBef>
-          <a:spcPts val="500"/>
+          <a:spcPct val="20000"/>
         </a:spcBef>
-        <a:buFont typeface="Arial" panose="020B0604020202020204" pitchFamily="34" charset="0"/>
-        <a:buChar char="•"/>
-        <a:defRPr sz="2000" kern="1200">
+        <a:spcAft>
+          <a:spcPts val="600"/>
+        </a:spcAft>
+        <a:buClr>
+          <a:schemeClr val="tx1"/>
+        </a:buClr>
+        <a:buSzPct val="80000"/>
+        <a:buFont typeface="Wingdings 3" panose="05040102010807070707" pitchFamily="18" charset="2"/>
+        <a:buChar char=""/>
+        <a:defRPr sz="1600" kern="1200" cap="none">
           <a:solidFill>
-            <a:schemeClr val="tx1"/>
+            <a:schemeClr val="bg2">
+              <a:lumMod val="75000"/>
+            </a:schemeClr>
           </a:solidFill>
+          <a:effectLst/>
           <a:latin typeface="+mn-lt"/>
           <a:ea typeface="+mn-ea"/>
           <a:cs typeface="+mn-cs"/>
         </a:defRPr>
       </a:lvl3pPr>
-      <a:lvl4pPr marL="1600200" indent="-228600" algn="l" defTabSz="914400" rtl="0" eaLnBrk="1" latinLnBrk="0" hangingPunct="1">
-        <a:lnSpc>
-          <a:spcPct val="90000"/>
-        </a:lnSpc>
+      <a:lvl4pPr marL="1543050" indent="-171450" algn="l" defTabSz="457200" rtl="0" eaLnBrk="1" latinLnBrk="0" hangingPunct="1">
         <a:spcBef>
-          <a:spcPts val="500"/>
+          <a:spcPct val="20000"/>
         </a:spcBef>
-        <a:buFont typeface="Arial" panose="020B0604020202020204" pitchFamily="34" charset="0"/>
-        <a:buChar char="•"/>
-        <a:defRPr sz="1800" kern="1200">
+        <a:spcAft>
+          <a:spcPts val="600"/>
+        </a:spcAft>
+        <a:buClr>
+          <a:schemeClr val="tx1"/>
+        </a:buClr>
+        <a:buSzPct val="80000"/>
+        <a:buFont typeface="Wingdings 3" panose="05040102010807070707" pitchFamily="18" charset="2"/>
+        <a:buChar char=""/>
+        <a:defRPr sz="1400" kern="1200" cap="none">
           <a:solidFill>
-            <a:schemeClr val="tx1"/>
+            <a:schemeClr val="bg2">
+              <a:lumMod val="75000"/>
+            </a:schemeClr>
           </a:solidFill>
+          <a:effectLst/>
           <a:latin typeface="+mn-lt"/>
           <a:ea typeface="+mn-ea"/>
           <a:cs typeface="+mn-cs"/>
         </a:defRPr>
       </a:lvl4pPr>
-      <a:lvl5pPr marL="2057400" indent="-228600" algn="l" defTabSz="914400" rtl="0" eaLnBrk="1" latinLnBrk="0" hangingPunct="1">
-        <a:lnSpc>
-          <a:spcPct val="90000"/>
-        </a:lnSpc>
+      <a:lvl5pPr marL="2000250" indent="-171450" algn="l" defTabSz="457200" rtl="0" eaLnBrk="1" latinLnBrk="0" hangingPunct="1">
         <a:spcBef>
-          <a:spcPts val="500"/>
+          <a:spcPct val="20000"/>
         </a:spcBef>
-        <a:buFont typeface="Arial" panose="020B0604020202020204" pitchFamily="34" charset="0"/>
-        <a:buChar char="•"/>
-        <a:defRPr sz="1800" kern="1200">
+        <a:spcAft>
+          <a:spcPts val="600"/>
+        </a:spcAft>
+        <a:buClr>
+          <a:schemeClr val="tx1"/>
+        </a:buClr>
+        <a:buSzPct val="80000"/>
+        <a:buFont typeface="Wingdings 3" panose="05040102010807070707" pitchFamily="18" charset="2"/>
+        <a:buChar char=""/>
+        <a:defRPr sz="1400" kern="1200" cap="none">
           <a:solidFill>
-            <a:schemeClr val="tx1"/>
+            <a:schemeClr val="bg2">
+              <a:lumMod val="75000"/>
+            </a:schemeClr>
           </a:solidFill>
+          <a:effectLst/>
           <a:latin typeface="+mn-lt"/>
           <a:ea typeface="+mn-ea"/>
           <a:cs typeface="+mn-cs"/>
         </a:defRPr>
       </a:lvl5pPr>
-      <a:lvl6pPr marL="2514600" indent="-228600" algn="l" defTabSz="914400" rtl="0" eaLnBrk="1" latinLnBrk="0" hangingPunct="1">
-        <a:lnSpc>
-          <a:spcPct val="90000"/>
-        </a:lnSpc>
+      <a:lvl6pPr marL="2514600" indent="-228600" algn="l" defTabSz="457200" rtl="0" eaLnBrk="1" latinLnBrk="0" hangingPunct="1">
         <a:spcBef>
-          <a:spcPts val="500"/>
+          <a:spcPct val="20000"/>
         </a:spcBef>
-        <a:buFont typeface="Arial" panose="020B0604020202020204" pitchFamily="34" charset="0"/>
-        <a:buChar char="•"/>
-        <a:defRPr sz="1800" kern="1200">
+        <a:spcAft>
+          <a:spcPts val="600"/>
+        </a:spcAft>
+        <a:buClr>
+          <a:schemeClr val="tx1"/>
+        </a:buClr>
+        <a:buSzPct val="80000"/>
+        <a:buFont typeface="Wingdings 3" panose="05040102010807070707" pitchFamily="18" charset="2"/>
+        <a:buChar char=""/>
+        <a:defRPr sz="1400" kern="1200" cap="none">
           <a:solidFill>
-            <a:schemeClr val="tx1"/>
+            <a:schemeClr val="bg2">
+              <a:lumMod val="75000"/>
+            </a:schemeClr>
           </a:solidFill>
+          <a:effectLst/>
           <a:latin typeface="+mn-lt"/>
           <a:ea typeface="+mn-ea"/>
           <a:cs typeface="+mn-cs"/>
         </a:defRPr>
       </a:lvl6pPr>
-      <a:lvl7pPr marL="2971800" indent="-228600" algn="l" defTabSz="914400" rtl="0" eaLnBrk="1" latinLnBrk="0" hangingPunct="1">
-        <a:lnSpc>
-          <a:spcPct val="90000"/>
-        </a:lnSpc>
+      <a:lvl7pPr marL="2971800" indent="-228600" algn="l" defTabSz="457200" rtl="0" eaLnBrk="1" latinLnBrk="0" hangingPunct="1">
         <a:spcBef>
-          <a:spcPts val="500"/>
+          <a:spcPct val="20000"/>
         </a:spcBef>
-        <a:buFont typeface="Arial" panose="020B0604020202020204" pitchFamily="34" charset="0"/>
-        <a:buChar char="•"/>
-        <a:defRPr sz="1800" kern="1200">
+        <a:spcAft>
+          <a:spcPts val="600"/>
+        </a:spcAft>
+        <a:buClr>
+          <a:schemeClr val="tx1"/>
+        </a:buClr>
+        <a:buSzPct val="80000"/>
+        <a:buFont typeface="Wingdings 3" panose="05040102010807070707" pitchFamily="18" charset="2"/>
+        <a:buChar char=""/>
+        <a:defRPr sz="1400" kern="1200" cap="none">
           <a:solidFill>
-            <a:schemeClr val="tx1"/>
+            <a:schemeClr val="bg2">
+              <a:lumMod val="75000"/>
+            </a:schemeClr>
           </a:solidFill>
+          <a:effectLst/>
           <a:latin typeface="+mn-lt"/>
           <a:ea typeface="+mn-ea"/>
           <a:cs typeface="+mn-cs"/>
         </a:defRPr>
       </a:lvl7pPr>
-      <a:lvl8pPr marL="3429000" indent="-228600" algn="l" defTabSz="914400" rtl="0" eaLnBrk="1" latinLnBrk="0" hangingPunct="1">
-        <a:lnSpc>
-          <a:spcPct val="90000"/>
-        </a:lnSpc>
+      <a:lvl8pPr marL="3429000" indent="-228600" algn="l" defTabSz="457200" rtl="0" eaLnBrk="1" latinLnBrk="0" hangingPunct="1">
         <a:spcBef>
-          <a:spcPts val="500"/>
+          <a:spcPct val="20000"/>
         </a:spcBef>
-        <a:buFont typeface="Arial" panose="020B0604020202020204" pitchFamily="34" charset="0"/>
-        <a:buChar char="•"/>
-        <a:defRPr sz="1800" kern="1200">
+        <a:spcAft>
+          <a:spcPts val="600"/>
+        </a:spcAft>
+        <a:buClr>
+          <a:schemeClr val="tx1"/>
+        </a:buClr>
+        <a:buSzPct val="80000"/>
+        <a:buFont typeface="Wingdings 3" panose="05040102010807070707" pitchFamily="18" charset="2"/>
+        <a:buChar char=""/>
+        <a:defRPr sz="1400" kern="1200" cap="none">
           <a:solidFill>
-            <a:schemeClr val="tx1"/>
+            <a:schemeClr val="bg2">
+              <a:lumMod val="75000"/>
+            </a:schemeClr>
           </a:solidFill>
+          <a:effectLst/>
           <a:latin typeface="+mn-lt"/>
           <a:ea typeface="+mn-ea"/>
           <a:cs typeface="+mn-cs"/>
         </a:defRPr>
       </a:lvl8pPr>
-      <a:lvl9pPr marL="3886200" indent="-228600" algn="l" defTabSz="914400" rtl="0" eaLnBrk="1" latinLnBrk="0" hangingPunct="1">
-        <a:lnSpc>
-          <a:spcPct val="90000"/>
-        </a:lnSpc>
+      <a:lvl9pPr marL="3886200" indent="-228600" algn="l" defTabSz="457200" rtl="0" eaLnBrk="1" latinLnBrk="0" hangingPunct="1">
         <a:spcBef>
-          <a:spcPts val="500"/>
+          <a:spcPct val="20000"/>
         </a:spcBef>
-        <a:buFont typeface="Arial" panose="020B0604020202020204" pitchFamily="34" charset="0"/>
-        <a:buChar char="•"/>
-        <a:defRPr sz="1800" kern="1200">
+        <a:spcAft>
+          <a:spcPts val="600"/>
+        </a:spcAft>
+        <a:buClr>
+          <a:schemeClr val="tx1"/>
+        </a:buClr>
+        <a:buSzPct val="80000"/>
+        <a:buFont typeface="Wingdings 3" panose="05040102010807070707" pitchFamily="18" charset="2"/>
+        <a:buChar char=""/>
+        <a:defRPr sz="1400" kern="1200" cap="none">
           <a:solidFill>
-            <a:schemeClr val="tx1"/>
+            <a:schemeClr val="bg2">
+              <a:lumMod val="75000"/>
+            </a:schemeClr>
           </a:solidFill>
+          <a:effectLst/>
           <a:latin typeface="+mn-lt"/>
           <a:ea typeface="+mn-ea"/>
           <a:cs typeface="+mn-cs"/>
@@ -3247,7 +5268,7 @@
       <a:defPPr>
         <a:defRPr lang="en-US"/>
       </a:defPPr>
-      <a:lvl1pPr marL="0" algn="l" defTabSz="914400" rtl="0" eaLnBrk="1" latinLnBrk="0" hangingPunct="1">
+      <a:lvl1pPr marL="0" algn="l" defTabSz="457200" rtl="0" eaLnBrk="1" latinLnBrk="0" hangingPunct="1">
         <a:defRPr sz="1800" kern="1200">
           <a:solidFill>
             <a:schemeClr val="tx1"/>
@@ -3257,7 +5278,7 @@
           <a:cs typeface="+mn-cs"/>
         </a:defRPr>
       </a:lvl1pPr>
-      <a:lvl2pPr marL="457200" algn="l" defTabSz="914400" rtl="0" eaLnBrk="1" latinLnBrk="0" hangingPunct="1">
+      <a:lvl2pPr marL="457200" algn="l" defTabSz="457200" rtl="0" eaLnBrk="1" latinLnBrk="0" hangingPunct="1">
         <a:defRPr sz="1800" kern="1200">
           <a:solidFill>
             <a:schemeClr val="tx1"/>
@@ -3267,7 +5288,7 @@
           <a:cs typeface="+mn-cs"/>
         </a:defRPr>
       </a:lvl2pPr>
-      <a:lvl3pPr marL="914400" algn="l" defTabSz="914400" rtl="0" eaLnBrk="1" latinLnBrk="0" hangingPunct="1">
+      <a:lvl3pPr marL="914400" algn="l" defTabSz="457200" rtl="0" eaLnBrk="1" latinLnBrk="0" hangingPunct="1">
         <a:defRPr sz="1800" kern="1200">
           <a:solidFill>
             <a:schemeClr val="tx1"/>
@@ -3277,7 +5298,7 @@
           <a:cs typeface="+mn-cs"/>
         </a:defRPr>
       </a:lvl3pPr>
-      <a:lvl4pPr marL="1371600" algn="l" defTabSz="914400" rtl="0" eaLnBrk="1" latinLnBrk="0" hangingPunct="1">
+      <a:lvl4pPr marL="1371600" algn="l" defTabSz="457200" rtl="0" eaLnBrk="1" latinLnBrk="0" hangingPunct="1">
         <a:defRPr sz="1800" kern="1200">
           <a:solidFill>
             <a:schemeClr val="tx1"/>
@@ -3287,7 +5308,7 @@
           <a:cs typeface="+mn-cs"/>
         </a:defRPr>
       </a:lvl4pPr>
-      <a:lvl5pPr marL="1828800" algn="l" defTabSz="914400" rtl="0" eaLnBrk="1" latinLnBrk="0" hangingPunct="1">
+      <a:lvl5pPr marL="1828800" algn="l" defTabSz="457200" rtl="0" eaLnBrk="1" latinLnBrk="0" hangingPunct="1">
         <a:defRPr sz="1800" kern="1200">
           <a:solidFill>
             <a:schemeClr val="tx1"/>
@@ -3297,7 +5318,7 @@
           <a:cs typeface="+mn-cs"/>
         </a:defRPr>
       </a:lvl5pPr>
-      <a:lvl6pPr marL="2286000" algn="l" defTabSz="914400" rtl="0" eaLnBrk="1" latinLnBrk="0" hangingPunct="1">
+      <a:lvl6pPr marL="2286000" algn="l" defTabSz="457200" rtl="0" eaLnBrk="1" latinLnBrk="0" hangingPunct="1">
         <a:defRPr sz="1800" kern="1200">
           <a:solidFill>
             <a:schemeClr val="tx1"/>
@@ -3307,7 +5328,7 @@
           <a:cs typeface="+mn-cs"/>
         </a:defRPr>
       </a:lvl6pPr>
-      <a:lvl7pPr marL="2743200" algn="l" defTabSz="914400" rtl="0" eaLnBrk="1" latinLnBrk="0" hangingPunct="1">
+      <a:lvl7pPr marL="2743200" algn="l" defTabSz="457200" rtl="0" eaLnBrk="1" latinLnBrk="0" hangingPunct="1">
         <a:defRPr sz="1800" kern="1200">
           <a:solidFill>
             <a:schemeClr val="tx1"/>
@@ -3317,7 +5338,7 @@
           <a:cs typeface="+mn-cs"/>
         </a:defRPr>
       </a:lvl7pPr>
-      <a:lvl8pPr marL="3200400" algn="l" defTabSz="914400" rtl="0" eaLnBrk="1" latinLnBrk="0" hangingPunct="1">
+      <a:lvl8pPr marL="3200400" algn="l" defTabSz="457200" rtl="0" eaLnBrk="1" latinLnBrk="0" hangingPunct="1">
         <a:defRPr sz="1800" kern="1200">
           <a:solidFill>
             <a:schemeClr val="tx1"/>
@@ -3327,7 +5348,7 @@
           <a:cs typeface="+mn-cs"/>
         </a:defRPr>
       </a:lvl8pPr>
-      <a:lvl9pPr marL="3657600" algn="l" defTabSz="914400" rtl="0" eaLnBrk="1" latinLnBrk="0" hangingPunct="1">
+      <a:lvl9pPr marL="3657600" algn="l" defTabSz="457200" rtl="0" eaLnBrk="1" latinLnBrk="0" hangingPunct="1">
         <a:defRPr sz="1800" kern="1200">
           <a:solidFill>
             <a:schemeClr val="tx1"/>
@@ -7931,9 +9952,9 @@
 </file>
 
 <file path=ppt/theme/theme1.xml><?xml version="1.0" encoding="utf-8"?>
-<a:theme xmlns:a="http://schemas.openxmlformats.org/drawingml/2006/main" name="Office Theme">
+<a:theme xmlns:a="http://schemas.openxmlformats.org/drawingml/2006/main" name="Slice">
   <a:themeElements>
-    <a:clrScheme name="Office">
+    <a:clrScheme name="Blue">
       <a:dk1>
         <a:sysClr val="windowText" lastClr="000000"/>
       </a:dk1>
@@ -7941,100 +9962,48 @@
         <a:sysClr val="window" lastClr="FFFFFF"/>
       </a:lt1>
       <a:dk2>
-        <a:srgbClr val="44546A"/>
+        <a:srgbClr val="17406D"/>
       </a:dk2>
       <a:lt2>
-        <a:srgbClr val="E7E6E6"/>
+        <a:srgbClr val="DBEFF9"/>
       </a:lt2>
       <a:accent1>
-        <a:srgbClr val="4472C4"/>
+        <a:srgbClr val="0F6FC6"/>
       </a:accent1>
       <a:accent2>
-        <a:srgbClr val="ED7D31"/>
+        <a:srgbClr val="009DD9"/>
       </a:accent2>
       <a:accent3>
-        <a:srgbClr val="A5A5A5"/>
+        <a:srgbClr val="0BD0D9"/>
       </a:accent3>
       <a:accent4>
-        <a:srgbClr val="FFC000"/>
+        <a:srgbClr val="10CF9B"/>
       </a:accent4>
       <a:accent5>
-        <a:srgbClr val="5B9BD5"/>
+        <a:srgbClr val="7CCA62"/>
       </a:accent5>
       <a:accent6>
-        <a:srgbClr val="70AD47"/>
+        <a:srgbClr val="A5C249"/>
       </a:accent6>
       <a:hlink>
-        <a:srgbClr val="0563C1"/>
+        <a:srgbClr val="F49100"/>
       </a:hlink>
       <a:folHlink>
-        <a:srgbClr val="954F72"/>
+        <a:srgbClr val="85DFD0"/>
       </a:folHlink>
     </a:clrScheme>
-    <a:fontScheme name="Office">
+    <a:fontScheme name="Slice">
       <a:majorFont>
-        <a:latin typeface="Calibri Light" panose="020F0302020204030204"/>
+        <a:latin typeface="Century Gothic" panose="020B0502020202020204"/>
         <a:ea typeface=""/>
         <a:cs typeface=""/>
-        <a:font script="Jpan" typeface="游ゴシック Light"/>
-        <a:font script="Hang" typeface="맑은 고딕"/>
-        <a:font script="Hans" typeface="等线 Light"/>
-        <a:font script="Hant" typeface="新細明體"/>
-        <a:font script="Arab" typeface="Times New Roman"/>
-        <a:font script="Hebr" typeface="Times New Roman"/>
-        <a:font script="Thai" typeface="Angsana New"/>
-        <a:font script="Ethi" typeface="Nyala"/>
-        <a:font script="Beng" typeface="Vrinda"/>
-        <a:font script="Gujr" typeface="Shruti"/>
-        <a:font script="Khmr" typeface="MoolBoran"/>
-        <a:font script="Knda" typeface="Tunga"/>
-        <a:font script="Guru" typeface="Raavi"/>
-        <a:font script="Cans" typeface="Euphemia"/>
-        <a:font script="Cher" typeface="Plantagenet Cherokee"/>
-        <a:font script="Yiii" typeface="Microsoft Yi Baiti"/>
-        <a:font script="Tibt" typeface="Microsoft Himalaya"/>
-        <a:font script="Thaa" typeface="MV Boli"/>
-        <a:font script="Deva" typeface="Mangal"/>
-        <a:font script="Telu" typeface="Gautami"/>
-        <a:font script="Taml" typeface="Latha"/>
-        <a:font script="Syrc" typeface="Estrangelo Edessa"/>
-        <a:font script="Orya" typeface="Kalinga"/>
-        <a:font script="Mlym" typeface="Kartika"/>
-        <a:font script="Laoo" typeface="DokChampa"/>
-        <a:font script="Sinh" typeface="Iskoola Pota"/>
-        <a:font script="Mong" typeface="Mongolian Baiti"/>
-        <a:font script="Viet" typeface="Times New Roman"/>
-        <a:font script="Uigh" typeface="Microsoft Uighur"/>
-        <a:font script="Geor" typeface="Sylfaen"/>
-        <a:font script="Armn" typeface="Arial"/>
-        <a:font script="Bugi" typeface="Leelawadee UI"/>
-        <a:font script="Bopo" typeface="Microsoft JhengHei"/>
-        <a:font script="Java" typeface="Javanese Text"/>
-        <a:font script="Lisu" typeface="Segoe UI"/>
-        <a:font script="Mymr" typeface="Myanmar Text"/>
-        <a:font script="Nkoo" typeface="Ebrima"/>
-        <a:font script="Olck" typeface="Nirmala UI"/>
-        <a:font script="Osma" typeface="Ebrima"/>
-        <a:font script="Phag" typeface="Phagspa"/>
-        <a:font script="Syrn" typeface="Estrangelo Edessa"/>
-        <a:font script="Syrj" typeface="Estrangelo Edessa"/>
-        <a:font script="Syre" typeface="Estrangelo Edessa"/>
-        <a:font script="Sora" typeface="Nirmala UI"/>
-        <a:font script="Tale" typeface="Microsoft Tai Le"/>
-        <a:font script="Talu" typeface="Microsoft New Tai Lue"/>
-        <a:font script="Tfng" typeface="Ebrima"/>
-      </a:majorFont>
-      <a:minorFont>
-        <a:latin typeface="Calibri" panose="020F0502020204030204"/>
-        <a:ea typeface=""/>
-        <a:cs typeface=""/>
-        <a:font script="Jpan" typeface="游ゴシック"/>
-        <a:font script="Hang" typeface="맑은 고딕"/>
-        <a:font script="Hans" typeface="等线"/>
-        <a:font script="Hant" typeface="新細明體"/>
-        <a:font script="Arab" typeface="Arial"/>
-        <a:font script="Hebr" typeface="Arial"/>
-        <a:font script="Thai" typeface="Cordia New"/>
+        <a:font script="Jpan" typeface="メイリオ"/>
+        <a:font script="Hang" typeface="HY중고딕"/>
+        <a:font script="Hans" typeface="幼圆"/>
+        <a:font script="Hant" typeface="微軟正黑體"/>
+        <a:font script="Arab" typeface="Tahoma"/>
+        <a:font script="Hebr" typeface="Gisha"/>
+        <a:font script="Thai" typeface="DilleniaUPC"/>
         <a:font script="Ethi" typeface="Nyala"/>
         <a:font script="Beng" typeface="Vrinda"/>
         <a:font script="Gujr" typeface="Shruti"/>
@@ -8055,29 +10024,47 @@
         <a:font script="Laoo" typeface="DokChampa"/>
         <a:font script="Sinh" typeface="Iskoola Pota"/>
         <a:font script="Mong" typeface="Mongolian Baiti"/>
-        <a:font script="Viet" typeface="Arial"/>
+        <a:font script="Viet" typeface="Tahoma"/>
         <a:font script="Uigh" typeface="Microsoft Uighur"/>
         <a:font script="Geor" typeface="Sylfaen"/>
-        <a:font script="Armn" typeface="Arial"/>
-        <a:font script="Bugi" typeface="Leelawadee UI"/>
-        <a:font script="Bopo" typeface="Microsoft JhengHei"/>
-        <a:font script="Java" typeface="Javanese Text"/>
-        <a:font script="Lisu" typeface="Segoe UI"/>
-        <a:font script="Mymr" typeface="Myanmar Text"/>
-        <a:font script="Nkoo" typeface="Ebrima"/>
-        <a:font script="Olck" typeface="Nirmala UI"/>
-        <a:font script="Osma" typeface="Ebrima"/>
-        <a:font script="Phag" typeface="Phagspa"/>
-        <a:font script="Syrn" typeface="Estrangelo Edessa"/>
-        <a:font script="Syrj" typeface="Estrangelo Edessa"/>
-        <a:font script="Syre" typeface="Estrangelo Edessa"/>
-        <a:font script="Sora" typeface="Nirmala UI"/>
-        <a:font script="Tale" typeface="Microsoft Tai Le"/>
-        <a:font script="Talu" typeface="Microsoft New Tai Lue"/>
-        <a:font script="Tfng" typeface="Ebrima"/>
+      </a:majorFont>
+      <a:minorFont>
+        <a:latin typeface="Century Gothic" panose="020B0502020202020204"/>
+        <a:ea typeface=""/>
+        <a:cs typeface=""/>
+        <a:font script="Jpan" typeface="メイリオ"/>
+        <a:font script="Hang" typeface="HY중고딕"/>
+        <a:font script="Hans" typeface="幼圆"/>
+        <a:font script="Hant" typeface="微軟正黑體"/>
+        <a:font script="Arab" typeface="Tahoma"/>
+        <a:font script="Hebr" typeface="Gisha"/>
+        <a:font script="Thai" typeface="DilleniaUPC"/>
+        <a:font script="Ethi" typeface="Nyala"/>
+        <a:font script="Beng" typeface="Vrinda"/>
+        <a:font script="Gujr" typeface="Shruti"/>
+        <a:font script="Khmr" typeface="DaunPenh"/>
+        <a:font script="Knda" typeface="Tunga"/>
+        <a:font script="Guru" typeface="Raavi"/>
+        <a:font script="Cans" typeface="Euphemia"/>
+        <a:font script="Cher" typeface="Plantagenet Cherokee"/>
+        <a:font script="Yiii" typeface="Microsoft Yi Baiti"/>
+        <a:font script="Tibt" typeface="Microsoft Himalaya"/>
+        <a:font script="Thaa" typeface="MV Boli"/>
+        <a:font script="Deva" typeface="Mangal"/>
+        <a:font script="Telu" typeface="Gautami"/>
+        <a:font script="Taml" typeface="Latha"/>
+        <a:font script="Syrc" typeface="Estrangelo Edessa"/>
+        <a:font script="Orya" typeface="Kalinga"/>
+        <a:font script="Mlym" typeface="Kartika"/>
+        <a:font script="Laoo" typeface="DokChampa"/>
+        <a:font script="Sinh" typeface="Iskoola Pota"/>
+        <a:font script="Mong" typeface="Mongolian Baiti"/>
+        <a:font script="Viet" typeface="Tahoma"/>
+        <a:font script="Uigh" typeface="Microsoft Uighur"/>
+        <a:font script="Geor" typeface="Sylfaen"/>
       </a:minorFont>
     </a:fontScheme>
-    <a:fmtScheme name="Office">
+    <a:fmtScheme name="Slice">
       <a:fillStyleLst>
         <a:solidFill>
           <a:schemeClr val="phClr"/>
@@ -8086,23 +10073,16 @@
           <a:gsLst>
             <a:gs pos="0">
               <a:schemeClr val="phClr">
+                <a:tint val="62000"/>
+                <a:hueMod val="94000"/>
+                <a:satMod val="140000"/>
                 <a:lumMod val="110000"/>
-                <a:satMod val="105000"/>
-                <a:tint val="67000"/>
-              </a:schemeClr>
-            </a:gs>
-            <a:gs pos="50000">
-              <a:schemeClr val="phClr">
-                <a:lumMod val="105000"/>
-                <a:satMod val="103000"/>
-                <a:tint val="73000"/>
               </a:schemeClr>
             </a:gs>
             <a:gs pos="100000">
               <a:schemeClr val="phClr">
-                <a:lumMod val="105000"/>
-                <a:satMod val="109000"/>
-                <a:tint val="81000"/>
+                <a:tint val="84000"/>
+                <a:satMod val="160000"/>
               </a:schemeClr>
             </a:gs>
           </a:gsLst>
@@ -8112,23 +10092,16 @@
           <a:gsLst>
             <a:gs pos="0">
               <a:schemeClr val="phClr">
-                <a:satMod val="103000"/>
-                <a:lumMod val="102000"/>
-                <a:tint val="94000"/>
-              </a:schemeClr>
-            </a:gs>
-            <a:gs pos="50000">
-              <a:schemeClr val="phClr">
-                <a:satMod val="110000"/>
-                <a:lumMod val="100000"/>
-                <a:shade val="100000"/>
+                <a:tint val="98000"/>
+                <a:hueMod val="94000"/>
+                <a:satMod val="130000"/>
+                <a:lumMod val="128000"/>
               </a:schemeClr>
             </a:gs>
             <a:gs pos="100000">
               <a:schemeClr val="phClr">
-                <a:lumMod val="99000"/>
-                <a:satMod val="120000"/>
-                <a:shade val="78000"/>
+                <a:shade val="94000"/>
+                <a:lumMod val="88000"/>
               </a:schemeClr>
             </a:gs>
           </a:gsLst>
@@ -8136,26 +10109,29 @@
         </a:gradFill>
       </a:fillStyleLst>
       <a:lnStyleLst>
-        <a:ln w="6350" cap="flat" cmpd="sng" algn="ctr">
+        <a:ln w="9525" cap="rnd" cmpd="sng" algn="ctr">
+          <a:solidFill>
+            <a:schemeClr val="phClr">
+              <a:tint val="76000"/>
+              <a:alpha val="60000"/>
+              <a:hueMod val="94000"/>
+            </a:schemeClr>
+          </a:solidFill>
+          <a:prstDash val="solid"/>
+        </a:ln>
+        <a:ln w="15875" cap="rnd" cmpd="sng" algn="ctr">
+          <a:solidFill>
+            <a:schemeClr val="phClr">
+              <a:hueMod val="94000"/>
+            </a:schemeClr>
+          </a:solidFill>
+          <a:prstDash val="solid"/>
+        </a:ln>
+        <a:ln w="28575" cap="rnd" cmpd="sng" algn="ctr">
           <a:solidFill>
             <a:schemeClr val="phClr"/>
           </a:solidFill>
           <a:prstDash val="solid"/>
-          <a:miter lim="800000"/>
-        </a:ln>
-        <a:ln w="12700" cap="flat" cmpd="sng" algn="ctr">
-          <a:solidFill>
-            <a:schemeClr val="phClr"/>
-          </a:solidFill>
-          <a:prstDash val="solid"/>
-          <a:miter lim="800000"/>
-        </a:ln>
-        <a:ln w="19050" cap="flat" cmpd="sng" algn="ctr">
-          <a:solidFill>
-            <a:schemeClr val="phClr"/>
-          </a:solidFill>
-          <a:prstDash val="solid"/>
-          <a:miter lim="800000"/>
         </a:ln>
       </a:lnStyleLst>
       <a:effectStyleLst>
@@ -8163,54 +10139,78 @@
           <a:effectLst/>
         </a:effectStyle>
         <a:effectStyle>
-          <a:effectLst/>
+          <a:effectLst>
+            <a:innerShdw blurRad="25400" dist="12700" dir="13500000">
+              <a:srgbClr val="000000">
+                <a:alpha val="45000"/>
+              </a:srgbClr>
+            </a:innerShdw>
+          </a:effectLst>
         </a:effectStyle>
         <a:effectStyle>
           <a:effectLst>
-            <a:outerShdw blurRad="57150" dist="19050" dir="5400000" algn="ctr" rotWithShape="0">
+            <a:outerShdw blurRad="50800" dist="38100" dir="5400000" rotWithShape="0">
               <a:srgbClr val="000000">
-                <a:alpha val="63000"/>
+                <a:alpha val="46000"/>
               </a:srgbClr>
             </a:outerShdw>
           </a:effectLst>
+          <a:scene3d>
+            <a:camera prst="orthographicFront">
+              <a:rot lat="0" lon="0" rev="0"/>
+            </a:camera>
+            <a:lightRig rig="threePt" dir="t"/>
+          </a:scene3d>
+          <a:sp3d prstMaterial="plastic">
+            <a:bevelT w="25400" h="25400"/>
+          </a:sp3d>
         </a:effectStyle>
       </a:effectStyleLst>
       <a:bgFillStyleLst>
         <a:solidFill>
           <a:schemeClr val="phClr"/>
         </a:solidFill>
-        <a:solidFill>
-          <a:schemeClr val="phClr">
-            <a:tint val="95000"/>
-            <a:satMod val="170000"/>
-          </a:schemeClr>
-        </a:solidFill>
+        <a:gradFill rotWithShape="1">
+          <a:gsLst>
+            <a:gs pos="10000">
+              <a:schemeClr val="phClr">
+                <a:tint val="97000"/>
+                <a:hueMod val="92000"/>
+                <a:satMod val="169000"/>
+                <a:lumMod val="164000"/>
+              </a:schemeClr>
+            </a:gs>
+            <a:gs pos="100000">
+              <a:schemeClr val="phClr">
+                <a:shade val="96000"/>
+                <a:satMod val="120000"/>
+                <a:lumMod val="90000"/>
+              </a:schemeClr>
+            </a:gs>
+          </a:gsLst>
+          <a:lin ang="6120000" scaled="1"/>
+        </a:gradFill>
         <a:gradFill rotWithShape="1">
           <a:gsLst>
             <a:gs pos="0">
               <a:schemeClr val="phClr">
-                <a:tint val="93000"/>
-                <a:satMod val="150000"/>
-                <a:shade val="98000"/>
-                <a:lumMod val="102000"/>
-              </a:schemeClr>
-            </a:gs>
-            <a:gs pos="50000">
-              <a:schemeClr val="phClr">
-                <a:tint val="98000"/>
-                <a:satMod val="130000"/>
-                <a:shade val="90000"/>
-                <a:lumMod val="103000"/>
+                <a:tint val="97000"/>
+                <a:hueMod val="92000"/>
+                <a:satMod val="169000"/>
+                <a:lumMod val="164000"/>
               </a:schemeClr>
             </a:gs>
             <a:gs pos="100000">
               <a:schemeClr val="phClr">
-                <a:shade val="63000"/>
+                <a:shade val="96000"/>
                 <a:satMod val="120000"/>
+                <a:lumMod val="90000"/>
               </a:schemeClr>
             </a:gs>
           </a:gsLst>
-          <a:lin ang="5400000" scaled="0"/>
+          <a:path path="circle">
+            <a:fillToRect b="100000"/>
+          </a:path>
         </a:gradFill>
       </a:bgFillStyleLst>
     </a:fmtScheme>
@@ -8219,7 +10219,7 @@
   <a:extraClrSchemeLst/>
   <a:extLst>
     <a:ext uri="{05A4C25C-085E-4340-85A3-A5531E510DB2}">
-      <thm15:themeFamily xmlns:thm15="http://schemas.microsoft.com/office/thememl/2012/main" name="Office Theme" id="{62F939B6-93AF-4DB8-9C6B-D6C7DFDC589F}" vid="{4A3C46E8-61CC-4603-A589-7422A47A8E4A}"/>
+      <thm15:themeFamily xmlns:thm15="http://schemas.microsoft.com/office/thememl/2012/main" name="Slice" id="{0507925B-6AC9-4358-8E18-C330545D08F8}" vid="{13FEC7C6-62A9-40C4-99D2-581AACACAA2F}"/>
     </a:ext>
   </a:extLst>
 </a:theme>
